--- a/projects/01-penalty-analysis/slides.pptx
+++ b/projects/01-penalty-analysis/slides.pptx
@@ -5,20 +5,20 @@
     <p:sldMasterId id="2147483648" r:id="rId1"/>
   </p:sldMasterIdLst>
   <p:sldIdLst>
-    <p:sldId id="256" r:id="rId2"/>
-    <p:sldId id="257" r:id="rId3"/>
-    <p:sldId id="258" r:id="rId4"/>
-    <p:sldId id="259" r:id="rId5"/>
-    <p:sldId id="260" r:id="rId6"/>
-    <p:sldId id="261" r:id="rId7"/>
-    <p:sldId id="262" r:id="rId8"/>
-    <p:sldId id="263" r:id="rId9"/>
-    <p:sldId id="264" r:id="rId10"/>
-    <p:sldId id="265" r:id="rId11"/>
-    <p:sldId id="266" r:id="rId12"/>
-    <p:sldId id="267" r:id="rId13"/>
+    <p:sldId id="256" r:id="rId7"/>
+    <p:sldId id="257" r:id="rId8"/>
+    <p:sldId id="258" r:id="rId9"/>
+    <p:sldId id="259" r:id="rId10"/>
+    <p:sldId id="260" r:id="rId11"/>
+    <p:sldId id="261" r:id="rId12"/>
+    <p:sldId id="262" r:id="rId13"/>
+    <p:sldId id="263" r:id="rId14"/>
+    <p:sldId id="264" r:id="rId15"/>
+    <p:sldId id="265" r:id="rId16"/>
+    <p:sldId id="266" r:id="rId17"/>
+    <p:sldId id="267" r:id="rId18"/>
   </p:sldIdLst>
-  <p:sldSz cx="12192000" cy="6858000"/>
+  <p:sldSz cx="12191695" cy="6858000" type="screen4x3"/>
   <p:notesSz cx="6858000" cy="9144000"/>
   <p:defaultTextStyle>
     <a:defPPr>
@@ -115,22 +115,6 @@
       </a:defRPr>
     </a:lvl9pPr>
   </p:defaultTextStyle>
-  <p:extLst>
-    <p:ext uri="{EFAFB233-063F-42B5-8137-9DF3F51BA10A}">
-      <p15:sldGuideLst xmlns:p15="http://schemas.microsoft.com/office/powerpoint/2012/main">
-        <p15:guide id="1" orient="horz" pos="2160">
-          <p15:clr>
-            <a:srgbClr val="A4A3A4"/>
-          </p15:clr>
-        </p15:guide>
-        <p15:guide id="2" pos="2880">
-          <p15:clr>
-            <a:srgbClr val="A4A3A4"/>
-          </p15:clr>
-        </p15:guide>
-      </p15:sldGuideLst>
-    </p:ext>
-  </p:extLst>
 </p:presentation>
 </file>
 
@@ -172,9 +156,10 @@
           <a:lstStyle/>
           <a:p>
             <a:r>
-              <a:rPr lang="en-US"/>
+              <a:rPr lang="en-US" smtClean="0"/>
               <a:t>Click to edit Master title style</a:t>
             </a:r>
+            <a:endParaRPr lang="en-US"/>
           </a:p>
         </p:txBody>
       </p:sp>
@@ -290,9 +275,10 @@
           </a:lstStyle>
           <a:p>
             <a:r>
-              <a:rPr lang="en-US"/>
+              <a:rPr lang="en-US" smtClean="0"/>
               <a:t>Click to edit Master subtitle style</a:t>
             </a:r>
+            <a:endParaRPr lang="en-US"/>
           </a:p>
         </p:txBody>
       </p:sp>
@@ -313,7 +299,7 @@
           <a:p>
             <a:fld id="{5BCAD085-E8A6-8845-BD4E-CB4CCA059FC4}" type="datetimeFigureOut">
               <a:rPr lang="en-US" smtClean="0"/>
-              <a:t>5/14/2026</a:t>
+              <a:t>1/27/13</a:t>
             </a:fld>
             <a:endParaRPr lang="en-US"/>
           </a:p>
@@ -407,9 +393,10 @@
           <a:lstStyle/>
           <a:p>
             <a:r>
-              <a:rPr lang="en-US"/>
+              <a:rPr lang="en-US" smtClean="0"/>
               <a:t>Click to edit Master title style</a:t>
             </a:r>
+            <a:endParaRPr lang="en-US"/>
           </a:p>
         </p:txBody>
       </p:sp>
@@ -430,37 +417,38 @@
           <a:p>
             <a:pPr lvl="0"/>
             <a:r>
-              <a:rPr lang="en-US"/>
+              <a:rPr lang="en-US" smtClean="0"/>
               <a:t>Click to edit Master text styles</a:t>
             </a:r>
           </a:p>
           <a:p>
             <a:pPr lvl="1"/>
             <a:r>
-              <a:rPr lang="en-US"/>
+              <a:rPr lang="en-US" smtClean="0"/>
               <a:t>Second level</a:t>
             </a:r>
           </a:p>
           <a:p>
             <a:pPr lvl="2"/>
             <a:r>
-              <a:rPr lang="en-US"/>
+              <a:rPr lang="en-US" smtClean="0"/>
               <a:t>Third level</a:t>
             </a:r>
           </a:p>
           <a:p>
             <a:pPr lvl="3"/>
             <a:r>
-              <a:rPr lang="en-US"/>
+              <a:rPr lang="en-US" smtClean="0"/>
               <a:t>Fourth level</a:t>
             </a:r>
           </a:p>
           <a:p>
             <a:pPr lvl="4"/>
             <a:r>
-              <a:rPr lang="en-US"/>
+              <a:rPr lang="en-US" smtClean="0"/>
               <a:t>Fifth level</a:t>
             </a:r>
+            <a:endParaRPr lang="en-US"/>
           </a:p>
         </p:txBody>
       </p:sp>
@@ -481,7 +469,7 @@
           <a:p>
             <a:fld id="{5BCAD085-E8A6-8845-BD4E-CB4CCA059FC4}" type="datetimeFigureOut">
               <a:rPr lang="en-US" smtClean="0"/>
-              <a:t>5/14/2026</a:t>
+              <a:t>1/27/13</a:t>
             </a:fld>
             <a:endParaRPr lang="en-US"/>
           </a:p>
@@ -580,9 +568,10 @@
           <a:lstStyle/>
           <a:p>
             <a:r>
-              <a:rPr lang="en-US"/>
+              <a:rPr lang="en-US" smtClean="0"/>
               <a:t>Click to edit Master title style</a:t>
             </a:r>
+            <a:endParaRPr lang="en-US"/>
           </a:p>
         </p:txBody>
       </p:sp>
@@ -608,37 +597,38 @@
           <a:p>
             <a:pPr lvl="0"/>
             <a:r>
-              <a:rPr lang="en-US"/>
+              <a:rPr lang="en-US" smtClean="0"/>
               <a:t>Click to edit Master text styles</a:t>
             </a:r>
           </a:p>
           <a:p>
             <a:pPr lvl="1"/>
             <a:r>
-              <a:rPr lang="en-US"/>
+              <a:rPr lang="en-US" smtClean="0"/>
               <a:t>Second level</a:t>
             </a:r>
           </a:p>
           <a:p>
             <a:pPr lvl="2"/>
             <a:r>
-              <a:rPr lang="en-US"/>
+              <a:rPr lang="en-US" smtClean="0"/>
               <a:t>Third level</a:t>
             </a:r>
           </a:p>
           <a:p>
             <a:pPr lvl="3"/>
             <a:r>
-              <a:rPr lang="en-US"/>
+              <a:rPr lang="en-US" smtClean="0"/>
               <a:t>Fourth level</a:t>
             </a:r>
           </a:p>
           <a:p>
             <a:pPr lvl="4"/>
             <a:r>
-              <a:rPr lang="en-US"/>
+              <a:rPr lang="en-US" smtClean="0"/>
               <a:t>Fifth level</a:t>
             </a:r>
+            <a:endParaRPr lang="en-US"/>
           </a:p>
         </p:txBody>
       </p:sp>
@@ -659,7 +649,7 @@
           <a:p>
             <a:fld id="{5BCAD085-E8A6-8845-BD4E-CB4CCA059FC4}" type="datetimeFigureOut">
               <a:rPr lang="en-US" smtClean="0"/>
-              <a:t>5/14/2026</a:t>
+              <a:t>1/27/13</a:t>
             </a:fld>
             <a:endParaRPr lang="en-US"/>
           </a:p>
@@ -753,9 +743,10 @@
           <a:lstStyle/>
           <a:p>
             <a:r>
-              <a:rPr lang="en-US"/>
+              <a:rPr lang="en-US" smtClean="0"/>
               <a:t>Click to edit Master title style</a:t>
             </a:r>
+            <a:endParaRPr lang="en-US"/>
           </a:p>
         </p:txBody>
       </p:sp>
@@ -776,37 +767,38 @@
           <a:p>
             <a:pPr lvl="0"/>
             <a:r>
-              <a:rPr lang="en-US"/>
+              <a:rPr lang="en-US" smtClean="0"/>
               <a:t>Click to edit Master text styles</a:t>
             </a:r>
           </a:p>
           <a:p>
             <a:pPr lvl="1"/>
             <a:r>
-              <a:rPr lang="en-US"/>
+              <a:rPr lang="en-US" smtClean="0"/>
               <a:t>Second level</a:t>
             </a:r>
           </a:p>
           <a:p>
             <a:pPr lvl="2"/>
             <a:r>
-              <a:rPr lang="en-US"/>
+              <a:rPr lang="en-US" smtClean="0"/>
               <a:t>Third level</a:t>
             </a:r>
           </a:p>
           <a:p>
             <a:pPr lvl="3"/>
             <a:r>
-              <a:rPr lang="en-US"/>
+              <a:rPr lang="en-US" smtClean="0"/>
               <a:t>Fourth level</a:t>
             </a:r>
           </a:p>
           <a:p>
             <a:pPr lvl="4"/>
             <a:r>
-              <a:rPr lang="en-US"/>
+              <a:rPr lang="en-US" smtClean="0"/>
               <a:t>Fifth level</a:t>
             </a:r>
+            <a:endParaRPr lang="en-US"/>
           </a:p>
         </p:txBody>
       </p:sp>
@@ -827,7 +819,7 @@
           <a:p>
             <a:fld id="{5BCAD085-E8A6-8845-BD4E-CB4CCA059FC4}" type="datetimeFigureOut">
               <a:rPr lang="en-US" smtClean="0"/>
-              <a:t>5/14/2026</a:t>
+              <a:t>1/27/13</a:t>
             </a:fld>
             <a:endParaRPr lang="en-US"/>
           </a:p>
@@ -930,9 +922,10 @@
           </a:lstStyle>
           <a:p>
             <a:r>
-              <a:rPr lang="en-US"/>
+              <a:rPr lang="en-US" smtClean="0"/>
               <a:t>Click to edit Master title style</a:t>
             </a:r>
+            <a:endParaRPr lang="en-US"/>
           </a:p>
         </p:txBody>
       </p:sp>
@@ -1049,7 +1042,7 @@
           <a:p>
             <a:pPr lvl="0"/>
             <a:r>
-              <a:rPr lang="en-US"/>
+              <a:rPr lang="en-US" smtClean="0"/>
               <a:t>Click to edit Master text styles</a:t>
             </a:r>
           </a:p>
@@ -1072,7 +1065,7 @@
           <a:p>
             <a:fld id="{5BCAD085-E8A6-8845-BD4E-CB4CCA059FC4}" type="datetimeFigureOut">
               <a:rPr lang="en-US" smtClean="0"/>
-              <a:t>5/14/2026</a:t>
+              <a:t>1/27/13</a:t>
             </a:fld>
             <a:endParaRPr lang="en-US"/>
           </a:p>
@@ -1166,9 +1159,10 @@
           <a:lstStyle/>
           <a:p>
             <a:r>
-              <a:rPr lang="en-US"/>
+              <a:rPr lang="en-US" smtClean="0"/>
               <a:t>Click to edit Master title style</a:t>
             </a:r>
+            <a:endParaRPr lang="en-US"/>
           </a:p>
         </p:txBody>
       </p:sp>
@@ -1222,37 +1216,38 @@
           <a:p>
             <a:pPr lvl="0"/>
             <a:r>
-              <a:rPr lang="en-US"/>
+              <a:rPr lang="en-US" smtClean="0"/>
               <a:t>Click to edit Master text styles</a:t>
             </a:r>
           </a:p>
           <a:p>
             <a:pPr lvl="1"/>
             <a:r>
-              <a:rPr lang="en-US"/>
+              <a:rPr lang="en-US" smtClean="0"/>
               <a:t>Second level</a:t>
             </a:r>
           </a:p>
           <a:p>
             <a:pPr lvl="2"/>
             <a:r>
-              <a:rPr lang="en-US"/>
+              <a:rPr lang="en-US" smtClean="0"/>
               <a:t>Third level</a:t>
             </a:r>
           </a:p>
           <a:p>
             <a:pPr lvl="3"/>
             <a:r>
-              <a:rPr lang="en-US"/>
+              <a:rPr lang="en-US" smtClean="0"/>
               <a:t>Fourth level</a:t>
             </a:r>
           </a:p>
           <a:p>
             <a:pPr lvl="4"/>
             <a:r>
-              <a:rPr lang="en-US"/>
+              <a:rPr lang="en-US" smtClean="0"/>
               <a:t>Fifth level</a:t>
             </a:r>
+            <a:endParaRPr lang="en-US"/>
           </a:p>
         </p:txBody>
       </p:sp>
@@ -1306,37 +1301,38 @@
           <a:p>
             <a:pPr lvl="0"/>
             <a:r>
-              <a:rPr lang="en-US"/>
+              <a:rPr lang="en-US" smtClean="0"/>
               <a:t>Click to edit Master text styles</a:t>
             </a:r>
           </a:p>
           <a:p>
             <a:pPr lvl="1"/>
             <a:r>
-              <a:rPr lang="en-US"/>
+              <a:rPr lang="en-US" smtClean="0"/>
               <a:t>Second level</a:t>
             </a:r>
           </a:p>
           <a:p>
             <a:pPr lvl="2"/>
             <a:r>
-              <a:rPr lang="en-US"/>
+              <a:rPr lang="en-US" smtClean="0"/>
               <a:t>Third level</a:t>
             </a:r>
           </a:p>
           <a:p>
             <a:pPr lvl="3"/>
             <a:r>
-              <a:rPr lang="en-US"/>
+              <a:rPr lang="en-US" smtClean="0"/>
               <a:t>Fourth level</a:t>
             </a:r>
           </a:p>
           <a:p>
             <a:pPr lvl="4"/>
             <a:r>
-              <a:rPr lang="en-US"/>
+              <a:rPr lang="en-US" smtClean="0"/>
               <a:t>Fifth level</a:t>
             </a:r>
+            <a:endParaRPr lang="en-US"/>
           </a:p>
         </p:txBody>
       </p:sp>
@@ -1357,7 +1353,7 @@
           <a:p>
             <a:fld id="{5BCAD085-E8A6-8845-BD4E-CB4CCA059FC4}" type="datetimeFigureOut">
               <a:rPr lang="en-US" smtClean="0"/>
-              <a:t>5/14/2026</a:t>
+              <a:t>1/27/13</a:t>
             </a:fld>
             <a:endParaRPr lang="en-US"/>
           </a:p>
@@ -1455,9 +1451,10 @@
           </a:lstStyle>
           <a:p>
             <a:r>
-              <a:rPr lang="en-US"/>
+              <a:rPr lang="en-US" smtClean="0"/>
               <a:t>Click to edit Master title style</a:t>
             </a:r>
+            <a:endParaRPr lang="en-US"/>
           </a:p>
         </p:txBody>
       </p:sp>
@@ -1520,7 +1517,7 @@
           <a:p>
             <a:pPr lvl="0"/>
             <a:r>
-              <a:rPr lang="en-US"/>
+              <a:rPr lang="en-US" smtClean="0"/>
               <a:t>Click to edit Master text styles</a:t>
             </a:r>
           </a:p>
@@ -1576,37 +1573,38 @@
           <a:p>
             <a:pPr lvl="0"/>
             <a:r>
-              <a:rPr lang="en-US"/>
+              <a:rPr lang="en-US" smtClean="0"/>
               <a:t>Click to edit Master text styles</a:t>
             </a:r>
           </a:p>
           <a:p>
             <a:pPr lvl="1"/>
             <a:r>
-              <a:rPr lang="en-US"/>
+              <a:rPr lang="en-US" smtClean="0"/>
               <a:t>Second level</a:t>
             </a:r>
           </a:p>
           <a:p>
             <a:pPr lvl="2"/>
             <a:r>
-              <a:rPr lang="en-US"/>
+              <a:rPr lang="en-US" smtClean="0"/>
               <a:t>Third level</a:t>
             </a:r>
           </a:p>
           <a:p>
             <a:pPr lvl="3"/>
             <a:r>
-              <a:rPr lang="en-US"/>
+              <a:rPr lang="en-US" smtClean="0"/>
               <a:t>Fourth level</a:t>
             </a:r>
           </a:p>
           <a:p>
             <a:pPr lvl="4"/>
             <a:r>
-              <a:rPr lang="en-US"/>
+              <a:rPr lang="en-US" smtClean="0"/>
               <a:t>Fifth level</a:t>
             </a:r>
+            <a:endParaRPr lang="en-US"/>
           </a:p>
         </p:txBody>
       </p:sp>
@@ -1669,7 +1667,7 @@
           <a:p>
             <a:pPr lvl="0"/>
             <a:r>
-              <a:rPr lang="en-US"/>
+              <a:rPr lang="en-US" smtClean="0"/>
               <a:t>Click to edit Master text styles</a:t>
             </a:r>
           </a:p>
@@ -1725,37 +1723,38 @@
           <a:p>
             <a:pPr lvl="0"/>
             <a:r>
-              <a:rPr lang="en-US"/>
+              <a:rPr lang="en-US" smtClean="0"/>
               <a:t>Click to edit Master text styles</a:t>
             </a:r>
           </a:p>
           <a:p>
             <a:pPr lvl="1"/>
             <a:r>
-              <a:rPr lang="en-US"/>
+              <a:rPr lang="en-US" smtClean="0"/>
               <a:t>Second level</a:t>
             </a:r>
           </a:p>
           <a:p>
             <a:pPr lvl="2"/>
             <a:r>
-              <a:rPr lang="en-US"/>
+              <a:rPr lang="en-US" smtClean="0"/>
               <a:t>Third level</a:t>
             </a:r>
           </a:p>
           <a:p>
             <a:pPr lvl="3"/>
             <a:r>
-              <a:rPr lang="en-US"/>
+              <a:rPr lang="en-US" smtClean="0"/>
               <a:t>Fourth level</a:t>
             </a:r>
           </a:p>
           <a:p>
             <a:pPr lvl="4"/>
             <a:r>
-              <a:rPr lang="en-US"/>
+              <a:rPr lang="en-US" smtClean="0"/>
               <a:t>Fifth level</a:t>
             </a:r>
+            <a:endParaRPr lang="en-US"/>
           </a:p>
         </p:txBody>
       </p:sp>
@@ -1776,7 +1775,7 @@
           <a:p>
             <a:fld id="{5BCAD085-E8A6-8845-BD4E-CB4CCA059FC4}" type="datetimeFigureOut">
               <a:rPr lang="en-US" smtClean="0"/>
-              <a:t>5/14/2026</a:t>
+              <a:t>1/27/13</a:t>
             </a:fld>
             <a:endParaRPr lang="en-US"/>
           </a:p>
@@ -1870,9 +1869,10 @@
           <a:lstStyle/>
           <a:p>
             <a:r>
-              <a:rPr lang="en-US"/>
+              <a:rPr lang="en-US" smtClean="0"/>
               <a:t>Click to edit Master title style</a:t>
             </a:r>
+            <a:endParaRPr lang="en-US"/>
           </a:p>
         </p:txBody>
       </p:sp>
@@ -1893,7 +1893,7 @@
           <a:p>
             <a:fld id="{5BCAD085-E8A6-8845-BD4E-CB4CCA059FC4}" type="datetimeFigureOut">
               <a:rPr lang="en-US" smtClean="0"/>
-              <a:t>5/14/2026</a:t>
+              <a:t>1/27/13</a:t>
             </a:fld>
             <a:endParaRPr lang="en-US"/>
           </a:p>
@@ -1988,7 +1988,7 @@
           <a:p>
             <a:fld id="{5BCAD085-E8A6-8845-BD4E-CB4CCA059FC4}" type="datetimeFigureOut">
               <a:rPr lang="en-US" smtClean="0"/>
-              <a:t>5/14/2026</a:t>
+              <a:t>1/27/13</a:t>
             </a:fld>
             <a:endParaRPr lang="en-US"/>
           </a:p>
@@ -2091,9 +2091,10 @@
           </a:lstStyle>
           <a:p>
             <a:r>
-              <a:rPr lang="en-US"/>
+              <a:rPr lang="en-US" smtClean="0"/>
               <a:t>Click to edit Master title style</a:t>
             </a:r>
+            <a:endParaRPr lang="en-US"/>
           </a:p>
         </p:txBody>
       </p:sp>
@@ -2147,37 +2148,38 @@
           <a:p>
             <a:pPr lvl="0"/>
             <a:r>
-              <a:rPr lang="en-US"/>
+              <a:rPr lang="en-US" smtClean="0"/>
               <a:t>Click to edit Master text styles</a:t>
             </a:r>
           </a:p>
           <a:p>
             <a:pPr lvl="1"/>
             <a:r>
-              <a:rPr lang="en-US"/>
+              <a:rPr lang="en-US" smtClean="0"/>
               <a:t>Second level</a:t>
             </a:r>
           </a:p>
           <a:p>
             <a:pPr lvl="2"/>
             <a:r>
-              <a:rPr lang="en-US"/>
+              <a:rPr lang="en-US" smtClean="0"/>
               <a:t>Third level</a:t>
             </a:r>
           </a:p>
           <a:p>
             <a:pPr lvl="3"/>
             <a:r>
-              <a:rPr lang="en-US"/>
+              <a:rPr lang="en-US" smtClean="0"/>
               <a:t>Fourth level</a:t>
             </a:r>
           </a:p>
           <a:p>
             <a:pPr lvl="4"/>
             <a:r>
-              <a:rPr lang="en-US"/>
+              <a:rPr lang="en-US" smtClean="0"/>
               <a:t>Fifth level</a:t>
             </a:r>
+            <a:endParaRPr lang="en-US"/>
           </a:p>
         </p:txBody>
       </p:sp>
@@ -2240,7 +2242,7 @@
           <a:p>
             <a:pPr lvl="0"/>
             <a:r>
-              <a:rPr lang="en-US"/>
+              <a:rPr lang="en-US" smtClean="0"/>
               <a:t>Click to edit Master text styles</a:t>
             </a:r>
           </a:p>
@@ -2263,7 +2265,7 @@
           <a:p>
             <a:fld id="{5BCAD085-E8A6-8845-BD4E-CB4CCA059FC4}" type="datetimeFigureOut">
               <a:rPr lang="en-US" smtClean="0"/>
-              <a:t>5/14/2026</a:t>
+              <a:t>1/27/13</a:t>
             </a:fld>
             <a:endParaRPr lang="en-US"/>
           </a:p>
@@ -2366,9 +2368,10 @@
           </a:lstStyle>
           <a:p>
             <a:r>
-              <a:rPr lang="en-US"/>
+              <a:rPr lang="en-US" smtClean="0"/>
               <a:t>Click to edit Master title style</a:t>
             </a:r>
+            <a:endParaRPr lang="en-US"/>
           </a:p>
         </p:txBody>
       </p:sp>
@@ -2492,7 +2495,7 @@
           <a:p>
             <a:pPr lvl="0"/>
             <a:r>
-              <a:rPr lang="en-US"/>
+              <a:rPr lang="en-US" smtClean="0"/>
               <a:t>Click to edit Master text styles</a:t>
             </a:r>
           </a:p>
@@ -2515,7 +2518,7 @@
           <a:p>
             <a:fld id="{5BCAD085-E8A6-8845-BD4E-CB4CCA059FC4}" type="datetimeFigureOut">
               <a:rPr lang="en-US" smtClean="0"/>
-              <a:t>5/14/2026</a:t>
+              <a:t>1/27/13</a:t>
             </a:fld>
             <a:endParaRPr lang="en-US"/>
           </a:p>
@@ -2624,9 +2627,10 @@
           <a:lstStyle/>
           <a:p>
             <a:r>
-              <a:rPr lang="en-US"/>
+              <a:rPr lang="en-US" smtClean="0"/>
               <a:t>Click to edit Master title style</a:t>
             </a:r>
+            <a:endParaRPr lang="en-US"/>
           </a:p>
         </p:txBody>
       </p:sp>
@@ -2657,37 +2661,38 @@
           <a:p>
             <a:pPr lvl="0"/>
             <a:r>
-              <a:rPr lang="en-US"/>
+              <a:rPr lang="en-US" smtClean="0"/>
               <a:t>Click to edit Master text styles</a:t>
             </a:r>
           </a:p>
           <a:p>
             <a:pPr lvl="1"/>
             <a:r>
-              <a:rPr lang="en-US"/>
+              <a:rPr lang="en-US" smtClean="0"/>
               <a:t>Second level</a:t>
             </a:r>
           </a:p>
           <a:p>
             <a:pPr lvl="2"/>
             <a:r>
-              <a:rPr lang="en-US"/>
+              <a:rPr lang="en-US" smtClean="0"/>
               <a:t>Third level</a:t>
             </a:r>
           </a:p>
           <a:p>
             <a:pPr lvl="3"/>
             <a:r>
-              <a:rPr lang="en-US"/>
+              <a:rPr lang="en-US" smtClean="0"/>
               <a:t>Fourth level</a:t>
             </a:r>
           </a:p>
           <a:p>
             <a:pPr lvl="4"/>
             <a:r>
-              <a:rPr lang="en-US"/>
+              <a:rPr lang="en-US" smtClean="0"/>
               <a:t>Fifth level</a:t>
             </a:r>
+            <a:endParaRPr lang="en-US"/>
           </a:p>
         </p:txBody>
       </p:sp>
@@ -2726,7 +2731,7 @@
           <a:p>
             <a:fld id="{5BCAD085-E8A6-8845-BD4E-CB4CCA059FC4}" type="datetimeFigureOut">
               <a:rPr lang="en-US" smtClean="0"/>
-              <a:t>5/14/2026</a:t>
+              <a:t>1/27/13</a:t>
             </a:fld>
             <a:endParaRPr lang="en-US"/>
           </a:p>
@@ -3085,7 +3090,7 @@
 </file>
 
 <file path=ppt/slides/slide1.xml><?xml version="1.0" encoding="utf-8"?>
-<p:sld xmlns:a="http://schemas.openxmlformats.org/drawingml/2006/main" xmlns:r="http://schemas.openxmlformats.org/officeDocument/2006/relationships" xmlns:p="http://schemas.openxmlformats.org/presentationml/2006/main">
+<p:sld xmlns:a="http://schemas.openxmlformats.org/drawingml/2006/main" xmlns:p="http://schemas.openxmlformats.org/presentationml/2006/main" xmlns:r="http://schemas.openxmlformats.org/officeDocument/2006/relationships">
   <p:cSld>
     <p:bg>
       <p:bgPr>
@@ -3101,14 +3106,7 @@
         <p:cNvGrpSpPr/>
         <p:nvPr/>
       </p:nvGrpSpPr>
-      <p:grpSpPr>
-        <a:xfrm>
-          <a:off x="0" y="0"/>
-          <a:ext cx="0" cy="0"/>
-          <a:chOff x="0" y="0"/>
-          <a:chExt cx="0" cy="0"/>
-        </a:xfrm>
-      </p:grpSpPr>
+      <p:grpSpPr/>
       <p:sp>
         <p:nvSpPr>
           <p:cNvPr id="2" name="TextBox 1"/>
@@ -3117,23 +3115,23 @@
         </p:nvSpPr>
         <p:spPr>
           <a:xfrm>
-            <a:off x="411480" y="292608"/>
-            <a:ext cx="1828800" cy="457200"/>
-          </a:xfrm>
-          <a:prstGeom prst="rect">
-            <a:avLst/>
-          </a:prstGeom>
-          <a:noFill/>
-        </p:spPr>
-        <p:txBody>
-          <a:bodyPr wrap="none" lIns="0" tIns="0" rIns="0" bIns="0">
+            <a:off x="411480" y="6355080"/>
+            <a:ext cx="1828800" cy="365760"/>
+          </a:xfrm>
+          <a:prstGeom prst="rect">
+            <a:avLst/>
+          </a:prstGeom>
+          <a:noFill/>
+        </p:spPr>
+        <p:txBody>
+          <a:bodyPr wrap="none" lIns="0" rIns="0" tIns="0" bIns="0">
             <a:spAutoFit/>
           </a:bodyPr>
           <a:lstStyle/>
           <a:p>
             <a:pPr algn="l"/>
             <a:r>
-              <a:rPr sz="2000">
+              <a:rPr sz="1600">
                 <a:solidFill>
                   <a:srgbClr val="E8EFE8"/>
                 </a:solidFill>
@@ -3142,7 +3140,7 @@
               <a:t>ren</a:t>
             </a:r>
             <a:r>
-              <a:rPr sz="2000">
+              <a:rPr sz="1600">
                 <a:solidFill>
                   <a:srgbClr val="C1FF72"/>
                 </a:solidFill>
@@ -3161,16 +3159,51 @@
         </p:nvSpPr>
         <p:spPr>
           <a:xfrm>
+            <a:off x="640080" y="1828800"/>
+            <a:ext cx="10972800" cy="274320"/>
+          </a:xfrm>
+          <a:prstGeom prst="rect">
+            <a:avLst/>
+          </a:prstGeom>
+          <a:noFill/>
+        </p:spPr>
+        <p:txBody>
+          <a:bodyPr wrap="square" lIns="0" rIns="0" tIns="0" bIns="0" anchor="t">
+            <a:spAutoFit/>
+          </a:bodyPr>
+          <a:lstStyle/>
+          <a:p>
+            <a:pPr algn="l"/>
+            <a:r>
+              <a:rPr sz="1100" b="0" i="0">
+                <a:solidFill>
+                  <a:srgbClr val="C1FF72"/>
+                </a:solidFill>
+                <a:latin typeface="JetBrains Mono"/>
+              </a:rPr>
+              <a:t>RESEARCH · 01</a:t>
+            </a:r>
+          </a:p>
+        </p:txBody>
+      </p:sp>
+      <p:sp>
+        <p:nvSpPr>
+          <p:cNvPr id="4" name="TextBox 3"/>
+          <p:cNvSpPr txBox="1"/>
+          <p:nvPr/>
+        </p:nvSpPr>
+        <p:spPr>
+          <a:xfrm>
             <a:off x="640080" y="2286000"/>
-            <a:ext cx="10972800" cy="2286000"/>
-          </a:xfrm>
-          <a:prstGeom prst="rect">
-            <a:avLst/>
-          </a:prstGeom>
-          <a:noFill/>
-        </p:spPr>
-        <p:txBody>
-          <a:bodyPr wrap="square" lIns="0" tIns="0" rIns="0" bIns="0" anchor="t">
+            <a:ext cx="10972800" cy="2377440"/>
+          </a:xfrm>
+          <a:prstGeom prst="rect">
+            <a:avLst/>
+          </a:prstGeom>
+          <a:noFill/>
+        </p:spPr>
+        <p:txBody>
+          <a:bodyPr wrap="square" lIns="0" rIns="0" tIns="0" bIns="0" anchor="t">
             <a:spAutoFit/>
           </a:bodyPr>
           <a:lstStyle/>
@@ -3208,22 +3241,22 @@
       </p:sp>
       <p:sp>
         <p:nvSpPr>
-          <p:cNvPr id="4" name="TextBox 3"/>
-          <p:cNvSpPr txBox="1"/>
-          <p:nvPr/>
-        </p:nvSpPr>
-        <p:spPr>
-          <a:xfrm>
-            <a:off x="640080" y="4663440"/>
-            <a:ext cx="10972800" cy="274320"/>
-          </a:xfrm>
-          <a:prstGeom prst="rect">
-            <a:avLst/>
-          </a:prstGeom>
-          <a:noFill/>
-        </p:spPr>
-        <p:txBody>
-          <a:bodyPr wrap="square" lIns="0" tIns="0" rIns="0" bIns="0" anchor="t">
+          <p:cNvPr id="5" name="TextBox 4"/>
+          <p:cNvSpPr txBox="1"/>
+          <p:nvPr/>
+        </p:nvSpPr>
+        <p:spPr>
+          <a:xfrm>
+            <a:off x="640080" y="4754880"/>
+            <a:ext cx="10972800" cy="365760"/>
+          </a:xfrm>
+          <a:prstGeom prst="rect">
+            <a:avLst/>
+          </a:prstGeom>
+          <a:noFill/>
+        </p:spPr>
+        <p:txBody>
+          <a:bodyPr wrap="square" lIns="0" rIns="0" tIns="0" bIns="0" anchor="t">
             <a:spAutoFit/>
           </a:bodyPr>
           <a:lstStyle/>
@@ -3236,29 +3269,29 @@
                 </a:solidFill>
                 <a:latin typeface="JetBrains Mono"/>
               </a:rPr>
-              <a:t>A ONE-TAILED TEST · TOP 5 EUROPEAN LEAGUES</a:t>
-            </a:r>
-          </a:p>
-        </p:txBody>
-      </p:sp>
-      <p:sp>
-        <p:nvSpPr>
-          <p:cNvPr id="5" name="TextBox 4"/>
-          <p:cNvSpPr txBox="1"/>
-          <p:nvPr/>
-        </p:nvSpPr>
-        <p:spPr>
-          <a:xfrm>
-            <a:off x="640080" y="5120640"/>
-            <a:ext cx="10972800" cy="274320"/>
-          </a:xfrm>
-          <a:prstGeom prst="rect">
-            <a:avLst/>
-          </a:prstGeom>
-          <a:noFill/>
-        </p:spPr>
-        <p:txBody>
-          <a:bodyPr wrap="square" lIns="0" tIns="0" rIns="0" bIns="0" anchor="t">
+              <a:t>A ONE-TAILED Z-TEST · TOP 5 EUROPEAN LEAGUES</a:t>
+            </a:r>
+          </a:p>
+        </p:txBody>
+      </p:sp>
+      <p:sp>
+        <p:nvSpPr>
+          <p:cNvPr id="6" name="TextBox 5"/>
+          <p:cNvSpPr txBox="1"/>
+          <p:nvPr/>
+        </p:nvSpPr>
+        <p:spPr>
+          <a:xfrm>
+            <a:off x="640080" y="5212080"/>
+            <a:ext cx="10972800" cy="365760"/>
+          </a:xfrm>
+          <a:prstGeom prst="rect">
+            <a:avLst/>
+          </a:prstGeom>
+          <a:noFill/>
+        </p:spPr>
+        <p:txBody>
+          <a:bodyPr wrap="square" lIns="0" rIns="0" tIns="0" bIns="0" anchor="t">
             <a:spAutoFit/>
           </a:bodyPr>
           <a:lstStyle/>
@@ -3278,13 +3311,13 @@
       </p:sp>
       <p:sp>
         <p:nvSpPr>
-          <p:cNvPr id="6" name="Rectangle 5"/>
+          <p:cNvPr id="7" name="Rectangle 6"/>
           <p:cNvSpPr/>
           <p:nvPr/>
         </p:nvSpPr>
         <p:spPr>
           <a:xfrm>
-            <a:off x="640080" y="5486400"/>
+            <a:off x="640080" y="5623560"/>
             <a:ext cx="1097280" cy="25400"/>
           </a:xfrm>
           <a:prstGeom prst="rect">
@@ -3313,46 +3346,9 @@
           </a:fontRef>
         </p:style>
         <p:txBody>
-          <a:bodyPr lIns="0" tIns="0" rIns="0" bIns="0" rtlCol="0" anchor="ctr"/>
-          <a:lstStyle/>
-          <a:p>
-            <a:endParaRPr/>
-          </a:p>
-        </p:txBody>
-      </p:sp>
-      <p:sp>
-        <p:nvSpPr>
-          <p:cNvPr id="7" name="TextBox 6"/>
-          <p:cNvSpPr txBox="1"/>
-          <p:nvPr/>
-        </p:nvSpPr>
-        <p:spPr>
-          <a:xfrm>
-            <a:off x="640080" y="6217920"/>
-            <a:ext cx="10972800" cy="274320"/>
-          </a:xfrm>
-          <a:prstGeom prst="rect">
-            <a:avLst/>
-          </a:prstGeom>
-          <a:noFill/>
-        </p:spPr>
-        <p:txBody>
-          <a:bodyPr wrap="square" lIns="0" tIns="0" rIns="0" bIns="0" anchor="t">
-            <a:spAutoFit/>
-          </a:bodyPr>
-          <a:lstStyle/>
-          <a:p>
-            <a:pPr algn="l"/>
-            <a:r>
-              <a:rPr sz="900" b="0" i="0">
-                <a:solidFill>
-                  <a:srgbClr val="5A735A"/>
-                </a:solidFill>
-                <a:latin typeface="JetBrains Mono"/>
-              </a:rPr>
-              <a:t>RENBALL.COM</a:t>
-            </a:r>
-          </a:p>
+          <a:bodyPr rtlCol="0" anchor="ctr" lIns="0" rIns="0" tIns="0" bIns="0"/>
+          <a:lstStyle/>
+          <a:p/>
         </p:txBody>
       </p:sp>
     </p:spTree>
@@ -3364,7 +3360,7 @@
 </file>
 
 <file path=ppt/slides/slide10.xml><?xml version="1.0" encoding="utf-8"?>
-<p:sld xmlns:a="http://schemas.openxmlformats.org/drawingml/2006/main" xmlns:r="http://schemas.openxmlformats.org/officeDocument/2006/relationships" xmlns:p="http://schemas.openxmlformats.org/presentationml/2006/main">
+<p:sld xmlns:a="http://schemas.openxmlformats.org/drawingml/2006/main" xmlns:p="http://schemas.openxmlformats.org/presentationml/2006/main" xmlns:r="http://schemas.openxmlformats.org/officeDocument/2006/relationships">
   <p:cSld>
     <p:bg>
       <p:bgPr>
@@ -3380,14 +3376,7 @@
         <p:cNvGrpSpPr/>
         <p:nvPr/>
       </p:nvGrpSpPr>
-      <p:grpSpPr>
-        <a:xfrm>
-          <a:off x="0" y="0"/>
-          <a:ext cx="0" cy="0"/>
-          <a:chOff x="0" y="0"/>
-          <a:chExt cx="0" cy="0"/>
-        </a:xfrm>
-      </p:grpSpPr>
+      <p:grpSpPr/>
       <p:sp>
         <p:nvSpPr>
           <p:cNvPr id="2" name="TextBox 1"/>
@@ -3396,23 +3385,23 @@
         </p:nvSpPr>
         <p:spPr>
           <a:xfrm>
-            <a:off x="411480" y="292608"/>
-            <a:ext cx="1828800" cy="457200"/>
-          </a:xfrm>
-          <a:prstGeom prst="rect">
-            <a:avLst/>
-          </a:prstGeom>
-          <a:noFill/>
-        </p:spPr>
-        <p:txBody>
-          <a:bodyPr wrap="none" lIns="0" tIns="0" rIns="0" bIns="0">
+            <a:off x="411480" y="6355080"/>
+            <a:ext cx="1828800" cy="365760"/>
+          </a:xfrm>
+          <a:prstGeom prst="rect">
+            <a:avLst/>
+          </a:prstGeom>
+          <a:noFill/>
+        </p:spPr>
+        <p:txBody>
+          <a:bodyPr wrap="none" lIns="0" rIns="0" tIns="0" bIns="0">
             <a:spAutoFit/>
           </a:bodyPr>
           <a:lstStyle/>
           <a:p>
             <a:pPr algn="l"/>
             <a:r>
-              <a:rPr sz="2000">
+              <a:rPr sz="1600">
                 <a:solidFill>
                   <a:srgbClr val="E8EFE8"/>
                 </a:solidFill>
@@ -3421,7 +3410,7 @@
               <a:t>ren</a:t>
             </a:r>
             <a:r>
-              <a:rPr sz="2000">
+              <a:rPr sz="1600">
                 <a:solidFill>
                   <a:srgbClr val="C1FF72"/>
                 </a:solidFill>
@@ -3440,23 +3429,23 @@
         </p:nvSpPr>
         <p:spPr>
           <a:xfrm>
-            <a:off x="640080" y="914400"/>
-            <a:ext cx="7315200" cy="274320"/>
-          </a:xfrm>
-          <a:prstGeom prst="rect">
-            <a:avLst/>
-          </a:prstGeom>
-          <a:noFill/>
-        </p:spPr>
-        <p:txBody>
-          <a:bodyPr wrap="square" lIns="0" tIns="0" rIns="0" bIns="0" anchor="t">
+            <a:off x="640080" y="457200"/>
+            <a:ext cx="10972800" cy="228600"/>
+          </a:xfrm>
+          <a:prstGeom prst="rect">
+            <a:avLst/>
+          </a:prstGeom>
+          <a:noFill/>
+        </p:spPr>
+        <p:txBody>
+          <a:bodyPr wrap="square" lIns="0" rIns="0" tIns="0" bIns="0" anchor="t">
             <a:spAutoFit/>
           </a:bodyPr>
           <a:lstStyle/>
           <a:p>
             <a:pPr algn="l"/>
             <a:r>
-              <a:rPr sz="1100" b="0" i="0">
+              <a:rPr sz="1000" b="0" i="0">
                 <a:solidFill>
                   <a:srgbClr val="C1FF72"/>
                 </a:solidFill>
@@ -3475,29 +3464,38 @@
         </p:nvSpPr>
         <p:spPr>
           <a:xfrm>
-            <a:off x="640080" y="1280160"/>
-            <a:ext cx="10972800" cy="731520"/>
-          </a:xfrm>
-          <a:prstGeom prst="rect">
-            <a:avLst/>
-          </a:prstGeom>
-          <a:noFill/>
-        </p:spPr>
-        <p:txBody>
-          <a:bodyPr wrap="square" lIns="0" tIns="0" rIns="0" bIns="0" anchor="t">
+            <a:off x="640080" y="713232"/>
+            <a:ext cx="10972800" cy="502920"/>
+          </a:xfrm>
+          <a:prstGeom prst="rect">
+            <a:avLst/>
+          </a:prstGeom>
+          <a:noFill/>
+        </p:spPr>
+        <p:txBody>
+          <a:bodyPr wrap="square" lIns="0" rIns="0" tIns="0" bIns="0" anchor="t">
             <a:spAutoFit/>
           </a:bodyPr>
           <a:lstStyle/>
           <a:p>
             <a:pPr algn="l"/>
             <a:r>
-              <a:rPr sz="3600" b="0" i="0">
+              <a:rPr sz="3200" b="0" i="0">
                 <a:solidFill>
                   <a:srgbClr val="E8EFE8"/>
                 </a:solidFill>
                 <a:latin typeface="Instrument Serif"/>
               </a:rPr>
-              <a:t>The same test, league by league</a:t>
+              <a:t>The same test, </a:t>
+            </a:r>
+            <a:r>
+              <a:rPr sz="3200" b="0" i="1">
+                <a:solidFill>
+                  <a:srgbClr val="C1FF72"/>
+                </a:solidFill>
+                <a:latin typeface="Instrument Serif"/>
+              </a:rPr>
+              <a:t>league by league</a:t>
             </a:r>
           </a:p>
         </p:txBody>
@@ -3510,7 +3508,7 @@
         </p:nvSpPr>
         <p:spPr>
           <a:xfrm>
-            <a:off x="640080" y="2194560"/>
+            <a:off x="640080" y="1280160"/>
             <a:ext cx="1097280" cy="25400"/>
           </a:xfrm>
           <a:prstGeom prst="rect">
@@ -3539,11 +3537,9 @@
           </a:fontRef>
         </p:style>
         <p:txBody>
-          <a:bodyPr lIns="0" tIns="0" rIns="0" bIns="0" rtlCol="0" anchor="ctr"/>
-          <a:lstStyle/>
-          <a:p>
-            <a:endParaRPr/>
-          </a:p>
+          <a:bodyPr rtlCol="0" anchor="ctr" lIns="0" rIns="0" tIns="0" bIns="0"/>
+          <a:lstStyle/>
+          <a:p/>
         </p:txBody>
       </p:sp>
       <p:sp>
@@ -3554,7 +3550,7 @@
         </p:nvSpPr>
         <p:spPr>
           <a:xfrm>
-            <a:off x="640080" y="2651760"/>
+            <a:off x="640080" y="1417320"/>
             <a:ext cx="10607040" cy="12700"/>
           </a:xfrm>
           <a:prstGeom prst="rect">
@@ -3583,11 +3579,9 @@
           </a:fontRef>
         </p:style>
         <p:txBody>
-          <a:bodyPr lIns="0" tIns="0" rIns="0" bIns="0" rtlCol="0" anchor="ctr"/>
-          <a:lstStyle/>
-          <a:p>
-            <a:endParaRPr/>
-          </a:p>
+          <a:bodyPr rtlCol="0" anchor="ctr" lIns="0" rIns="0" tIns="0" bIns="0"/>
+          <a:lstStyle/>
+          <a:p/>
         </p:txBody>
       </p:sp>
       <p:sp>
@@ -3598,7 +3592,7 @@
         </p:nvSpPr>
         <p:spPr>
           <a:xfrm>
-            <a:off x="640080" y="2697480"/>
+            <a:off x="640080" y="1463040"/>
             <a:ext cx="2286000" cy="365760"/>
           </a:xfrm>
           <a:prstGeom prst="rect">
@@ -3607,7 +3601,7 @@
           <a:noFill/>
         </p:spPr>
         <p:txBody>
-          <a:bodyPr wrap="square" lIns="0" tIns="0" rIns="0" bIns="0" anchor="t">
+          <a:bodyPr wrap="square" lIns="0" rIns="0" tIns="0" bIns="0" anchor="t">
             <a:spAutoFit/>
           </a:bodyPr>
           <a:lstStyle/>
@@ -3633,7 +3627,7 @@
         </p:nvSpPr>
         <p:spPr>
           <a:xfrm>
-            <a:off x="3017520" y="2697480"/>
+            <a:off x="3017520" y="1463040"/>
             <a:ext cx="1188719" cy="365760"/>
           </a:xfrm>
           <a:prstGeom prst="rect">
@@ -3642,7 +3636,7 @@
           <a:noFill/>
         </p:spPr>
         <p:txBody>
-          <a:bodyPr wrap="square" lIns="0" tIns="0" rIns="0" bIns="0" anchor="t">
+          <a:bodyPr wrap="square" lIns="0" rIns="0" tIns="0" bIns="0" anchor="t">
             <a:spAutoFit/>
           </a:bodyPr>
           <a:lstStyle/>
@@ -3668,7 +3662,7 @@
         </p:nvSpPr>
         <p:spPr>
           <a:xfrm>
-            <a:off x="4297679" y="2697480"/>
+            <a:off x="4297679" y="1463040"/>
             <a:ext cx="822960" cy="365760"/>
           </a:xfrm>
           <a:prstGeom prst="rect">
@@ -3677,7 +3671,7 @@
           <a:noFill/>
         </p:spPr>
         <p:txBody>
-          <a:bodyPr wrap="square" lIns="0" tIns="0" rIns="0" bIns="0" anchor="t">
+          <a:bodyPr wrap="square" lIns="0" rIns="0" tIns="0" bIns="0" anchor="t">
             <a:spAutoFit/>
           </a:bodyPr>
           <a:lstStyle/>
@@ -3703,7 +3697,7 @@
         </p:nvSpPr>
         <p:spPr>
           <a:xfrm>
-            <a:off x="5212079" y="2697480"/>
+            <a:off x="5212079" y="1463040"/>
             <a:ext cx="1188719" cy="365760"/>
           </a:xfrm>
           <a:prstGeom prst="rect">
@@ -3712,7 +3706,7 @@
           <a:noFill/>
         </p:spPr>
         <p:txBody>
-          <a:bodyPr wrap="square" lIns="0" tIns="0" rIns="0" bIns="0" anchor="t">
+          <a:bodyPr wrap="square" lIns="0" rIns="0" tIns="0" bIns="0" anchor="t">
             <a:spAutoFit/>
           </a:bodyPr>
           <a:lstStyle/>
@@ -3738,7 +3732,7 @@
         </p:nvSpPr>
         <p:spPr>
           <a:xfrm>
-            <a:off x="6492240" y="2697480"/>
+            <a:off x="6492240" y="1463040"/>
             <a:ext cx="1005839" cy="365760"/>
           </a:xfrm>
           <a:prstGeom prst="rect">
@@ -3747,7 +3741,7 @@
           <a:noFill/>
         </p:spPr>
         <p:txBody>
-          <a:bodyPr wrap="square" lIns="0" tIns="0" rIns="0" bIns="0" anchor="t">
+          <a:bodyPr wrap="square" lIns="0" rIns="0" tIns="0" bIns="0" anchor="t">
             <a:spAutoFit/>
           </a:bodyPr>
           <a:lstStyle/>
@@ -3773,7 +3767,7 @@
         </p:nvSpPr>
         <p:spPr>
           <a:xfrm>
-            <a:off x="7589519" y="2697480"/>
+            <a:off x="7589519" y="1463040"/>
             <a:ext cx="1005839" cy="365760"/>
           </a:xfrm>
           <a:prstGeom prst="rect">
@@ -3782,7 +3776,7 @@
           <a:noFill/>
         </p:spPr>
         <p:txBody>
-          <a:bodyPr wrap="square" lIns="0" tIns="0" rIns="0" bIns="0" anchor="t">
+          <a:bodyPr wrap="square" lIns="0" rIns="0" tIns="0" bIns="0" anchor="t">
             <a:spAutoFit/>
           </a:bodyPr>
           <a:lstStyle/>
@@ -3808,7 +3802,7 @@
         </p:nvSpPr>
         <p:spPr>
           <a:xfrm>
-            <a:off x="8686799" y="2697480"/>
+            <a:off x="8686799" y="1463040"/>
             <a:ext cx="1188719" cy="365760"/>
           </a:xfrm>
           <a:prstGeom prst="rect">
@@ -3817,7 +3811,7 @@
           <a:noFill/>
         </p:spPr>
         <p:txBody>
-          <a:bodyPr wrap="square" lIns="0" tIns="0" rIns="0" bIns="0" anchor="t">
+          <a:bodyPr wrap="square" lIns="0" rIns="0" tIns="0" bIns="0" anchor="t">
             <a:spAutoFit/>
           </a:bodyPr>
           <a:lstStyle/>
@@ -3843,7 +3837,7 @@
         </p:nvSpPr>
         <p:spPr>
           <a:xfrm>
-            <a:off x="9966959" y="2697480"/>
+            <a:off x="9966959" y="1463040"/>
             <a:ext cx="1188719" cy="365760"/>
           </a:xfrm>
           <a:prstGeom prst="rect">
@@ -3852,7 +3846,7 @@
           <a:noFill/>
         </p:spPr>
         <p:txBody>
-          <a:bodyPr wrap="square" lIns="0" tIns="0" rIns="0" bIns="0" anchor="t">
+          <a:bodyPr wrap="square" lIns="0" rIns="0" tIns="0" bIns="0" anchor="t">
             <a:spAutoFit/>
           </a:bodyPr>
           <a:lstStyle/>
@@ -3878,7 +3872,7 @@
         </p:nvSpPr>
         <p:spPr>
           <a:xfrm>
-            <a:off x="640080" y="3108960"/>
+            <a:off x="640080" y="1874520"/>
             <a:ext cx="10607040" cy="12700"/>
           </a:xfrm>
           <a:prstGeom prst="rect">
@@ -3907,11 +3901,9 @@
           </a:fontRef>
         </p:style>
         <p:txBody>
-          <a:bodyPr lIns="0" tIns="0" rIns="0" bIns="0" rtlCol="0" anchor="ctr"/>
-          <a:lstStyle/>
-          <a:p>
-            <a:endParaRPr/>
-          </a:p>
+          <a:bodyPr rtlCol="0" anchor="ctr" lIns="0" rIns="0" tIns="0" bIns="0"/>
+          <a:lstStyle/>
+          <a:p/>
         </p:txBody>
       </p:sp>
       <p:sp>
@@ -3922,7 +3914,7 @@
         </p:nvSpPr>
         <p:spPr>
           <a:xfrm>
-            <a:off x="640080" y="3246120"/>
+            <a:off x="640080" y="2011680"/>
             <a:ext cx="2286000" cy="365760"/>
           </a:xfrm>
           <a:prstGeom prst="rect">
@@ -3931,7 +3923,7 @@
           <a:noFill/>
         </p:spPr>
         <p:txBody>
-          <a:bodyPr wrap="square" lIns="0" tIns="0" rIns="0" bIns="0" anchor="t">
+          <a:bodyPr wrap="square" lIns="0" rIns="0" tIns="0" bIns="0" anchor="t">
             <a:spAutoFit/>
           </a:bodyPr>
           <a:lstStyle/>
@@ -3957,7 +3949,7 @@
         </p:nvSpPr>
         <p:spPr>
           <a:xfrm>
-            <a:off x="3017520" y="3246120"/>
+            <a:off x="3017520" y="2011680"/>
             <a:ext cx="1188719" cy="365760"/>
           </a:xfrm>
           <a:prstGeom prst="rect">
@@ -3966,7 +3958,7 @@
           <a:noFill/>
         </p:spPr>
         <p:txBody>
-          <a:bodyPr wrap="square" lIns="0" tIns="0" rIns="0" bIns="0" anchor="t">
+          <a:bodyPr wrap="square" lIns="0" rIns="0" tIns="0" bIns="0" anchor="t">
             <a:spAutoFit/>
           </a:bodyPr>
           <a:lstStyle/>
@@ -3992,7 +3984,7 @@
         </p:nvSpPr>
         <p:spPr>
           <a:xfrm>
-            <a:off x="4297679" y="3246120"/>
+            <a:off x="4297679" y="2011680"/>
             <a:ext cx="822960" cy="365760"/>
           </a:xfrm>
           <a:prstGeom prst="rect">
@@ -4001,7 +3993,7 @@
           <a:noFill/>
         </p:spPr>
         <p:txBody>
-          <a:bodyPr wrap="square" lIns="0" tIns="0" rIns="0" bIns="0" anchor="t">
+          <a:bodyPr wrap="square" lIns="0" rIns="0" tIns="0" bIns="0" anchor="t">
             <a:spAutoFit/>
           </a:bodyPr>
           <a:lstStyle/>
@@ -4027,7 +4019,7 @@
         </p:nvSpPr>
         <p:spPr>
           <a:xfrm>
-            <a:off x="5212079" y="3246120"/>
+            <a:off x="5212079" y="2011680"/>
             <a:ext cx="1188719" cy="365760"/>
           </a:xfrm>
           <a:prstGeom prst="rect">
@@ -4036,7 +4028,7 @@
           <a:noFill/>
         </p:spPr>
         <p:txBody>
-          <a:bodyPr wrap="square" lIns="0" tIns="0" rIns="0" bIns="0" anchor="t">
+          <a:bodyPr wrap="square" lIns="0" rIns="0" tIns="0" bIns="0" anchor="t">
             <a:spAutoFit/>
           </a:bodyPr>
           <a:lstStyle/>
@@ -4062,7 +4054,7 @@
         </p:nvSpPr>
         <p:spPr>
           <a:xfrm>
-            <a:off x="6492240" y="3246120"/>
+            <a:off x="6492240" y="2011680"/>
             <a:ext cx="1005839" cy="365760"/>
           </a:xfrm>
           <a:prstGeom prst="rect">
@@ -4071,7 +4063,7 @@
           <a:noFill/>
         </p:spPr>
         <p:txBody>
-          <a:bodyPr wrap="square" lIns="0" tIns="0" rIns="0" bIns="0" anchor="t">
+          <a:bodyPr wrap="square" lIns="0" rIns="0" tIns="0" bIns="0" anchor="t">
             <a:spAutoFit/>
           </a:bodyPr>
           <a:lstStyle/>
@@ -4097,7 +4089,7 @@
         </p:nvSpPr>
         <p:spPr>
           <a:xfrm>
-            <a:off x="7589519" y="3246120"/>
+            <a:off x="7589519" y="2011680"/>
             <a:ext cx="1005839" cy="365760"/>
           </a:xfrm>
           <a:prstGeom prst="rect">
@@ -4106,7 +4098,7 @@
           <a:noFill/>
         </p:spPr>
         <p:txBody>
-          <a:bodyPr wrap="square" lIns="0" tIns="0" rIns="0" bIns="0" anchor="t">
+          <a:bodyPr wrap="square" lIns="0" rIns="0" tIns="0" bIns="0" anchor="t">
             <a:spAutoFit/>
           </a:bodyPr>
           <a:lstStyle/>
@@ -4132,7 +4124,7 @@
         </p:nvSpPr>
         <p:spPr>
           <a:xfrm>
-            <a:off x="8686799" y="3246120"/>
+            <a:off x="8686799" y="2011680"/>
             <a:ext cx="1188719" cy="365760"/>
           </a:xfrm>
           <a:prstGeom prst="rect">
@@ -4141,7 +4133,7 @@
           <a:noFill/>
         </p:spPr>
         <p:txBody>
-          <a:bodyPr wrap="square" lIns="0" tIns="0" rIns="0" bIns="0" anchor="t">
+          <a:bodyPr wrap="square" lIns="0" rIns="0" tIns="0" bIns="0" anchor="t">
             <a:spAutoFit/>
           </a:bodyPr>
           <a:lstStyle/>
@@ -4167,7 +4159,7 @@
         </p:nvSpPr>
         <p:spPr>
           <a:xfrm>
-            <a:off x="9966959" y="3246120"/>
+            <a:off x="9966959" y="2011680"/>
             <a:ext cx="1188719" cy="365760"/>
           </a:xfrm>
           <a:prstGeom prst="rect">
@@ -4176,7 +4168,7 @@
           <a:noFill/>
         </p:spPr>
         <p:txBody>
-          <a:bodyPr wrap="square" lIns="0" tIns="0" rIns="0" bIns="0" anchor="t">
+          <a:bodyPr wrap="square" lIns="0" rIns="0" tIns="0" bIns="0" anchor="t">
             <a:spAutoFit/>
           </a:bodyPr>
           <a:lstStyle/>
@@ -4202,7 +4194,7 @@
         </p:nvSpPr>
         <p:spPr>
           <a:xfrm>
-            <a:off x="640080" y="3703320"/>
+            <a:off x="640080" y="2468880"/>
             <a:ext cx="2286000" cy="365760"/>
           </a:xfrm>
           <a:prstGeom prst="rect">
@@ -4211,7 +4203,7 @@
           <a:noFill/>
         </p:spPr>
         <p:txBody>
-          <a:bodyPr wrap="square" lIns="0" tIns="0" rIns="0" bIns="0" anchor="t">
+          <a:bodyPr wrap="square" lIns="0" rIns="0" tIns="0" bIns="0" anchor="t">
             <a:spAutoFit/>
           </a:bodyPr>
           <a:lstStyle/>
@@ -4237,7 +4229,7 @@
         </p:nvSpPr>
         <p:spPr>
           <a:xfrm>
-            <a:off x="3017520" y="3703320"/>
+            <a:off x="3017520" y="2468880"/>
             <a:ext cx="1188719" cy="365760"/>
           </a:xfrm>
           <a:prstGeom prst="rect">
@@ -4246,7 +4238,7 @@
           <a:noFill/>
         </p:spPr>
         <p:txBody>
-          <a:bodyPr wrap="square" lIns="0" tIns="0" rIns="0" bIns="0" anchor="t">
+          <a:bodyPr wrap="square" lIns="0" rIns="0" tIns="0" bIns="0" anchor="t">
             <a:spAutoFit/>
           </a:bodyPr>
           <a:lstStyle/>
@@ -4272,7 +4264,7 @@
         </p:nvSpPr>
         <p:spPr>
           <a:xfrm>
-            <a:off x="4297679" y="3703320"/>
+            <a:off x="4297679" y="2468880"/>
             <a:ext cx="822960" cy="365760"/>
           </a:xfrm>
           <a:prstGeom prst="rect">
@@ -4281,7 +4273,7 @@
           <a:noFill/>
         </p:spPr>
         <p:txBody>
-          <a:bodyPr wrap="square" lIns="0" tIns="0" rIns="0" bIns="0" anchor="t">
+          <a:bodyPr wrap="square" lIns="0" rIns="0" tIns="0" bIns="0" anchor="t">
             <a:spAutoFit/>
           </a:bodyPr>
           <a:lstStyle/>
@@ -4307,7 +4299,7 @@
         </p:nvSpPr>
         <p:spPr>
           <a:xfrm>
-            <a:off x="5212079" y="3703320"/>
+            <a:off x="5212079" y="2468880"/>
             <a:ext cx="1188719" cy="365760"/>
           </a:xfrm>
           <a:prstGeom prst="rect">
@@ -4316,7 +4308,7 @@
           <a:noFill/>
         </p:spPr>
         <p:txBody>
-          <a:bodyPr wrap="square" lIns="0" tIns="0" rIns="0" bIns="0" anchor="t">
+          <a:bodyPr wrap="square" lIns="0" rIns="0" tIns="0" bIns="0" anchor="t">
             <a:spAutoFit/>
           </a:bodyPr>
           <a:lstStyle/>
@@ -4342,7 +4334,7 @@
         </p:nvSpPr>
         <p:spPr>
           <a:xfrm>
-            <a:off x="6492240" y="3703320"/>
+            <a:off x="6492240" y="2468880"/>
             <a:ext cx="1005839" cy="365760"/>
           </a:xfrm>
           <a:prstGeom prst="rect">
@@ -4351,7 +4343,7 @@
           <a:noFill/>
         </p:spPr>
         <p:txBody>
-          <a:bodyPr wrap="square" lIns="0" tIns="0" rIns="0" bIns="0" anchor="t">
+          <a:bodyPr wrap="square" lIns="0" rIns="0" tIns="0" bIns="0" anchor="t">
             <a:spAutoFit/>
           </a:bodyPr>
           <a:lstStyle/>
@@ -4377,7 +4369,7 @@
         </p:nvSpPr>
         <p:spPr>
           <a:xfrm>
-            <a:off x="7589519" y="3703320"/>
+            <a:off x="7589519" y="2468880"/>
             <a:ext cx="1005839" cy="365760"/>
           </a:xfrm>
           <a:prstGeom prst="rect">
@@ -4386,7 +4378,7 @@
           <a:noFill/>
         </p:spPr>
         <p:txBody>
-          <a:bodyPr wrap="square" lIns="0" tIns="0" rIns="0" bIns="0" anchor="t">
+          <a:bodyPr wrap="square" lIns="0" rIns="0" tIns="0" bIns="0" anchor="t">
             <a:spAutoFit/>
           </a:bodyPr>
           <a:lstStyle/>
@@ -4412,7 +4404,7 @@
         </p:nvSpPr>
         <p:spPr>
           <a:xfrm>
-            <a:off x="8686799" y="3703320"/>
+            <a:off x="8686799" y="2468880"/>
             <a:ext cx="1188719" cy="365760"/>
           </a:xfrm>
           <a:prstGeom prst="rect">
@@ -4421,7 +4413,7 @@
           <a:noFill/>
         </p:spPr>
         <p:txBody>
-          <a:bodyPr wrap="square" lIns="0" tIns="0" rIns="0" bIns="0" anchor="t">
+          <a:bodyPr wrap="square" lIns="0" rIns="0" tIns="0" bIns="0" anchor="t">
             <a:spAutoFit/>
           </a:bodyPr>
           <a:lstStyle/>
@@ -4447,7 +4439,7 @@
         </p:nvSpPr>
         <p:spPr>
           <a:xfrm>
-            <a:off x="9966959" y="3703320"/>
+            <a:off x="9966959" y="2468880"/>
             <a:ext cx="1188719" cy="365760"/>
           </a:xfrm>
           <a:prstGeom prst="rect">
@@ -4456,7 +4448,7 @@
           <a:noFill/>
         </p:spPr>
         <p:txBody>
-          <a:bodyPr wrap="square" lIns="0" tIns="0" rIns="0" bIns="0" anchor="t">
+          <a:bodyPr wrap="square" lIns="0" rIns="0" tIns="0" bIns="0" anchor="t">
             <a:spAutoFit/>
           </a:bodyPr>
           <a:lstStyle/>
@@ -4482,7 +4474,7 @@
         </p:nvSpPr>
         <p:spPr>
           <a:xfrm>
-            <a:off x="640080" y="4160520"/>
+            <a:off x="640080" y="2926080"/>
             <a:ext cx="2286000" cy="365760"/>
           </a:xfrm>
           <a:prstGeom prst="rect">
@@ -4491,7 +4483,7 @@
           <a:noFill/>
         </p:spPr>
         <p:txBody>
-          <a:bodyPr wrap="square" lIns="0" tIns="0" rIns="0" bIns="0" anchor="t">
+          <a:bodyPr wrap="square" lIns="0" rIns="0" tIns="0" bIns="0" anchor="t">
             <a:spAutoFit/>
           </a:bodyPr>
           <a:lstStyle/>
@@ -4517,7 +4509,7 @@
         </p:nvSpPr>
         <p:spPr>
           <a:xfrm>
-            <a:off x="3017520" y="4160520"/>
+            <a:off x="3017520" y="2926080"/>
             <a:ext cx="1188719" cy="365760"/>
           </a:xfrm>
           <a:prstGeom prst="rect">
@@ -4526,7 +4518,7 @@
           <a:noFill/>
         </p:spPr>
         <p:txBody>
-          <a:bodyPr wrap="square" lIns="0" tIns="0" rIns="0" bIns="0" anchor="t">
+          <a:bodyPr wrap="square" lIns="0" rIns="0" tIns="0" bIns="0" anchor="t">
             <a:spAutoFit/>
           </a:bodyPr>
           <a:lstStyle/>
@@ -4552,7 +4544,7 @@
         </p:nvSpPr>
         <p:spPr>
           <a:xfrm>
-            <a:off x="4297679" y="4160520"/>
+            <a:off x="4297679" y="2926080"/>
             <a:ext cx="822960" cy="365760"/>
           </a:xfrm>
           <a:prstGeom prst="rect">
@@ -4561,7 +4553,7 @@
           <a:noFill/>
         </p:spPr>
         <p:txBody>
-          <a:bodyPr wrap="square" lIns="0" tIns="0" rIns="0" bIns="0" anchor="t">
+          <a:bodyPr wrap="square" lIns="0" rIns="0" tIns="0" bIns="0" anchor="t">
             <a:spAutoFit/>
           </a:bodyPr>
           <a:lstStyle/>
@@ -4587,7 +4579,7 @@
         </p:nvSpPr>
         <p:spPr>
           <a:xfrm>
-            <a:off x="5212079" y="4160520"/>
+            <a:off x="5212079" y="2926080"/>
             <a:ext cx="1188719" cy="365760"/>
           </a:xfrm>
           <a:prstGeom prst="rect">
@@ -4596,7 +4588,7 @@
           <a:noFill/>
         </p:spPr>
         <p:txBody>
-          <a:bodyPr wrap="square" lIns="0" tIns="0" rIns="0" bIns="0" anchor="t">
+          <a:bodyPr wrap="square" lIns="0" rIns="0" tIns="0" bIns="0" anchor="t">
             <a:spAutoFit/>
           </a:bodyPr>
           <a:lstStyle/>
@@ -4622,7 +4614,7 @@
         </p:nvSpPr>
         <p:spPr>
           <a:xfrm>
-            <a:off x="6492240" y="4160520"/>
+            <a:off x="6492240" y="2926080"/>
             <a:ext cx="1005839" cy="365760"/>
           </a:xfrm>
           <a:prstGeom prst="rect">
@@ -4631,7 +4623,7 @@
           <a:noFill/>
         </p:spPr>
         <p:txBody>
-          <a:bodyPr wrap="square" lIns="0" tIns="0" rIns="0" bIns="0" anchor="t">
+          <a:bodyPr wrap="square" lIns="0" rIns="0" tIns="0" bIns="0" anchor="t">
             <a:spAutoFit/>
           </a:bodyPr>
           <a:lstStyle/>
@@ -4657,7 +4649,7 @@
         </p:nvSpPr>
         <p:spPr>
           <a:xfrm>
-            <a:off x="7589519" y="4160520"/>
+            <a:off x="7589519" y="2926080"/>
             <a:ext cx="1005839" cy="365760"/>
           </a:xfrm>
           <a:prstGeom prst="rect">
@@ -4666,7 +4658,7 @@
           <a:noFill/>
         </p:spPr>
         <p:txBody>
-          <a:bodyPr wrap="square" lIns="0" tIns="0" rIns="0" bIns="0" anchor="t">
+          <a:bodyPr wrap="square" lIns="0" rIns="0" tIns="0" bIns="0" anchor="t">
             <a:spAutoFit/>
           </a:bodyPr>
           <a:lstStyle/>
@@ -4692,7 +4684,7 @@
         </p:nvSpPr>
         <p:spPr>
           <a:xfrm>
-            <a:off x="8686799" y="4160520"/>
+            <a:off x="8686799" y="2926080"/>
             <a:ext cx="1188719" cy="365760"/>
           </a:xfrm>
           <a:prstGeom prst="rect">
@@ -4701,7 +4693,7 @@
           <a:noFill/>
         </p:spPr>
         <p:txBody>
-          <a:bodyPr wrap="square" lIns="0" tIns="0" rIns="0" bIns="0" anchor="t">
+          <a:bodyPr wrap="square" lIns="0" rIns="0" tIns="0" bIns="0" anchor="t">
             <a:spAutoFit/>
           </a:bodyPr>
           <a:lstStyle/>
@@ -4727,7 +4719,7 @@
         </p:nvSpPr>
         <p:spPr>
           <a:xfrm>
-            <a:off x="9966959" y="4160520"/>
+            <a:off x="9966959" y="2926080"/>
             <a:ext cx="1188719" cy="365760"/>
           </a:xfrm>
           <a:prstGeom prst="rect">
@@ -4736,7 +4728,7 @@
           <a:noFill/>
         </p:spPr>
         <p:txBody>
-          <a:bodyPr wrap="square" lIns="0" tIns="0" rIns="0" bIns="0" anchor="t">
+          <a:bodyPr wrap="square" lIns="0" rIns="0" tIns="0" bIns="0" anchor="t">
             <a:spAutoFit/>
           </a:bodyPr>
           <a:lstStyle/>
@@ -4762,7 +4754,7 @@
         </p:nvSpPr>
         <p:spPr>
           <a:xfrm>
-            <a:off x="640080" y="4617720"/>
+            <a:off x="640080" y="3383280"/>
             <a:ext cx="2286000" cy="365760"/>
           </a:xfrm>
           <a:prstGeom prst="rect">
@@ -4771,7 +4763,7 @@
           <a:noFill/>
         </p:spPr>
         <p:txBody>
-          <a:bodyPr wrap="square" lIns="0" tIns="0" rIns="0" bIns="0" anchor="t">
+          <a:bodyPr wrap="square" lIns="0" rIns="0" tIns="0" bIns="0" anchor="t">
             <a:spAutoFit/>
           </a:bodyPr>
           <a:lstStyle/>
@@ -4797,7 +4789,7 @@
         </p:nvSpPr>
         <p:spPr>
           <a:xfrm>
-            <a:off x="3017520" y="4617720"/>
+            <a:off x="3017520" y="3383280"/>
             <a:ext cx="1188719" cy="365760"/>
           </a:xfrm>
           <a:prstGeom prst="rect">
@@ -4806,7 +4798,7 @@
           <a:noFill/>
         </p:spPr>
         <p:txBody>
-          <a:bodyPr wrap="square" lIns="0" tIns="0" rIns="0" bIns="0" anchor="t">
+          <a:bodyPr wrap="square" lIns="0" rIns="0" tIns="0" bIns="0" anchor="t">
             <a:spAutoFit/>
           </a:bodyPr>
           <a:lstStyle/>
@@ -4832,7 +4824,7 @@
         </p:nvSpPr>
         <p:spPr>
           <a:xfrm>
-            <a:off x="4297679" y="4617720"/>
+            <a:off x="4297679" y="3383280"/>
             <a:ext cx="822960" cy="365760"/>
           </a:xfrm>
           <a:prstGeom prst="rect">
@@ -4841,7 +4833,7 @@
           <a:noFill/>
         </p:spPr>
         <p:txBody>
-          <a:bodyPr wrap="square" lIns="0" tIns="0" rIns="0" bIns="0" anchor="t">
+          <a:bodyPr wrap="square" lIns="0" rIns="0" tIns="0" bIns="0" anchor="t">
             <a:spAutoFit/>
           </a:bodyPr>
           <a:lstStyle/>
@@ -4867,7 +4859,7 @@
         </p:nvSpPr>
         <p:spPr>
           <a:xfrm>
-            <a:off x="5212079" y="4617720"/>
+            <a:off x="5212079" y="3383280"/>
             <a:ext cx="1188719" cy="365760"/>
           </a:xfrm>
           <a:prstGeom prst="rect">
@@ -4876,7 +4868,7 @@
           <a:noFill/>
         </p:spPr>
         <p:txBody>
-          <a:bodyPr wrap="square" lIns="0" tIns="0" rIns="0" bIns="0" anchor="t">
+          <a:bodyPr wrap="square" lIns="0" rIns="0" tIns="0" bIns="0" anchor="t">
             <a:spAutoFit/>
           </a:bodyPr>
           <a:lstStyle/>
@@ -4902,7 +4894,7 @@
         </p:nvSpPr>
         <p:spPr>
           <a:xfrm>
-            <a:off x="6492240" y="4617720"/>
+            <a:off x="6492240" y="3383280"/>
             <a:ext cx="1005839" cy="365760"/>
           </a:xfrm>
           <a:prstGeom prst="rect">
@@ -4911,7 +4903,7 @@
           <a:noFill/>
         </p:spPr>
         <p:txBody>
-          <a:bodyPr wrap="square" lIns="0" tIns="0" rIns="0" bIns="0" anchor="t">
+          <a:bodyPr wrap="square" lIns="0" rIns="0" tIns="0" bIns="0" anchor="t">
             <a:spAutoFit/>
           </a:bodyPr>
           <a:lstStyle/>
@@ -4937,7 +4929,7 @@
         </p:nvSpPr>
         <p:spPr>
           <a:xfrm>
-            <a:off x="7589519" y="4617720"/>
+            <a:off x="7589519" y="3383280"/>
             <a:ext cx="1005839" cy="365760"/>
           </a:xfrm>
           <a:prstGeom prst="rect">
@@ -4946,7 +4938,7 @@
           <a:noFill/>
         </p:spPr>
         <p:txBody>
-          <a:bodyPr wrap="square" lIns="0" tIns="0" rIns="0" bIns="0" anchor="t">
+          <a:bodyPr wrap="square" lIns="0" rIns="0" tIns="0" bIns="0" anchor="t">
             <a:spAutoFit/>
           </a:bodyPr>
           <a:lstStyle/>
@@ -4972,7 +4964,7 @@
         </p:nvSpPr>
         <p:spPr>
           <a:xfrm>
-            <a:off x="8686799" y="4617720"/>
+            <a:off x="8686799" y="3383280"/>
             <a:ext cx="1188719" cy="365760"/>
           </a:xfrm>
           <a:prstGeom prst="rect">
@@ -4981,7 +4973,7 @@
           <a:noFill/>
         </p:spPr>
         <p:txBody>
-          <a:bodyPr wrap="square" lIns="0" tIns="0" rIns="0" bIns="0" anchor="t">
+          <a:bodyPr wrap="square" lIns="0" rIns="0" tIns="0" bIns="0" anchor="t">
             <a:spAutoFit/>
           </a:bodyPr>
           <a:lstStyle/>
@@ -5007,7 +4999,7 @@
         </p:nvSpPr>
         <p:spPr>
           <a:xfrm>
-            <a:off x="9966959" y="4617720"/>
+            <a:off x="9966959" y="3383280"/>
             <a:ext cx="1188719" cy="365760"/>
           </a:xfrm>
           <a:prstGeom prst="rect">
@@ -5016,7 +5008,7 @@
           <a:noFill/>
         </p:spPr>
         <p:txBody>
-          <a:bodyPr wrap="square" lIns="0" tIns="0" rIns="0" bIns="0" anchor="t">
+          <a:bodyPr wrap="square" lIns="0" rIns="0" tIns="0" bIns="0" anchor="t">
             <a:spAutoFit/>
           </a:bodyPr>
           <a:lstStyle/>
@@ -5042,7 +5034,7 @@
         </p:nvSpPr>
         <p:spPr>
           <a:xfrm>
-            <a:off x="640080" y="5074920"/>
+            <a:off x="640080" y="3840480"/>
             <a:ext cx="2286000" cy="365760"/>
           </a:xfrm>
           <a:prstGeom prst="rect">
@@ -5051,7 +5043,7 @@
           <a:noFill/>
         </p:spPr>
         <p:txBody>
-          <a:bodyPr wrap="square" lIns="0" tIns="0" rIns="0" bIns="0" anchor="t">
+          <a:bodyPr wrap="square" lIns="0" rIns="0" tIns="0" bIns="0" anchor="t">
             <a:spAutoFit/>
           </a:bodyPr>
           <a:lstStyle/>
@@ -5077,7 +5069,7 @@
         </p:nvSpPr>
         <p:spPr>
           <a:xfrm>
-            <a:off x="3017520" y="5074920"/>
+            <a:off x="3017520" y="3840480"/>
             <a:ext cx="1188719" cy="365760"/>
           </a:xfrm>
           <a:prstGeom prst="rect">
@@ -5086,7 +5078,7 @@
           <a:noFill/>
         </p:spPr>
         <p:txBody>
-          <a:bodyPr wrap="square" lIns="0" tIns="0" rIns="0" bIns="0" anchor="t">
+          <a:bodyPr wrap="square" lIns="0" rIns="0" tIns="0" bIns="0" anchor="t">
             <a:spAutoFit/>
           </a:bodyPr>
           <a:lstStyle/>
@@ -5112,7 +5104,7 @@
         </p:nvSpPr>
         <p:spPr>
           <a:xfrm>
-            <a:off x="4297679" y="5074920"/>
+            <a:off x="4297679" y="3840480"/>
             <a:ext cx="822960" cy="365760"/>
           </a:xfrm>
           <a:prstGeom prst="rect">
@@ -5121,7 +5113,7 @@
           <a:noFill/>
         </p:spPr>
         <p:txBody>
-          <a:bodyPr wrap="square" lIns="0" tIns="0" rIns="0" bIns="0" anchor="t">
+          <a:bodyPr wrap="square" lIns="0" rIns="0" tIns="0" bIns="0" anchor="t">
             <a:spAutoFit/>
           </a:bodyPr>
           <a:lstStyle/>
@@ -5147,7 +5139,7 @@
         </p:nvSpPr>
         <p:spPr>
           <a:xfrm>
-            <a:off x="5212079" y="5074920"/>
+            <a:off x="5212079" y="3840480"/>
             <a:ext cx="1188719" cy="365760"/>
           </a:xfrm>
           <a:prstGeom prst="rect">
@@ -5156,7 +5148,7 @@
           <a:noFill/>
         </p:spPr>
         <p:txBody>
-          <a:bodyPr wrap="square" lIns="0" tIns="0" rIns="0" bIns="0" anchor="t">
+          <a:bodyPr wrap="square" lIns="0" rIns="0" tIns="0" bIns="0" anchor="t">
             <a:spAutoFit/>
           </a:bodyPr>
           <a:lstStyle/>
@@ -5182,7 +5174,7 @@
         </p:nvSpPr>
         <p:spPr>
           <a:xfrm>
-            <a:off x="6492240" y="5074920"/>
+            <a:off x="6492240" y="3840480"/>
             <a:ext cx="1005839" cy="365760"/>
           </a:xfrm>
           <a:prstGeom prst="rect">
@@ -5191,7 +5183,7 @@
           <a:noFill/>
         </p:spPr>
         <p:txBody>
-          <a:bodyPr wrap="square" lIns="0" tIns="0" rIns="0" bIns="0" anchor="t">
+          <a:bodyPr wrap="square" lIns="0" rIns="0" tIns="0" bIns="0" anchor="t">
             <a:spAutoFit/>
           </a:bodyPr>
           <a:lstStyle/>
@@ -5217,7 +5209,7 @@
         </p:nvSpPr>
         <p:spPr>
           <a:xfrm>
-            <a:off x="7589519" y="5074920"/>
+            <a:off x="7589519" y="3840480"/>
             <a:ext cx="1005839" cy="365760"/>
           </a:xfrm>
           <a:prstGeom prst="rect">
@@ -5226,7 +5218,7 @@
           <a:noFill/>
         </p:spPr>
         <p:txBody>
-          <a:bodyPr wrap="square" lIns="0" tIns="0" rIns="0" bIns="0" anchor="t">
+          <a:bodyPr wrap="square" lIns="0" rIns="0" tIns="0" bIns="0" anchor="t">
             <a:spAutoFit/>
           </a:bodyPr>
           <a:lstStyle/>
@@ -5252,7 +5244,7 @@
         </p:nvSpPr>
         <p:spPr>
           <a:xfrm>
-            <a:off x="8686799" y="5074920"/>
+            <a:off x="8686799" y="3840480"/>
             <a:ext cx="1188719" cy="365760"/>
           </a:xfrm>
           <a:prstGeom prst="rect">
@@ -5261,7 +5253,7 @@
           <a:noFill/>
         </p:spPr>
         <p:txBody>
-          <a:bodyPr wrap="square" lIns="0" tIns="0" rIns="0" bIns="0" anchor="t">
+          <a:bodyPr wrap="square" lIns="0" rIns="0" tIns="0" bIns="0" anchor="t">
             <a:spAutoFit/>
           </a:bodyPr>
           <a:lstStyle/>
@@ -5287,7 +5279,7 @@
         </p:nvSpPr>
         <p:spPr>
           <a:xfrm>
-            <a:off x="9966959" y="5074920"/>
+            <a:off x="9966959" y="3840480"/>
             <a:ext cx="1188719" cy="365760"/>
           </a:xfrm>
           <a:prstGeom prst="rect">
@@ -5296,7 +5288,7 @@
           <a:noFill/>
         </p:spPr>
         <p:txBody>
-          <a:bodyPr wrap="square" lIns="0" tIns="0" rIns="0" bIns="0" anchor="t">
+          <a:bodyPr wrap="square" lIns="0" rIns="0" tIns="0" bIns="0" anchor="t">
             <a:spAutoFit/>
           </a:bodyPr>
           <a:lstStyle/>
@@ -5322,16 +5314,16 @@
         </p:nvSpPr>
         <p:spPr>
           <a:xfrm>
-            <a:off x="640080" y="6035040"/>
-            <a:ext cx="10972800" cy="457200"/>
-          </a:xfrm>
-          <a:prstGeom prst="rect">
-            <a:avLst/>
-          </a:prstGeom>
-          <a:noFill/>
-        </p:spPr>
-        <p:txBody>
-          <a:bodyPr wrap="square" lIns="0" tIns="0" rIns="0" bIns="0" anchor="t">
+            <a:off x="640080" y="5943600"/>
+            <a:ext cx="10972800" cy="274320"/>
+          </a:xfrm>
+          <a:prstGeom prst="rect">
+            <a:avLst/>
+          </a:prstGeom>
+          <a:noFill/>
+        </p:spPr>
+        <p:txBody>
+          <a:bodyPr wrap="square" lIns="0" rIns="0" tIns="0" bIns="0" anchor="t">
             <a:spAutoFit/>
           </a:bodyPr>
           <a:lstStyle/>
@@ -5344,7 +5336,7 @@
                 </a:solidFill>
                 <a:latin typeface="JetBrains Mono"/>
               </a:rPr>
-              <a:t>Per-league treatment cells of 13–25 leave each test severely underpowered. Verdicts cell-by-cell are essentially noise.</a:t>
+              <a:t>Per-league treatment cells of 13–25 leave each test severely underpowered — pooled is the only inference to take seriously.</a:t>
             </a:r>
           </a:p>
         </p:txBody>
@@ -5357,29 +5349,29 @@
         </p:nvSpPr>
         <p:spPr>
           <a:xfrm>
-            <a:off x="640080" y="6492240"/>
-            <a:ext cx="10972800" cy="274320"/>
-          </a:xfrm>
-          <a:prstGeom prst="rect">
-            <a:avLst/>
-          </a:prstGeom>
-          <a:noFill/>
-        </p:spPr>
-        <p:txBody>
-          <a:bodyPr wrap="square" lIns="0" tIns="0" rIns="0" bIns="0" anchor="t">
-            <a:spAutoFit/>
-          </a:bodyPr>
-          <a:lstStyle/>
-          <a:p>
-            <a:pPr algn="l"/>
-            <a:r>
-              <a:rPr sz="1000" b="0" i="0">
-                <a:solidFill>
-                  <a:srgbClr val="C1FF72"/>
+            <a:off x="10911535" y="6355080"/>
+            <a:ext cx="1097280" cy="320040"/>
+          </a:xfrm>
+          <a:prstGeom prst="rect">
+            <a:avLst/>
+          </a:prstGeom>
+          <a:noFill/>
+        </p:spPr>
+        <p:txBody>
+          <a:bodyPr wrap="none" lIns="0" rIns="0" tIns="0" bIns="0">
+            <a:spAutoFit/>
+          </a:bodyPr>
+          <a:lstStyle/>
+          <a:p>
+            <a:pPr algn="r"/>
+            <a:r>
+              <a:rPr sz="900">
+                <a:solidFill>
+                  <a:srgbClr val="5A735A"/>
                 </a:solidFill>
                 <a:latin typeface="JetBrains Mono"/>
               </a:rPr>
-              <a:t>Pooled test is the only inference to take seriously.</a:t>
+              <a:t>10 / 12</a:t>
             </a:r>
           </a:p>
         </p:txBody>
@@ -5393,7 +5385,7 @@
 </file>
 
 <file path=ppt/slides/slide11.xml><?xml version="1.0" encoding="utf-8"?>
-<p:sld xmlns:a="http://schemas.openxmlformats.org/drawingml/2006/main" xmlns:r="http://schemas.openxmlformats.org/officeDocument/2006/relationships" xmlns:p="http://schemas.openxmlformats.org/presentationml/2006/main">
+<p:sld xmlns:a="http://schemas.openxmlformats.org/drawingml/2006/main" xmlns:p="http://schemas.openxmlformats.org/presentationml/2006/main" xmlns:r="http://schemas.openxmlformats.org/officeDocument/2006/relationships">
   <p:cSld>
     <p:bg>
       <p:bgPr>
@@ -5409,14 +5401,7 @@
         <p:cNvGrpSpPr/>
         <p:nvPr/>
       </p:nvGrpSpPr>
-      <p:grpSpPr>
-        <a:xfrm>
-          <a:off x="0" y="0"/>
-          <a:ext cx="0" cy="0"/>
-          <a:chOff x="0" y="0"/>
-          <a:chExt cx="0" cy="0"/>
-        </a:xfrm>
-      </p:grpSpPr>
+      <p:grpSpPr/>
       <p:sp>
         <p:nvSpPr>
           <p:cNvPr id="2" name="TextBox 1"/>
@@ -5425,23 +5410,23 @@
         </p:nvSpPr>
         <p:spPr>
           <a:xfrm>
-            <a:off x="411480" y="292608"/>
-            <a:ext cx="1828800" cy="457200"/>
-          </a:xfrm>
-          <a:prstGeom prst="rect">
-            <a:avLst/>
-          </a:prstGeom>
-          <a:noFill/>
-        </p:spPr>
-        <p:txBody>
-          <a:bodyPr wrap="none" lIns="0" tIns="0" rIns="0" bIns="0">
+            <a:off x="411480" y="6355080"/>
+            <a:ext cx="1828800" cy="365760"/>
+          </a:xfrm>
+          <a:prstGeom prst="rect">
+            <a:avLst/>
+          </a:prstGeom>
+          <a:noFill/>
+        </p:spPr>
+        <p:txBody>
+          <a:bodyPr wrap="none" lIns="0" rIns="0" tIns="0" bIns="0">
             <a:spAutoFit/>
           </a:bodyPr>
           <a:lstStyle/>
           <a:p>
             <a:pPr algn="l"/>
             <a:r>
-              <a:rPr sz="2000">
+              <a:rPr sz="1600">
                 <a:solidFill>
                   <a:srgbClr val="E8EFE8"/>
                 </a:solidFill>
@@ -5450,7 +5435,7 @@
               <a:t>ren</a:t>
             </a:r>
             <a:r>
-              <a:rPr sz="2000">
+              <a:rPr sz="1600">
                 <a:solidFill>
                   <a:srgbClr val="C1FF72"/>
                 </a:solidFill>
@@ -5469,23 +5454,23 @@
         </p:nvSpPr>
         <p:spPr>
           <a:xfrm>
-            <a:off x="640080" y="914400"/>
-            <a:ext cx="7315200" cy="274320"/>
-          </a:xfrm>
-          <a:prstGeom prst="rect">
-            <a:avLst/>
-          </a:prstGeom>
-          <a:noFill/>
-        </p:spPr>
-        <p:txBody>
-          <a:bodyPr wrap="square" lIns="0" tIns="0" rIns="0" bIns="0" anchor="t">
+            <a:off x="640080" y="457200"/>
+            <a:ext cx="10972800" cy="228600"/>
+          </a:xfrm>
+          <a:prstGeom prst="rect">
+            <a:avLst/>
+          </a:prstGeom>
+          <a:noFill/>
+        </p:spPr>
+        <p:txBody>
+          <a:bodyPr wrap="square" lIns="0" rIns="0" tIns="0" bIns="0" anchor="t">
             <a:spAutoFit/>
           </a:bodyPr>
           <a:lstStyle/>
           <a:p>
             <a:pPr algn="l"/>
             <a:r>
-              <a:rPr sz="1100" b="0" i="0">
+              <a:rPr sz="1000" b="0" i="0">
                 <a:solidFill>
                   <a:srgbClr val="C1FF72"/>
                 </a:solidFill>
@@ -5504,29 +5489,38 @@
         </p:nvSpPr>
         <p:spPr>
           <a:xfrm>
-            <a:off x="640080" y="1280160"/>
-            <a:ext cx="10972800" cy="731520"/>
-          </a:xfrm>
-          <a:prstGeom prst="rect">
-            <a:avLst/>
-          </a:prstGeom>
-          <a:noFill/>
-        </p:spPr>
-        <p:txBody>
-          <a:bodyPr wrap="square" lIns="0" tIns="0" rIns="0" bIns="0" anchor="t">
+            <a:off x="640080" y="713232"/>
+            <a:ext cx="10972800" cy="502920"/>
+          </a:xfrm>
+          <a:prstGeom prst="rect">
+            <a:avLst/>
+          </a:prstGeom>
+          <a:noFill/>
+        </p:spPr>
+        <p:txBody>
+          <a:bodyPr wrap="square" lIns="0" rIns="0" tIns="0" bIns="0" anchor="t">
             <a:spAutoFit/>
           </a:bodyPr>
           <a:lstStyle/>
           <a:p>
             <a:pPr algn="l"/>
             <a:r>
-              <a:rPr sz="3600" b="0" i="0">
+              <a:rPr sz="3200" b="0" i="0">
                 <a:solidFill>
                   <a:srgbClr val="E8EFE8"/>
                 </a:solidFill>
                 <a:latin typeface="Instrument Serif"/>
               </a:rPr>
-              <a:t>What the data says</a:t>
+              <a:t>What the data </a:t>
+            </a:r>
+            <a:r>
+              <a:rPr sz="3200" b="0" i="1">
+                <a:solidFill>
+                  <a:srgbClr val="C1FF72"/>
+                </a:solidFill>
+                <a:latin typeface="Instrument Serif"/>
+              </a:rPr>
+              <a:t>says</a:t>
             </a:r>
           </a:p>
         </p:txBody>
@@ -5539,7 +5533,7 @@
         </p:nvSpPr>
         <p:spPr>
           <a:xfrm>
-            <a:off x="640080" y="2194560"/>
+            <a:off x="640080" y="1280160"/>
             <a:ext cx="1097280" cy="25400"/>
           </a:xfrm>
           <a:prstGeom prst="rect">
@@ -5568,11 +5562,9 @@
           </a:fontRef>
         </p:style>
         <p:txBody>
-          <a:bodyPr lIns="0" tIns="0" rIns="0" bIns="0" rtlCol="0" anchor="ctr"/>
-          <a:lstStyle/>
-          <a:p>
-            <a:endParaRPr/>
-          </a:p>
+          <a:bodyPr rtlCol="0" anchor="ctr" lIns="0" rIns="0" tIns="0" bIns="0"/>
+          <a:lstStyle/>
+          <a:p/>
         </p:txBody>
       </p:sp>
       <p:sp>
@@ -5583,16 +5575,16 @@
         </p:nvSpPr>
         <p:spPr>
           <a:xfrm>
-            <a:off x="640080" y="2743200"/>
-            <a:ext cx="10972800" cy="1280160"/>
-          </a:xfrm>
-          <a:prstGeom prst="rect">
-            <a:avLst/>
-          </a:prstGeom>
-          <a:noFill/>
-        </p:spPr>
-        <p:txBody>
-          <a:bodyPr wrap="square" lIns="0" tIns="0" rIns="0" bIns="0" anchor="t">
+            <a:off x="640080" y="1463040"/>
+            <a:ext cx="10972800" cy="914400"/>
+          </a:xfrm>
+          <a:prstGeom prst="rect">
+            <a:avLst/>
+          </a:prstGeom>
+          <a:noFill/>
+        </p:spPr>
+        <p:txBody>
+          <a:bodyPr wrap="square" lIns="0" rIns="0" tIns="0" bIns="0" anchor="t">
             <a:spAutoFit/>
           </a:bodyPr>
           <a:lstStyle/>
@@ -5627,16 +5619,16 @@
         </p:nvSpPr>
         <p:spPr>
           <a:xfrm>
-            <a:off x="640080" y="4206240"/>
-            <a:ext cx="10972800" cy="1371600"/>
-          </a:xfrm>
-          <a:prstGeom prst="rect">
-            <a:avLst/>
-          </a:prstGeom>
-          <a:noFill/>
-        </p:spPr>
-        <p:txBody>
-          <a:bodyPr wrap="square" lIns="0" tIns="0" rIns="0" bIns="0" anchor="t">
+            <a:off x="640080" y="2560320"/>
+            <a:ext cx="10972800" cy="1828800"/>
+          </a:xfrm>
+          <a:prstGeom prst="rect">
+            <a:avLst/>
+          </a:prstGeom>
+          <a:noFill/>
+        </p:spPr>
+        <p:txBody>
+          <a:bodyPr wrap="square" lIns="0" rIns="0" tIns="0" bIns="0" anchor="t">
             <a:spAutoFit/>
           </a:bodyPr>
           <a:lstStyle/>
@@ -5662,16 +5654,16 @@
         </p:nvSpPr>
         <p:spPr>
           <a:xfrm>
-            <a:off x="640080" y="5852160"/>
-            <a:ext cx="10972800" cy="640080"/>
-          </a:xfrm>
-          <a:prstGeom prst="rect">
-            <a:avLst/>
-          </a:prstGeom>
-          <a:noFill/>
-        </p:spPr>
-        <p:txBody>
-          <a:bodyPr wrap="square" lIns="0" tIns="0" rIns="0" bIns="0" anchor="t">
+            <a:off x="640080" y="4572000"/>
+            <a:ext cx="10972800" cy="1097280"/>
+          </a:xfrm>
+          <a:prstGeom prst="rect">
+            <a:avLst/>
+          </a:prstGeom>
+          <a:noFill/>
+        </p:spPr>
+        <p:txBody>
+          <a:bodyPr wrap="square" lIns="0" rIns="0" tIns="0" bIns="0" anchor="t">
             <a:spAutoFit/>
           </a:bodyPr>
           <a:lstStyle/>
@@ -5685,6 +5677,41 @@
                 <a:latin typeface="DM Sans"/>
               </a:rPr>
               <a:t>→ No statistical warrant to override the fouled player who wants to take it himself. Equally, no clean evidence he's at full strength.</a:t>
+            </a:r>
+          </a:p>
+        </p:txBody>
+      </p:sp>
+      <p:sp>
+        <p:nvSpPr>
+          <p:cNvPr id="9" name="TextBox 8"/>
+          <p:cNvSpPr txBox="1"/>
+          <p:nvPr/>
+        </p:nvSpPr>
+        <p:spPr>
+          <a:xfrm>
+            <a:off x="10911535" y="6355080"/>
+            <a:ext cx="1097280" cy="320040"/>
+          </a:xfrm>
+          <a:prstGeom prst="rect">
+            <a:avLst/>
+          </a:prstGeom>
+          <a:noFill/>
+        </p:spPr>
+        <p:txBody>
+          <a:bodyPr wrap="none" lIns="0" rIns="0" tIns="0" bIns="0">
+            <a:spAutoFit/>
+          </a:bodyPr>
+          <a:lstStyle/>
+          <a:p>
+            <a:pPr algn="r"/>
+            <a:r>
+              <a:rPr sz="900">
+                <a:solidFill>
+                  <a:srgbClr val="5A735A"/>
+                </a:solidFill>
+                <a:latin typeface="JetBrains Mono"/>
+              </a:rPr>
+              <a:t>11 / 12</a:t>
             </a:r>
           </a:p>
         </p:txBody>
@@ -5698,7 +5725,7 @@
 </file>
 
 <file path=ppt/slides/slide12.xml><?xml version="1.0" encoding="utf-8"?>
-<p:sld xmlns:a="http://schemas.openxmlformats.org/drawingml/2006/main" xmlns:r="http://schemas.openxmlformats.org/officeDocument/2006/relationships" xmlns:p="http://schemas.openxmlformats.org/presentationml/2006/main">
+<p:sld xmlns:a="http://schemas.openxmlformats.org/drawingml/2006/main" xmlns:p="http://schemas.openxmlformats.org/presentationml/2006/main" xmlns:r="http://schemas.openxmlformats.org/officeDocument/2006/relationships">
   <p:cSld>
     <p:bg>
       <p:bgPr>
@@ -5714,14 +5741,7 @@
         <p:cNvGrpSpPr/>
         <p:nvPr/>
       </p:nvGrpSpPr>
-      <p:grpSpPr>
-        <a:xfrm>
-          <a:off x="0" y="0"/>
-          <a:ext cx="0" cy="0"/>
-          <a:chOff x="0" y="0"/>
-          <a:chExt cx="0" cy="0"/>
-        </a:xfrm>
-      </p:grpSpPr>
+      <p:grpSpPr/>
       <p:sp>
         <p:nvSpPr>
           <p:cNvPr id="2" name="TextBox 1"/>
@@ -5730,23 +5750,23 @@
         </p:nvSpPr>
         <p:spPr>
           <a:xfrm>
-            <a:off x="411480" y="292608"/>
-            <a:ext cx="1828800" cy="457200"/>
-          </a:xfrm>
-          <a:prstGeom prst="rect">
-            <a:avLst/>
-          </a:prstGeom>
-          <a:noFill/>
-        </p:spPr>
-        <p:txBody>
-          <a:bodyPr wrap="none" lIns="0" tIns="0" rIns="0" bIns="0">
+            <a:off x="411480" y="6355080"/>
+            <a:ext cx="1828800" cy="365760"/>
+          </a:xfrm>
+          <a:prstGeom prst="rect">
+            <a:avLst/>
+          </a:prstGeom>
+          <a:noFill/>
+        </p:spPr>
+        <p:txBody>
+          <a:bodyPr wrap="none" lIns="0" rIns="0" tIns="0" bIns="0">
             <a:spAutoFit/>
           </a:bodyPr>
           <a:lstStyle/>
           <a:p>
             <a:pPr algn="l"/>
             <a:r>
-              <a:rPr sz="2000">
+              <a:rPr sz="1600">
                 <a:solidFill>
                   <a:srgbClr val="E8EFE8"/>
                 </a:solidFill>
@@ -5755,7 +5775,7 @@
               <a:t>ren</a:t>
             </a:r>
             <a:r>
-              <a:rPr sz="2000">
+              <a:rPr sz="1600">
                 <a:solidFill>
                   <a:srgbClr val="C1FF72"/>
                 </a:solidFill>
@@ -5774,77 +5794,42 @@
         </p:nvSpPr>
         <p:spPr>
           <a:xfrm>
-            <a:off x="640080" y="914400"/>
-            <a:ext cx="7315200" cy="274320"/>
-          </a:xfrm>
-          <a:prstGeom prst="rect">
-            <a:avLst/>
-          </a:prstGeom>
-          <a:noFill/>
-        </p:spPr>
-        <p:txBody>
-          <a:bodyPr wrap="square" lIns="0" tIns="0" rIns="0" bIns="0" anchor="t">
+            <a:off x="640080" y="1280160"/>
+            <a:ext cx="10972800" cy="914400"/>
+          </a:xfrm>
+          <a:prstGeom prst="rect">
+            <a:avLst/>
+          </a:prstGeom>
+          <a:noFill/>
+        </p:spPr>
+        <p:txBody>
+          <a:bodyPr wrap="square" lIns="0" rIns="0" tIns="0" bIns="0" anchor="t">
             <a:spAutoFit/>
           </a:bodyPr>
           <a:lstStyle/>
           <a:p>
             <a:pPr algn="l"/>
             <a:r>
-              <a:rPr sz="1100" b="0" i="0">
-                <a:solidFill>
-                  <a:srgbClr val="C1FF72"/>
-                </a:solidFill>
-                <a:latin typeface="JetBrains Mono"/>
-              </a:rPr>
-              <a:t>SOURCES &amp; METHODOLOGY</a:t>
-            </a:r>
-          </a:p>
-        </p:txBody>
-      </p:sp>
-      <p:sp>
-        <p:nvSpPr>
-          <p:cNvPr id="4" name="TextBox 3"/>
-          <p:cNvSpPr txBox="1"/>
-          <p:nvPr/>
-        </p:nvSpPr>
-        <p:spPr>
-          <a:xfrm>
-            <a:off x="640080" y="1280160"/>
-            <a:ext cx="10972800" cy="731520"/>
-          </a:xfrm>
-          <a:prstGeom prst="rect">
-            <a:avLst/>
-          </a:prstGeom>
-          <a:noFill/>
-        </p:spPr>
-        <p:txBody>
-          <a:bodyPr wrap="square" lIns="0" tIns="0" rIns="0" bIns="0" anchor="t">
-            <a:spAutoFit/>
-          </a:bodyPr>
-          <a:lstStyle/>
-          <a:p>
-            <a:pPr algn="l"/>
-            <a:r>
-              <a:rPr sz="3600" b="0" i="0">
+              <a:rPr sz="4200" b="0" i="0">
                 <a:solidFill>
                   <a:srgbClr val="E8EFE8"/>
                 </a:solidFill>
                 <a:latin typeface="Instrument Serif"/>
               </a:rPr>
-              <a:t>Reproduce or dig deeper</a:t>
-            </a:r>
-          </a:p>
-        </p:txBody>
-      </p:sp>
-      <p:sp>
-        <p:nvSpPr>
-          <p:cNvPr id="5" name="Rectangle 4"/>
+              <a:t>Full methodology, source code and data:</a:t>
+            </a:r>
+          </a:p>
+        </p:txBody>
+      </p:sp>
+      <p:sp>
+        <p:nvSpPr>
+          <p:cNvPr id="4" name="Rectangle 3"/>
           <p:cNvSpPr/>
           <p:nvPr/>
         </p:nvSpPr>
         <p:spPr>
           <a:xfrm>
-            <a:off x="640080" y="2194560"/>
+            <a:off x="640080" y="2286000"/>
             <a:ext cx="1097280" cy="25400"/>
           </a:xfrm>
           <a:prstGeom prst="rect">
@@ -5873,16 +5858,14 @@
           </a:fontRef>
         </p:style>
         <p:txBody>
-          <a:bodyPr lIns="0" tIns="0" rIns="0" bIns="0" rtlCol="0" anchor="ctr"/>
-          <a:lstStyle/>
-          <a:p>
-            <a:endParaRPr/>
-          </a:p>
-        </p:txBody>
-      </p:sp>
-      <p:sp>
-        <p:nvSpPr>
-          <p:cNvPr id="6" name="TextBox 5"/>
+          <a:bodyPr rtlCol="0" anchor="ctr" lIns="0" rIns="0" tIns="0" bIns="0"/>
+          <a:lstStyle/>
+          <a:p/>
+        </p:txBody>
+      </p:sp>
+      <p:sp>
+        <p:nvSpPr>
+          <p:cNvPr id="5" name="TextBox 4"/>
           <p:cNvSpPr txBox="1"/>
           <p:nvPr/>
         </p:nvSpPr>
@@ -5897,7 +5880,7 @@
           <a:noFill/>
         </p:spPr>
         <p:txBody>
-          <a:bodyPr wrap="square" lIns="0" tIns="0" rIns="0" bIns="0" anchor="t">
+          <a:bodyPr wrap="square" lIns="0" rIns="0" tIns="0" bIns="0" anchor="t">
             <a:spAutoFit/>
           </a:bodyPr>
           <a:lstStyle/>
@@ -5917,7 +5900,7 @@
       </p:sp>
       <p:sp>
         <p:nvSpPr>
-          <p:cNvPr id="7" name="TextBox 6"/>
+          <p:cNvPr id="6" name="TextBox 5"/>
           <p:cNvSpPr txBox="1"/>
           <p:nvPr/>
         </p:nvSpPr>
@@ -5932,7 +5915,7 @@
           <a:noFill/>
         </p:spPr>
         <p:txBody>
-          <a:bodyPr wrap="square" lIns="0" tIns="0" rIns="0" bIns="0" anchor="t">
+          <a:bodyPr wrap="square" lIns="0" rIns="0" tIns="0" bIns="0" anchor="t">
             <a:spAutoFit/>
           </a:bodyPr>
           <a:lstStyle/>
@@ -5952,7 +5935,7 @@
       </p:sp>
       <p:sp>
         <p:nvSpPr>
-          <p:cNvPr id="8" name="TextBox 7"/>
+          <p:cNvPr id="7" name="TextBox 6"/>
           <p:cNvSpPr txBox="1"/>
           <p:nvPr/>
         </p:nvSpPr>
@@ -5967,7 +5950,7 @@
           <a:noFill/>
         </p:spPr>
         <p:txBody>
-          <a:bodyPr wrap="square" lIns="0" tIns="0" rIns="0" bIns="0" anchor="t">
+          <a:bodyPr wrap="square" lIns="0" rIns="0" tIns="0" bIns="0" anchor="t">
             <a:spAutoFit/>
           </a:bodyPr>
           <a:lstStyle/>
@@ -5987,22 +5970,57 @@
       </p:sp>
       <p:sp>
         <p:nvSpPr>
+          <p:cNvPr id="8" name="TextBox 7"/>
+          <p:cNvSpPr txBox="1"/>
+          <p:nvPr/>
+        </p:nvSpPr>
+        <p:spPr>
+          <a:xfrm>
+            <a:off x="640080" y="4937760"/>
+            <a:ext cx="10972800" cy="396239"/>
+          </a:xfrm>
+          <a:prstGeom prst="rect">
+            <a:avLst/>
+          </a:prstGeom>
+          <a:noFill/>
+        </p:spPr>
+        <p:txBody>
+          <a:bodyPr wrap="square" lIns="0" rIns="0" tIns="0" bIns="0" anchor="t">
+            <a:spAutoFit/>
+          </a:bodyPr>
+          <a:lstStyle/>
+          <a:p>
+            <a:pPr algn="l"/>
+            <a:r>
+              <a:rPr sz="1200" b="0" i="0">
+                <a:solidFill>
+                  <a:srgbClr val="5A735A"/>
+                </a:solidFill>
+                <a:latin typeface="JetBrains Mono"/>
+              </a:rPr>
+              <a:t>→ methodology      formal H₀ / H₁, test assumptions, limitations</a:t>
+            </a:r>
+          </a:p>
+        </p:txBody>
+      </p:sp>
+      <p:sp>
+        <p:nvSpPr>
           <p:cNvPr id="9" name="TextBox 8"/>
           <p:cNvSpPr txBox="1"/>
           <p:nvPr/>
         </p:nvSpPr>
         <p:spPr>
           <a:xfrm>
-            <a:off x="640080" y="5212080"/>
-            <a:ext cx="10972800" cy="365760"/>
-          </a:xfrm>
-          <a:prstGeom prst="rect">
-            <a:avLst/>
-          </a:prstGeom>
-          <a:noFill/>
-        </p:spPr>
-        <p:txBody>
-          <a:bodyPr wrap="square" lIns="0" tIns="0" rIns="0" bIns="0" anchor="t">
+            <a:off x="640080" y="5334000"/>
+            <a:ext cx="10972800" cy="396239"/>
+          </a:xfrm>
+          <a:prstGeom prst="rect">
+            <a:avLst/>
+          </a:prstGeom>
+          <a:noFill/>
+        </p:spPr>
+        <p:txBody>
+          <a:bodyPr wrap="square" lIns="0" rIns="0" tIns="0" bIns="0" anchor="t">
             <a:spAutoFit/>
           </a:bodyPr>
           <a:lstStyle/>
@@ -6015,7 +6033,7 @@
                 </a:solidFill>
                 <a:latin typeface="JetBrains Mono"/>
               </a:rPr>
-              <a:t>→ methodology.pdf  ·  formal H₀/H₁, test assumptions, limitations</a:t>
+              <a:t>→ analysis.html    interactive dashboard, live numbers from data.json</a:t>
             </a:r>
           </a:p>
         </p:txBody>
@@ -6028,16 +6046,16 @@
         </p:nvSpPr>
         <p:spPr>
           <a:xfrm>
-            <a:off x="640080" y="5532120"/>
-            <a:ext cx="10972800" cy="365760"/>
-          </a:xfrm>
-          <a:prstGeom prst="rect">
-            <a:avLst/>
-          </a:prstGeom>
-          <a:noFill/>
-        </p:spPr>
-        <p:txBody>
-          <a:bodyPr wrap="square" lIns="0" tIns="0" rIns="0" bIns="0" anchor="t">
+            <a:off x="640080" y="5730240"/>
+            <a:ext cx="10972800" cy="396239"/>
+          </a:xfrm>
+          <a:prstGeom prst="rect">
+            <a:avLst/>
+          </a:prstGeom>
+          <a:noFill/>
+        </p:spPr>
+        <p:txBody>
+          <a:bodyPr wrap="square" lIns="0" rIns="0" tIns="0" bIns="0" anchor="t">
             <a:spAutoFit/>
           </a:bodyPr>
           <a:lstStyle/>
@@ -6050,77 +6068,7 @@
                 </a:solidFill>
                 <a:latin typeface="JetBrains Mono"/>
               </a:rPr>
-              <a:t>→ analysis.html  ·  interactive dashboard, live numbers from data.json</a:t>
-            </a:r>
-          </a:p>
-        </p:txBody>
-      </p:sp>
-      <p:sp>
-        <p:nvSpPr>
-          <p:cNvPr id="11" name="TextBox 10"/>
-          <p:cNvSpPr txBox="1"/>
-          <p:nvPr/>
-        </p:nvSpPr>
-        <p:spPr>
-          <a:xfrm>
-            <a:off x="640080" y="5852160"/>
-            <a:ext cx="10972800" cy="365760"/>
-          </a:xfrm>
-          <a:prstGeom prst="rect">
-            <a:avLst/>
-          </a:prstGeom>
-          <a:noFill/>
-        </p:spPr>
-        <p:txBody>
-          <a:bodyPr wrap="square" lIns="0" tIns="0" rIns="0" bIns="0" anchor="t">
-            <a:spAutoFit/>
-          </a:bodyPr>
-          <a:lstStyle/>
-          <a:p>
-            <a:pPr algn="l"/>
-            <a:r>
-              <a:rPr sz="1200" b="0" i="0">
-                <a:solidFill>
-                  <a:srgbClr val="5A735A"/>
-                </a:solidFill>
-                <a:latin typeface="JetBrains Mono"/>
-              </a:rPr>
-              <a:t>→ code/build.py  ·  Python pipeline from raw pickles to aggregated JSON</a:t>
-            </a:r>
-          </a:p>
-        </p:txBody>
-      </p:sp>
-      <p:sp>
-        <p:nvSpPr>
-          <p:cNvPr id="12" name="TextBox 11"/>
-          <p:cNvSpPr txBox="1"/>
-          <p:nvPr/>
-        </p:nvSpPr>
-        <p:spPr>
-          <a:xfrm>
-            <a:off x="640080" y="6400800"/>
-            <a:ext cx="10972800" cy="274320"/>
-          </a:xfrm>
-          <a:prstGeom prst="rect">
-            <a:avLst/>
-          </a:prstGeom>
-          <a:noFill/>
-        </p:spPr>
-        <p:txBody>
-          <a:bodyPr wrap="square" lIns="0" tIns="0" rIns="0" bIns="0" anchor="t">
-            <a:spAutoFit/>
-          </a:bodyPr>
-          <a:lstStyle/>
-          <a:p>
-            <a:pPr algn="l"/>
-            <a:r>
-              <a:rPr sz="1000" b="0" i="0">
-                <a:solidFill>
-                  <a:srgbClr val="5A735A"/>
-                </a:solidFill>
-                <a:latin typeface="JetBrains Mono"/>
-              </a:rPr>
-              <a:t>Data source: FBref player-match statistics, top 5 European leagues.</a:t>
+              <a:t>→ code/build.py    Python pipeline — raw pickles → aggregated JSON</a:t>
             </a:r>
           </a:p>
         </p:txBody>
@@ -6134,7 +6082,7 @@
 </file>
 
 <file path=ppt/slides/slide2.xml><?xml version="1.0" encoding="utf-8"?>
-<p:sld xmlns:a="http://schemas.openxmlformats.org/drawingml/2006/main" xmlns:r="http://schemas.openxmlformats.org/officeDocument/2006/relationships" xmlns:p="http://schemas.openxmlformats.org/presentationml/2006/main">
+<p:sld xmlns:a="http://schemas.openxmlformats.org/drawingml/2006/main" xmlns:p="http://schemas.openxmlformats.org/presentationml/2006/main" xmlns:r="http://schemas.openxmlformats.org/officeDocument/2006/relationships">
   <p:cSld>
     <p:bg>
       <p:bgPr>
@@ -6150,14 +6098,7 @@
         <p:cNvGrpSpPr/>
         <p:nvPr/>
       </p:nvGrpSpPr>
-      <p:grpSpPr>
-        <a:xfrm>
-          <a:off x="0" y="0"/>
-          <a:ext cx="0" cy="0"/>
-          <a:chOff x="0" y="0"/>
-          <a:chExt cx="0" cy="0"/>
-        </a:xfrm>
-      </p:grpSpPr>
+      <p:grpSpPr/>
       <p:sp>
         <p:nvSpPr>
           <p:cNvPr id="2" name="TextBox 1"/>
@@ -6166,23 +6107,23 @@
         </p:nvSpPr>
         <p:spPr>
           <a:xfrm>
-            <a:off x="411480" y="292608"/>
-            <a:ext cx="1828800" cy="457200"/>
-          </a:xfrm>
-          <a:prstGeom prst="rect">
-            <a:avLst/>
-          </a:prstGeom>
-          <a:noFill/>
-        </p:spPr>
-        <p:txBody>
-          <a:bodyPr wrap="none" lIns="0" tIns="0" rIns="0" bIns="0">
+            <a:off x="411480" y="6355080"/>
+            <a:ext cx="1828800" cy="365760"/>
+          </a:xfrm>
+          <a:prstGeom prst="rect">
+            <a:avLst/>
+          </a:prstGeom>
+          <a:noFill/>
+        </p:spPr>
+        <p:txBody>
+          <a:bodyPr wrap="none" lIns="0" rIns="0" tIns="0" bIns="0">
             <a:spAutoFit/>
           </a:bodyPr>
           <a:lstStyle/>
           <a:p>
             <a:pPr algn="l"/>
             <a:r>
-              <a:rPr sz="2000">
+              <a:rPr sz="1600">
                 <a:solidFill>
                   <a:srgbClr val="E8EFE8"/>
                 </a:solidFill>
@@ -6191,7 +6132,7 @@
               <a:t>ren</a:t>
             </a:r>
             <a:r>
-              <a:rPr sz="2000">
+              <a:rPr sz="1600">
                 <a:solidFill>
                   <a:srgbClr val="C1FF72"/>
                 </a:solidFill>
@@ -6210,23 +6151,23 @@
         </p:nvSpPr>
         <p:spPr>
           <a:xfrm>
-            <a:off x="640080" y="914400"/>
-            <a:ext cx="7315200" cy="274320"/>
-          </a:xfrm>
-          <a:prstGeom prst="rect">
-            <a:avLst/>
-          </a:prstGeom>
-          <a:noFill/>
-        </p:spPr>
-        <p:txBody>
-          <a:bodyPr wrap="square" lIns="0" tIns="0" rIns="0" bIns="0" anchor="t">
+            <a:off x="640080" y="457200"/>
+            <a:ext cx="10972800" cy="228600"/>
+          </a:xfrm>
+          <a:prstGeom prst="rect">
+            <a:avLst/>
+          </a:prstGeom>
+          <a:noFill/>
+        </p:spPr>
+        <p:txBody>
+          <a:bodyPr wrap="square" lIns="0" rIns="0" tIns="0" bIns="0" anchor="t">
             <a:spAutoFit/>
           </a:bodyPr>
           <a:lstStyle/>
           <a:p>
             <a:pPr algn="l"/>
             <a:r>
-              <a:rPr sz="1100" b="0" i="0">
+              <a:rPr sz="1000" b="0" i="0">
                 <a:solidFill>
                   <a:srgbClr val="C1FF72"/>
                 </a:solidFill>
@@ -6245,29 +6186,38 @@
         </p:nvSpPr>
         <p:spPr>
           <a:xfrm>
-            <a:off x="640080" y="1280160"/>
-            <a:ext cx="10972800" cy="731520"/>
-          </a:xfrm>
-          <a:prstGeom prst="rect">
-            <a:avLst/>
-          </a:prstGeom>
-          <a:noFill/>
-        </p:spPr>
-        <p:txBody>
-          <a:bodyPr wrap="square" lIns="0" tIns="0" rIns="0" bIns="0" anchor="t">
+            <a:off x="640080" y="713232"/>
+            <a:ext cx="10972800" cy="502920"/>
+          </a:xfrm>
+          <a:prstGeom prst="rect">
+            <a:avLst/>
+          </a:prstGeom>
+          <a:noFill/>
+        </p:spPr>
+        <p:txBody>
+          <a:bodyPr wrap="square" lIns="0" rIns="0" tIns="0" bIns="0" anchor="t">
             <a:spAutoFit/>
           </a:bodyPr>
           <a:lstStyle/>
           <a:p>
             <a:pPr algn="l"/>
             <a:r>
-              <a:rPr sz="3600" b="0" i="0">
+              <a:rPr sz="3200" b="0" i="0">
                 <a:solidFill>
                   <a:srgbClr val="E8EFE8"/>
                 </a:solidFill>
                 <a:latin typeface="Instrument Serif"/>
               </a:rPr>
-              <a:t>Three sentences</a:t>
+              <a:t>Three </a:t>
+            </a:r>
+            <a:r>
+              <a:rPr sz="3200" b="0" i="1">
+                <a:solidFill>
+                  <a:srgbClr val="C1FF72"/>
+                </a:solidFill>
+                <a:latin typeface="Instrument Serif"/>
+              </a:rPr>
+              <a:t>sentences</a:t>
             </a:r>
           </a:p>
         </p:txBody>
@@ -6280,7 +6230,7 @@
         </p:nvSpPr>
         <p:spPr>
           <a:xfrm>
-            <a:off x="640080" y="2194560"/>
+            <a:off x="640080" y="1280160"/>
             <a:ext cx="1097280" cy="25400"/>
           </a:xfrm>
           <a:prstGeom prst="rect">
@@ -6309,11 +6259,9 @@
           </a:fontRef>
         </p:style>
         <p:txBody>
-          <a:bodyPr lIns="0" tIns="0" rIns="0" bIns="0" rtlCol="0" anchor="ctr"/>
-          <a:lstStyle/>
-          <a:p>
-            <a:endParaRPr/>
-          </a:p>
+          <a:bodyPr rtlCol="0" anchor="ctr" lIns="0" rIns="0" tIns="0" bIns="0"/>
+          <a:lstStyle/>
+          <a:p/>
         </p:txBody>
       </p:sp>
       <p:sp>
@@ -6324,7 +6272,7 @@
         </p:nvSpPr>
         <p:spPr>
           <a:xfrm>
-            <a:off x="640080" y="2743200"/>
+            <a:off x="640080" y="1463040"/>
             <a:ext cx="2194560" cy="274320"/>
           </a:xfrm>
           <a:prstGeom prst="rect">
@@ -6333,7 +6281,7 @@
           <a:noFill/>
         </p:spPr>
         <p:txBody>
-          <a:bodyPr wrap="square" lIns="0" tIns="0" rIns="0" bIns="0" anchor="t">
+          <a:bodyPr wrap="square" lIns="0" rIns="0" tIns="0" bIns="0" anchor="t">
             <a:spAutoFit/>
           </a:bodyPr>
           <a:lstStyle/>
@@ -6359,16 +6307,16 @@
         </p:nvSpPr>
         <p:spPr>
           <a:xfrm>
-            <a:off x="2926080" y="2679192"/>
-            <a:ext cx="8595360" cy="1005840"/>
-          </a:xfrm>
-          <a:prstGeom prst="rect">
-            <a:avLst/>
-          </a:prstGeom>
-          <a:noFill/>
-        </p:spPr>
-        <p:txBody>
-          <a:bodyPr wrap="square" lIns="0" tIns="0" rIns="0" bIns="0" anchor="t">
+            <a:off x="2926080" y="1399032"/>
+            <a:ext cx="8503920" cy="1097280"/>
+          </a:xfrm>
+          <a:prstGeom prst="rect">
+            <a:avLst/>
+          </a:prstGeom>
+          <a:noFill/>
+        </p:spPr>
+        <p:txBody>
+          <a:bodyPr wrap="square" lIns="0" rIns="0" tIns="0" bIns="0" anchor="t">
             <a:spAutoFit/>
           </a:bodyPr>
           <a:lstStyle/>
@@ -6394,7 +6342,7 @@
         </p:nvSpPr>
         <p:spPr>
           <a:xfrm>
-            <a:off x="640080" y="3931920"/>
+            <a:off x="640080" y="2880360"/>
             <a:ext cx="2194560" cy="274320"/>
           </a:xfrm>
           <a:prstGeom prst="rect">
@@ -6403,7 +6351,7 @@
           <a:noFill/>
         </p:spPr>
         <p:txBody>
-          <a:bodyPr wrap="square" lIns="0" tIns="0" rIns="0" bIns="0" anchor="t">
+          <a:bodyPr wrap="square" lIns="0" rIns="0" tIns="0" bIns="0" anchor="t">
             <a:spAutoFit/>
           </a:bodyPr>
           <a:lstStyle/>
@@ -6429,16 +6377,16 @@
         </p:nvSpPr>
         <p:spPr>
           <a:xfrm>
-            <a:off x="2926080" y="3867911"/>
-            <a:ext cx="8595360" cy="1005840"/>
-          </a:xfrm>
-          <a:prstGeom prst="rect">
-            <a:avLst/>
-          </a:prstGeom>
-          <a:noFill/>
-        </p:spPr>
-        <p:txBody>
-          <a:bodyPr wrap="square" lIns="0" tIns="0" rIns="0" bIns="0" anchor="t">
+            <a:off x="2926080" y="2816352"/>
+            <a:ext cx="8503920" cy="1097280"/>
+          </a:xfrm>
+          <a:prstGeom prst="rect">
+            <a:avLst/>
+          </a:prstGeom>
+          <a:noFill/>
+        </p:spPr>
+        <p:txBody>
+          <a:bodyPr wrap="square" lIns="0" rIns="0" tIns="0" bIns="0" anchor="t">
             <a:spAutoFit/>
           </a:bodyPr>
           <a:lstStyle/>
@@ -6464,7 +6412,7 @@
         </p:nvSpPr>
         <p:spPr>
           <a:xfrm>
-            <a:off x="640080" y="5120640"/>
+            <a:off x="640080" y="4297680"/>
             <a:ext cx="2194560" cy="274320"/>
           </a:xfrm>
           <a:prstGeom prst="rect">
@@ -6473,7 +6421,7 @@
           <a:noFill/>
         </p:spPr>
         <p:txBody>
-          <a:bodyPr wrap="square" lIns="0" tIns="0" rIns="0" bIns="0" anchor="t">
+          <a:bodyPr wrap="square" lIns="0" rIns="0" tIns="0" bIns="0" anchor="t">
             <a:spAutoFit/>
           </a:bodyPr>
           <a:lstStyle/>
@@ -6499,16 +6447,16 @@
         </p:nvSpPr>
         <p:spPr>
           <a:xfrm>
-            <a:off x="2926080" y="5056631"/>
-            <a:ext cx="8595360" cy="1005840"/>
-          </a:xfrm>
-          <a:prstGeom prst="rect">
-            <a:avLst/>
-          </a:prstGeom>
-          <a:noFill/>
-        </p:spPr>
-        <p:txBody>
-          <a:bodyPr wrap="square" lIns="0" tIns="0" rIns="0" bIns="0" anchor="t">
+            <a:off x="2926080" y="4233672"/>
+            <a:ext cx="8503920" cy="1097280"/>
+          </a:xfrm>
+          <a:prstGeom prst="rect">
+            <a:avLst/>
+          </a:prstGeom>
+          <a:noFill/>
+        </p:spPr>
+        <p:txBody>
+          <a:bodyPr wrap="square" lIns="0" rIns="0" tIns="0" bIns="0" anchor="t">
             <a:spAutoFit/>
           </a:bodyPr>
           <a:lstStyle/>
@@ -6522,6 +6470,41 @@
                 <a:latin typeface="Instrument Serif"/>
               </a:rPr>
               <a:t>Δ = -3.25 pp (predicted direction) but p = 0.218, one-tailed — fail to reject H₀ at the available power.</a:t>
+            </a:r>
+          </a:p>
+        </p:txBody>
+      </p:sp>
+      <p:sp>
+        <p:nvSpPr>
+          <p:cNvPr id="12" name="TextBox 11"/>
+          <p:cNvSpPr txBox="1"/>
+          <p:nvPr/>
+        </p:nvSpPr>
+        <p:spPr>
+          <a:xfrm>
+            <a:off x="10911535" y="6355080"/>
+            <a:ext cx="1097280" cy="320040"/>
+          </a:xfrm>
+          <a:prstGeom prst="rect">
+            <a:avLst/>
+          </a:prstGeom>
+          <a:noFill/>
+        </p:spPr>
+        <p:txBody>
+          <a:bodyPr wrap="none" lIns="0" rIns="0" tIns="0" bIns="0">
+            <a:spAutoFit/>
+          </a:bodyPr>
+          <a:lstStyle/>
+          <a:p>
+            <a:pPr algn="r"/>
+            <a:r>
+              <a:rPr sz="900">
+                <a:solidFill>
+                  <a:srgbClr val="5A735A"/>
+                </a:solidFill>
+                <a:latin typeface="JetBrains Mono"/>
+              </a:rPr>
+              <a:t>02 / 12</a:t>
             </a:r>
           </a:p>
         </p:txBody>
@@ -6535,7 +6518,7 @@
 </file>
 
 <file path=ppt/slides/slide3.xml><?xml version="1.0" encoding="utf-8"?>
-<p:sld xmlns:a="http://schemas.openxmlformats.org/drawingml/2006/main" xmlns:r="http://schemas.openxmlformats.org/officeDocument/2006/relationships" xmlns:p="http://schemas.openxmlformats.org/presentationml/2006/main">
+<p:sld xmlns:a="http://schemas.openxmlformats.org/drawingml/2006/main" xmlns:p="http://schemas.openxmlformats.org/presentationml/2006/main" xmlns:r="http://schemas.openxmlformats.org/officeDocument/2006/relationships">
   <p:cSld>
     <p:bg>
       <p:bgPr>
@@ -6551,14 +6534,7 @@
         <p:cNvGrpSpPr/>
         <p:nvPr/>
       </p:nvGrpSpPr>
-      <p:grpSpPr>
-        <a:xfrm>
-          <a:off x="0" y="0"/>
-          <a:ext cx="0" cy="0"/>
-          <a:chOff x="0" y="0"/>
-          <a:chExt cx="0" cy="0"/>
-        </a:xfrm>
-      </p:grpSpPr>
+      <p:grpSpPr/>
       <p:sp>
         <p:nvSpPr>
           <p:cNvPr id="2" name="TextBox 1"/>
@@ -6567,23 +6543,23 @@
         </p:nvSpPr>
         <p:spPr>
           <a:xfrm>
-            <a:off x="411480" y="292608"/>
-            <a:ext cx="1828800" cy="457200"/>
-          </a:xfrm>
-          <a:prstGeom prst="rect">
-            <a:avLst/>
-          </a:prstGeom>
-          <a:noFill/>
-        </p:spPr>
-        <p:txBody>
-          <a:bodyPr wrap="none" lIns="0" tIns="0" rIns="0" bIns="0">
+            <a:off x="411480" y="6355080"/>
+            <a:ext cx="1828800" cy="365760"/>
+          </a:xfrm>
+          <a:prstGeom prst="rect">
+            <a:avLst/>
+          </a:prstGeom>
+          <a:noFill/>
+        </p:spPr>
+        <p:txBody>
+          <a:bodyPr wrap="none" lIns="0" rIns="0" tIns="0" bIns="0">
             <a:spAutoFit/>
           </a:bodyPr>
           <a:lstStyle/>
           <a:p>
             <a:pPr algn="l"/>
             <a:r>
-              <a:rPr sz="2000">
+              <a:rPr sz="1600">
                 <a:solidFill>
                   <a:srgbClr val="E8EFE8"/>
                 </a:solidFill>
@@ -6592,7 +6568,7 @@
               <a:t>ren</a:t>
             </a:r>
             <a:r>
-              <a:rPr sz="2000">
+              <a:rPr sz="1600">
                 <a:solidFill>
                   <a:srgbClr val="C1FF72"/>
                 </a:solidFill>
@@ -6611,23 +6587,23 @@
         </p:nvSpPr>
         <p:spPr>
           <a:xfrm>
-            <a:off x="640080" y="914400"/>
-            <a:ext cx="7315200" cy="274320"/>
-          </a:xfrm>
-          <a:prstGeom prst="rect">
-            <a:avLst/>
-          </a:prstGeom>
-          <a:noFill/>
-        </p:spPr>
-        <p:txBody>
-          <a:bodyPr wrap="square" lIns="0" tIns="0" rIns="0" bIns="0" anchor="t">
+            <a:off x="640080" y="457200"/>
+            <a:ext cx="10972800" cy="228600"/>
+          </a:xfrm>
+          <a:prstGeom prst="rect">
+            <a:avLst/>
+          </a:prstGeom>
+          <a:noFill/>
+        </p:spPr>
+        <p:txBody>
+          <a:bodyPr wrap="square" lIns="0" rIns="0" tIns="0" bIns="0" anchor="t">
             <a:spAutoFit/>
           </a:bodyPr>
           <a:lstStyle/>
           <a:p>
             <a:pPr algn="l"/>
             <a:r>
-              <a:rPr sz="1100" b="0" i="0">
+              <a:rPr sz="1000" b="0" i="0">
                 <a:solidFill>
                   <a:srgbClr val="C1FF72"/>
                 </a:solidFill>
@@ -6646,29 +6622,47 @@
         </p:nvSpPr>
         <p:spPr>
           <a:xfrm>
-            <a:off x="640080" y="1280160"/>
-            <a:ext cx="10972800" cy="731520"/>
-          </a:xfrm>
-          <a:prstGeom prst="rect">
-            <a:avLst/>
-          </a:prstGeom>
-          <a:noFill/>
-        </p:spPr>
-        <p:txBody>
-          <a:bodyPr wrap="square" lIns="0" tIns="0" rIns="0" bIns="0" anchor="t">
+            <a:off x="640080" y="713232"/>
+            <a:ext cx="10972800" cy="502920"/>
+          </a:xfrm>
+          <a:prstGeom prst="rect">
+            <a:avLst/>
+          </a:prstGeom>
+          <a:noFill/>
+        </p:spPr>
+        <p:txBody>
+          <a:bodyPr wrap="square" lIns="0" rIns="0" tIns="0" bIns="0" anchor="t">
             <a:spAutoFit/>
           </a:bodyPr>
           <a:lstStyle/>
           <a:p>
             <a:pPr algn="l"/>
             <a:r>
-              <a:rPr sz="3600" b="0" i="0">
+              <a:rPr sz="3200" b="0" i="0">
                 <a:solidFill>
                   <a:srgbClr val="E8EFE8"/>
                 </a:solidFill>
                 <a:latin typeface="Instrument Serif"/>
               </a:rPr>
-              <a:t>Why we'd expect a drop</a:t>
+              <a:t>Why we'd </a:t>
+            </a:r>
+            <a:r>
+              <a:rPr sz="3200" b="0" i="1">
+                <a:solidFill>
+                  <a:srgbClr val="C1FF72"/>
+                </a:solidFill>
+                <a:latin typeface="Instrument Serif"/>
+              </a:rPr>
+              <a:t>expect</a:t>
+            </a:r>
+            <a:r>
+              <a:rPr sz="3200" b="0" i="0">
+                <a:solidFill>
+                  <a:srgbClr val="E8EFE8"/>
+                </a:solidFill>
+                <a:latin typeface="Instrument Serif"/>
+              </a:rPr>
+              <a:t> a drop</a:t>
             </a:r>
           </a:p>
         </p:txBody>
@@ -6681,7 +6675,7 @@
         </p:nvSpPr>
         <p:spPr>
           <a:xfrm>
-            <a:off x="640080" y="2194560"/>
+            <a:off x="640080" y="1280160"/>
             <a:ext cx="1097280" cy="25400"/>
           </a:xfrm>
           <a:prstGeom prst="rect">
@@ -6710,11 +6704,9 @@
           </a:fontRef>
         </p:style>
         <p:txBody>
-          <a:bodyPr lIns="0" tIns="0" rIns="0" bIns="0" rtlCol="0" anchor="ctr"/>
-          <a:lstStyle/>
-          <a:p>
-            <a:endParaRPr/>
-          </a:p>
+          <a:bodyPr rtlCol="0" anchor="ctr" lIns="0" rIns="0" tIns="0" bIns="0"/>
+          <a:lstStyle/>
+          <a:p/>
         </p:txBody>
       </p:sp>
       <p:sp>
@@ -6725,7 +6717,7 @@
         </p:nvSpPr>
         <p:spPr>
           <a:xfrm>
-            <a:off x="640080" y="2743200"/>
+            <a:off x="640080" y="1463040"/>
             <a:ext cx="10972800" cy="640080"/>
           </a:xfrm>
           <a:prstGeom prst="rect">
@@ -6734,7 +6726,7 @@
           <a:noFill/>
         </p:spPr>
         <p:txBody>
-          <a:bodyPr wrap="square" lIns="0" tIns="0" rIns="0" bIns="0" anchor="t">
+          <a:bodyPr wrap="square" lIns="0" rIns="0" tIns="0" bIns="0" anchor="t">
             <a:spAutoFit/>
           </a:bodyPr>
           <a:lstStyle/>
@@ -6760,16 +6752,16 @@
         </p:nvSpPr>
         <p:spPr>
           <a:xfrm>
-            <a:off x="640080" y="3657600"/>
-            <a:ext cx="5486400" cy="2377440"/>
-          </a:xfrm>
-          <a:prstGeom prst="rect">
-            <a:avLst/>
-          </a:prstGeom>
-          <a:noFill/>
-        </p:spPr>
-        <p:txBody>
-          <a:bodyPr wrap="square" lIns="0" tIns="0" rIns="0" bIns="0" anchor="t">
+            <a:off x="640080" y="2377440"/>
+            <a:ext cx="5486400" cy="3108960"/>
+          </a:xfrm>
+          <a:prstGeom prst="rect">
+            <a:avLst/>
+          </a:prstGeom>
+          <a:noFill/>
+        </p:spPr>
+        <p:txBody>
+          <a:bodyPr wrap="square" lIns="0" rIns="0" tIns="0" bIns="0" anchor="t">
             <a:spAutoFit/>
           </a:bodyPr>
           <a:lstStyle/>
@@ -6795,16 +6787,16 @@
         </p:nvSpPr>
         <p:spPr>
           <a:xfrm>
-            <a:off x="6400800" y="3657600"/>
-            <a:ext cx="5486400" cy="2377440"/>
-          </a:xfrm>
-          <a:prstGeom prst="rect">
-            <a:avLst/>
-          </a:prstGeom>
-          <a:noFill/>
-        </p:spPr>
-        <p:txBody>
-          <a:bodyPr wrap="square" lIns="0" tIns="0" rIns="0" bIns="0" anchor="t">
+            <a:off x="6400800" y="2377440"/>
+            <a:ext cx="5212080" cy="3108960"/>
+          </a:xfrm>
+          <a:prstGeom prst="rect">
+            <a:avLst/>
+          </a:prstGeom>
+          <a:noFill/>
+        </p:spPr>
+        <p:txBody>
+          <a:bodyPr wrap="square" lIns="0" rIns="0" tIns="0" bIns="0" anchor="t">
             <a:spAutoFit/>
           </a:bodyPr>
           <a:lstStyle/>
@@ -6830,16 +6822,16 @@
         </p:nvSpPr>
         <p:spPr>
           <a:xfrm>
-            <a:off x="640080" y="6035040"/>
-            <a:ext cx="10972800" cy="457200"/>
-          </a:xfrm>
-          <a:prstGeom prst="rect">
-            <a:avLst/>
-          </a:prstGeom>
-          <a:noFill/>
-        </p:spPr>
-        <p:txBody>
-          <a:bodyPr wrap="square" lIns="0" tIns="0" rIns="0" bIns="0" anchor="t">
+            <a:off x="640080" y="5943600"/>
+            <a:ext cx="10972800" cy="274320"/>
+          </a:xfrm>
+          <a:prstGeom prst="rect">
+            <a:avLst/>
+          </a:prstGeom>
+          <a:noFill/>
+        </p:spPr>
+        <p:txBody>
+          <a:bodyPr wrap="square" lIns="0" rIns="0" tIns="0" bIns="0" anchor="t">
             <a:spAutoFit/>
           </a:bodyPr>
           <a:lstStyle/>
@@ -6853,6 +6845,41 @@
                 <a:latin typeface="DM Sans"/>
               </a:rPr>
               <a:t>→ If both pull conversion down, the bench should hand the ball to a designated specialist.</a:t>
+            </a:r>
+          </a:p>
+        </p:txBody>
+      </p:sp>
+      <p:sp>
+        <p:nvSpPr>
+          <p:cNvPr id="10" name="TextBox 9"/>
+          <p:cNvSpPr txBox="1"/>
+          <p:nvPr/>
+        </p:nvSpPr>
+        <p:spPr>
+          <a:xfrm>
+            <a:off x="10911535" y="6355080"/>
+            <a:ext cx="1097280" cy="320040"/>
+          </a:xfrm>
+          <a:prstGeom prst="rect">
+            <a:avLst/>
+          </a:prstGeom>
+          <a:noFill/>
+        </p:spPr>
+        <p:txBody>
+          <a:bodyPr wrap="none" lIns="0" rIns="0" tIns="0" bIns="0">
+            <a:spAutoFit/>
+          </a:bodyPr>
+          <a:lstStyle/>
+          <a:p>
+            <a:pPr algn="r"/>
+            <a:r>
+              <a:rPr sz="900">
+                <a:solidFill>
+                  <a:srgbClr val="5A735A"/>
+                </a:solidFill>
+                <a:latin typeface="JetBrains Mono"/>
+              </a:rPr>
+              <a:t>03 / 12</a:t>
             </a:r>
           </a:p>
         </p:txBody>
@@ -6866,7 +6893,7 @@
 </file>
 
 <file path=ppt/slides/slide4.xml><?xml version="1.0" encoding="utf-8"?>
-<p:sld xmlns:a="http://schemas.openxmlformats.org/drawingml/2006/main" xmlns:r="http://schemas.openxmlformats.org/officeDocument/2006/relationships" xmlns:p="http://schemas.openxmlformats.org/presentationml/2006/main">
+<p:sld xmlns:a="http://schemas.openxmlformats.org/drawingml/2006/main" xmlns:p="http://schemas.openxmlformats.org/presentationml/2006/main" xmlns:r="http://schemas.openxmlformats.org/officeDocument/2006/relationships">
   <p:cSld>
     <p:bg>
       <p:bgPr>
@@ -6882,14 +6909,7 @@
         <p:cNvGrpSpPr/>
         <p:nvPr/>
       </p:nvGrpSpPr>
-      <p:grpSpPr>
-        <a:xfrm>
-          <a:off x="0" y="0"/>
-          <a:ext cx="0" cy="0"/>
-          <a:chOff x="0" y="0"/>
-          <a:chExt cx="0" cy="0"/>
-        </a:xfrm>
-      </p:grpSpPr>
+      <p:grpSpPr/>
       <p:sp>
         <p:nvSpPr>
           <p:cNvPr id="2" name="TextBox 1"/>
@@ -6898,23 +6918,23 @@
         </p:nvSpPr>
         <p:spPr>
           <a:xfrm>
-            <a:off x="411480" y="292608"/>
-            <a:ext cx="1828800" cy="457200"/>
-          </a:xfrm>
-          <a:prstGeom prst="rect">
-            <a:avLst/>
-          </a:prstGeom>
-          <a:noFill/>
-        </p:spPr>
-        <p:txBody>
-          <a:bodyPr wrap="none" lIns="0" tIns="0" rIns="0" bIns="0">
+            <a:off x="411480" y="6355080"/>
+            <a:ext cx="1828800" cy="365760"/>
+          </a:xfrm>
+          <a:prstGeom prst="rect">
+            <a:avLst/>
+          </a:prstGeom>
+          <a:noFill/>
+        </p:spPr>
+        <p:txBody>
+          <a:bodyPr wrap="none" lIns="0" rIns="0" tIns="0" bIns="0">
             <a:spAutoFit/>
           </a:bodyPr>
           <a:lstStyle/>
           <a:p>
             <a:pPr algn="l"/>
             <a:r>
-              <a:rPr sz="2000">
+              <a:rPr sz="1600">
                 <a:solidFill>
                   <a:srgbClr val="E8EFE8"/>
                 </a:solidFill>
@@ -6923,7 +6943,7 @@
               <a:t>ren</a:t>
             </a:r>
             <a:r>
-              <a:rPr sz="2000">
+              <a:rPr sz="1600">
                 <a:solidFill>
                   <a:srgbClr val="C1FF72"/>
                 </a:solidFill>
@@ -6942,23 +6962,23 @@
         </p:nvSpPr>
         <p:spPr>
           <a:xfrm>
-            <a:off x="640080" y="914400"/>
-            <a:ext cx="7315200" cy="274320"/>
-          </a:xfrm>
-          <a:prstGeom prst="rect">
-            <a:avLst/>
-          </a:prstGeom>
-          <a:noFill/>
-        </p:spPr>
-        <p:txBody>
-          <a:bodyPr wrap="square" lIns="0" tIns="0" rIns="0" bIns="0" anchor="t">
+            <a:off x="640080" y="457200"/>
+            <a:ext cx="10972800" cy="228600"/>
+          </a:xfrm>
+          <a:prstGeom prst="rect">
+            <a:avLst/>
+          </a:prstGeom>
+          <a:noFill/>
+        </p:spPr>
+        <p:txBody>
+          <a:bodyPr wrap="square" lIns="0" rIns="0" tIns="0" bIns="0" anchor="t">
             <a:spAutoFit/>
           </a:bodyPr>
           <a:lstStyle/>
           <a:p>
             <a:pPr algn="l"/>
             <a:r>
-              <a:rPr sz="1100" b="0" i="0">
+              <a:rPr sz="1000" b="0" i="0">
                 <a:solidFill>
                   <a:srgbClr val="C1FF72"/>
                 </a:solidFill>
@@ -6977,23 +6997,23 @@
         </p:nvSpPr>
         <p:spPr>
           <a:xfrm>
-            <a:off x="640080" y="1280160"/>
-            <a:ext cx="10972800" cy="731520"/>
-          </a:xfrm>
-          <a:prstGeom prst="rect">
-            <a:avLst/>
-          </a:prstGeom>
-          <a:noFill/>
-        </p:spPr>
-        <p:txBody>
-          <a:bodyPr wrap="square" lIns="0" tIns="0" rIns="0" bIns="0" anchor="t">
+            <a:off x="640080" y="713232"/>
+            <a:ext cx="10972800" cy="502920"/>
+          </a:xfrm>
+          <a:prstGeom prst="rect">
+            <a:avLst/>
+          </a:prstGeom>
+          <a:noFill/>
+        </p:spPr>
+        <p:txBody>
+          <a:bodyPr wrap="square" lIns="0" rIns="0" tIns="0" bIns="0" anchor="t">
             <a:spAutoFit/>
           </a:bodyPr>
           <a:lstStyle/>
           <a:p>
             <a:pPr algn="l"/>
             <a:r>
-              <a:rPr sz="3600" b="0" i="0">
+              <a:rPr sz="3200" b="0" i="0">
                 <a:solidFill>
                   <a:srgbClr val="E8EFE8"/>
                 </a:solidFill>
@@ -7012,7 +7032,7 @@
         </p:nvSpPr>
         <p:spPr>
           <a:xfrm>
-            <a:off x="640080" y="2194560"/>
+            <a:off x="640080" y="1280160"/>
             <a:ext cx="1097280" cy="25400"/>
           </a:xfrm>
           <a:prstGeom prst="rect">
@@ -7041,11 +7061,9 @@
           </a:fontRef>
         </p:style>
         <p:txBody>
-          <a:bodyPr lIns="0" tIns="0" rIns="0" bIns="0" rtlCol="0" anchor="ctr"/>
-          <a:lstStyle/>
-          <a:p>
-            <a:endParaRPr/>
-          </a:p>
+          <a:bodyPr rtlCol="0" anchor="ctr" lIns="0" rIns="0" tIns="0" bIns="0"/>
+          <a:lstStyle/>
+          <a:p/>
         </p:txBody>
       </p:sp>
       <p:sp>
@@ -7056,7 +7074,7 @@
         </p:nvSpPr>
         <p:spPr>
           <a:xfrm>
-            <a:off x="640080" y="2743200"/>
+            <a:off x="640080" y="1463040"/>
             <a:ext cx="2606040" cy="1463040"/>
           </a:xfrm>
           <a:prstGeom prst="rect">
@@ -7087,11 +7105,9 @@
           </a:fontRef>
         </p:style>
         <p:txBody>
-          <a:bodyPr lIns="0" tIns="0" rIns="0" bIns="0" rtlCol="0" anchor="ctr"/>
-          <a:lstStyle/>
-          <a:p>
-            <a:endParaRPr/>
-          </a:p>
+          <a:bodyPr rtlCol="0" anchor="ctr" lIns="0" rIns="0" tIns="0" bIns="0"/>
+          <a:lstStyle/>
+          <a:p/>
         </p:txBody>
       </p:sp>
       <p:sp>
@@ -7102,7 +7118,7 @@
         </p:nvSpPr>
         <p:spPr>
           <a:xfrm>
-            <a:off x="822959" y="2880360"/>
+            <a:off x="822959" y="1600200"/>
             <a:ext cx="2377440" cy="822960"/>
           </a:xfrm>
           <a:prstGeom prst="rect">
@@ -7111,7 +7127,7 @@
           <a:noFill/>
         </p:spPr>
         <p:txBody>
-          <a:bodyPr wrap="square" lIns="0" tIns="0" rIns="0" bIns="0" anchor="t">
+          <a:bodyPr wrap="square" lIns="0" rIns="0" tIns="0" bIns="0" anchor="t">
             <a:spAutoFit/>
           </a:bodyPr>
           <a:lstStyle/>
@@ -7137,7 +7153,7 @@
         </p:nvSpPr>
         <p:spPr>
           <a:xfrm>
-            <a:off x="822959" y="3703320"/>
+            <a:off x="822959" y="2423160"/>
             <a:ext cx="2377440" cy="274320"/>
           </a:xfrm>
           <a:prstGeom prst="rect">
@@ -7146,7 +7162,7 @@
           <a:noFill/>
         </p:spPr>
         <p:txBody>
-          <a:bodyPr wrap="square" lIns="0" tIns="0" rIns="0" bIns="0" anchor="t">
+          <a:bodyPr wrap="square" lIns="0" rIns="0" tIns="0" bIns="0" anchor="t">
             <a:spAutoFit/>
           </a:bodyPr>
           <a:lstStyle/>
@@ -7172,7 +7188,7 @@
         </p:nvSpPr>
         <p:spPr>
           <a:xfrm>
-            <a:off x="3383280" y="2743200"/>
+            <a:off x="3383280" y="1463040"/>
             <a:ext cx="2606040" cy="1463040"/>
           </a:xfrm>
           <a:prstGeom prst="rect">
@@ -7203,11 +7219,9 @@
           </a:fontRef>
         </p:style>
         <p:txBody>
-          <a:bodyPr lIns="0" tIns="0" rIns="0" bIns="0" rtlCol="0" anchor="ctr"/>
-          <a:lstStyle/>
-          <a:p>
-            <a:endParaRPr/>
-          </a:p>
+          <a:bodyPr rtlCol="0" anchor="ctr" lIns="0" rIns="0" tIns="0" bIns="0"/>
+          <a:lstStyle/>
+          <a:p/>
         </p:txBody>
       </p:sp>
       <p:sp>
@@ -7218,7 +7232,7 @@
         </p:nvSpPr>
         <p:spPr>
           <a:xfrm>
-            <a:off x="3566160" y="2880360"/>
+            <a:off x="3566160" y="1600200"/>
             <a:ext cx="2377440" cy="822960"/>
           </a:xfrm>
           <a:prstGeom prst="rect">
@@ -7227,7 +7241,7 @@
           <a:noFill/>
         </p:spPr>
         <p:txBody>
-          <a:bodyPr wrap="square" lIns="0" tIns="0" rIns="0" bIns="0" anchor="t">
+          <a:bodyPr wrap="square" lIns="0" rIns="0" tIns="0" bIns="0" anchor="t">
             <a:spAutoFit/>
           </a:bodyPr>
           <a:lstStyle/>
@@ -7253,7 +7267,7 @@
         </p:nvSpPr>
         <p:spPr>
           <a:xfrm>
-            <a:off x="3566160" y="3703320"/>
+            <a:off x="3566160" y="2423160"/>
             <a:ext cx="2377440" cy="274320"/>
           </a:xfrm>
           <a:prstGeom prst="rect">
@@ -7262,7 +7276,7 @@
           <a:noFill/>
         </p:spPr>
         <p:txBody>
-          <a:bodyPr wrap="square" lIns="0" tIns="0" rIns="0" bIns="0" anchor="t">
+          <a:bodyPr wrap="square" lIns="0" rIns="0" tIns="0" bIns="0" anchor="t">
             <a:spAutoFit/>
           </a:bodyPr>
           <a:lstStyle/>
@@ -7288,7 +7302,7 @@
         </p:nvSpPr>
         <p:spPr>
           <a:xfrm>
-            <a:off x="6126480" y="2743200"/>
+            <a:off x="6126480" y="1463040"/>
             <a:ext cx="2606040" cy="1463040"/>
           </a:xfrm>
           <a:prstGeom prst="rect">
@@ -7319,11 +7333,9 @@
           </a:fontRef>
         </p:style>
         <p:txBody>
-          <a:bodyPr lIns="0" tIns="0" rIns="0" bIns="0" rtlCol="0" anchor="ctr"/>
-          <a:lstStyle/>
-          <a:p>
-            <a:endParaRPr/>
-          </a:p>
+          <a:bodyPr rtlCol="0" anchor="ctr" lIns="0" rIns="0" tIns="0" bIns="0"/>
+          <a:lstStyle/>
+          <a:p/>
         </p:txBody>
       </p:sp>
       <p:sp>
@@ -7334,7 +7346,7 @@
         </p:nvSpPr>
         <p:spPr>
           <a:xfrm>
-            <a:off x="6309360" y="2880360"/>
+            <a:off x="6309360" y="1600200"/>
             <a:ext cx="2377440" cy="822960"/>
           </a:xfrm>
           <a:prstGeom prst="rect">
@@ -7343,7 +7355,7 @@
           <a:noFill/>
         </p:spPr>
         <p:txBody>
-          <a:bodyPr wrap="square" lIns="0" tIns="0" rIns="0" bIns="0" anchor="t">
+          <a:bodyPr wrap="square" lIns="0" rIns="0" tIns="0" bIns="0" anchor="t">
             <a:spAutoFit/>
           </a:bodyPr>
           <a:lstStyle/>
@@ -7369,7 +7381,7 @@
         </p:nvSpPr>
         <p:spPr>
           <a:xfrm>
-            <a:off x="6309360" y="3703320"/>
+            <a:off x="6309360" y="2423160"/>
             <a:ext cx="2377440" cy="274320"/>
           </a:xfrm>
           <a:prstGeom prst="rect">
@@ -7378,7 +7390,7 @@
           <a:noFill/>
         </p:spPr>
         <p:txBody>
-          <a:bodyPr wrap="square" lIns="0" tIns="0" rIns="0" bIns="0" anchor="t">
+          <a:bodyPr wrap="square" lIns="0" rIns="0" tIns="0" bIns="0" anchor="t">
             <a:spAutoFit/>
           </a:bodyPr>
           <a:lstStyle/>
@@ -7404,7 +7416,7 @@
         </p:nvSpPr>
         <p:spPr>
           <a:xfrm>
-            <a:off x="8869680" y="2743200"/>
+            <a:off x="8869680" y="1463040"/>
             <a:ext cx="2606040" cy="1463040"/>
           </a:xfrm>
           <a:prstGeom prst="rect">
@@ -7435,11 +7447,9 @@
           </a:fontRef>
         </p:style>
         <p:txBody>
-          <a:bodyPr lIns="0" tIns="0" rIns="0" bIns="0" rtlCol="0" anchor="ctr"/>
-          <a:lstStyle/>
-          <a:p>
-            <a:endParaRPr/>
-          </a:p>
+          <a:bodyPr rtlCol="0" anchor="ctr" lIns="0" rIns="0" tIns="0" bIns="0"/>
+          <a:lstStyle/>
+          <a:p/>
         </p:txBody>
       </p:sp>
       <p:sp>
@@ -7450,7 +7460,7 @@
         </p:nvSpPr>
         <p:spPr>
           <a:xfrm>
-            <a:off x="9052559" y="2880360"/>
+            <a:off x="9052559" y="1600200"/>
             <a:ext cx="2377440" cy="822960"/>
           </a:xfrm>
           <a:prstGeom prst="rect">
@@ -7459,7 +7469,7 @@
           <a:noFill/>
         </p:spPr>
         <p:txBody>
-          <a:bodyPr wrap="square" lIns="0" tIns="0" rIns="0" bIns="0" anchor="t">
+          <a:bodyPr wrap="square" lIns="0" rIns="0" tIns="0" bIns="0" anchor="t">
             <a:spAutoFit/>
           </a:bodyPr>
           <a:lstStyle/>
@@ -7485,7 +7495,7 @@
         </p:nvSpPr>
         <p:spPr>
           <a:xfrm>
-            <a:off x="9052559" y="3703320"/>
+            <a:off x="9052559" y="2423160"/>
             <a:ext cx="2377440" cy="274320"/>
           </a:xfrm>
           <a:prstGeom prst="rect">
@@ -7494,7 +7504,7 @@
           <a:noFill/>
         </p:spPr>
         <p:txBody>
-          <a:bodyPr wrap="square" lIns="0" tIns="0" rIns="0" bIns="0" anchor="t">
+          <a:bodyPr wrap="square" lIns="0" rIns="0" tIns="0" bIns="0" anchor="t">
             <a:spAutoFit/>
           </a:bodyPr>
           <a:lstStyle/>
@@ -7520,7 +7530,7 @@
         </p:nvSpPr>
         <p:spPr>
           <a:xfrm>
-            <a:off x="640080" y="4526280"/>
+            <a:off x="640080" y="3246120"/>
             <a:ext cx="10972800" cy="365760"/>
           </a:xfrm>
           <a:prstGeom prst="rect">
@@ -7529,7 +7539,7 @@
           <a:noFill/>
         </p:spPr>
         <p:txBody>
-          <a:bodyPr wrap="square" lIns="0" tIns="0" rIns="0" bIns="0" anchor="t">
+          <a:bodyPr wrap="square" lIns="0" rIns="0" tIns="0" bIns="0" anchor="t">
             <a:spAutoFit/>
           </a:bodyPr>
           <a:lstStyle/>
@@ -7555,7 +7565,7 @@
         </p:nvSpPr>
         <p:spPr>
           <a:xfrm>
-            <a:off x="640080" y="4937760"/>
+            <a:off x="640080" y="3703320"/>
             <a:ext cx="10972800" cy="365760"/>
           </a:xfrm>
           <a:prstGeom prst="rect">
@@ -7564,7 +7574,7 @@
           <a:noFill/>
         </p:spPr>
         <p:txBody>
-          <a:bodyPr wrap="square" lIns="0" tIns="0" rIns="0" bIns="0" anchor="t">
+          <a:bodyPr wrap="square" lIns="0" rIns="0" tIns="0" bIns="0" anchor="t">
             <a:spAutoFit/>
           </a:bodyPr>
           <a:lstStyle/>
@@ -7590,7 +7600,7 @@
         </p:nvSpPr>
         <p:spPr>
           <a:xfrm>
-            <a:off x="640080" y="5394960"/>
+            <a:off x="640080" y="4160520"/>
             <a:ext cx="10972800" cy="365760"/>
           </a:xfrm>
           <a:prstGeom prst="rect">
@@ -7599,7 +7609,7 @@
           <a:noFill/>
         </p:spPr>
         <p:txBody>
-          <a:bodyPr wrap="square" lIns="0" tIns="0" rIns="0" bIns="0" anchor="t">
+          <a:bodyPr wrap="square" lIns="0" rIns="0" tIns="0" bIns="0" anchor="t">
             <a:spAutoFit/>
           </a:bodyPr>
           <a:lstStyle/>
@@ -7625,29 +7635,64 @@
         </p:nvSpPr>
         <p:spPr>
           <a:xfrm>
-            <a:off x="640080" y="5897880"/>
-            <a:ext cx="10972800" cy="640080"/>
-          </a:xfrm>
-          <a:prstGeom prst="rect">
-            <a:avLst/>
-          </a:prstGeom>
-          <a:noFill/>
-        </p:spPr>
-        <p:txBody>
-          <a:bodyPr wrap="square" lIns="0" tIns="0" rIns="0" bIns="0" anchor="t">
+            <a:off x="640080" y="5943600"/>
+            <a:ext cx="10972800" cy="274320"/>
+          </a:xfrm>
+          <a:prstGeom prst="rect">
+            <a:avLst/>
+          </a:prstGeom>
+          <a:noFill/>
+        </p:spPr>
+        <p:txBody>
+          <a:bodyPr wrap="square" lIns="0" rIns="0" tIns="0" bIns="0" anchor="t">
             <a:spAutoFit/>
           </a:bodyPr>
           <a:lstStyle/>
           <a:p>
             <a:pPr algn="l"/>
             <a:r>
-              <a:rPr sz="1100" b="0" i="0">
+              <a:rPr sz="1000" b="0" i="0">
                 <a:solidFill>
                   <a:srgbClr val="5A735A"/>
                 </a:solidFill>
                 <a:latin typeface="JetBrains Mono"/>
               </a:rPr>
               <a:t>Strict filter = matches with at most one penalty event (unambiguous GK-caused / taker-was-fouled attribution).</a:t>
+            </a:r>
+          </a:p>
+        </p:txBody>
+      </p:sp>
+      <p:sp>
+        <p:nvSpPr>
+          <p:cNvPr id="22" name="TextBox 21"/>
+          <p:cNvSpPr txBox="1"/>
+          <p:nvPr/>
+        </p:nvSpPr>
+        <p:spPr>
+          <a:xfrm>
+            <a:off x="10911535" y="6355080"/>
+            <a:ext cx="1097280" cy="320040"/>
+          </a:xfrm>
+          <a:prstGeom prst="rect">
+            <a:avLst/>
+          </a:prstGeom>
+          <a:noFill/>
+        </p:spPr>
+        <p:txBody>
+          <a:bodyPr wrap="none" lIns="0" rIns="0" tIns="0" bIns="0">
+            <a:spAutoFit/>
+          </a:bodyPr>
+          <a:lstStyle/>
+          <a:p>
+            <a:pPr algn="r"/>
+            <a:r>
+              <a:rPr sz="900">
+                <a:solidFill>
+                  <a:srgbClr val="5A735A"/>
+                </a:solidFill>
+                <a:latin typeface="JetBrains Mono"/>
+              </a:rPr>
+              <a:t>04 / 12</a:t>
             </a:r>
           </a:p>
         </p:txBody>
@@ -7661,7 +7706,7 @@
 </file>
 
 <file path=ppt/slides/slide5.xml><?xml version="1.0" encoding="utf-8"?>
-<p:sld xmlns:a="http://schemas.openxmlformats.org/drawingml/2006/main" xmlns:r="http://schemas.openxmlformats.org/officeDocument/2006/relationships" xmlns:p="http://schemas.openxmlformats.org/presentationml/2006/main">
+<p:sld xmlns:a="http://schemas.openxmlformats.org/drawingml/2006/main" xmlns:p="http://schemas.openxmlformats.org/presentationml/2006/main" xmlns:r="http://schemas.openxmlformats.org/officeDocument/2006/relationships">
   <p:cSld>
     <p:bg>
       <p:bgPr>
@@ -7677,14 +7722,7 @@
         <p:cNvGrpSpPr/>
         <p:nvPr/>
       </p:nvGrpSpPr>
-      <p:grpSpPr>
-        <a:xfrm>
-          <a:off x="0" y="0"/>
-          <a:ext cx="0" cy="0"/>
-          <a:chOff x="0" y="0"/>
-          <a:chExt cx="0" cy="0"/>
-        </a:xfrm>
-      </p:grpSpPr>
+      <p:grpSpPr/>
       <p:sp>
         <p:nvSpPr>
           <p:cNvPr id="2" name="TextBox 1"/>
@@ -7693,23 +7731,23 @@
         </p:nvSpPr>
         <p:spPr>
           <a:xfrm>
-            <a:off x="411480" y="292608"/>
-            <a:ext cx="1828800" cy="457200"/>
-          </a:xfrm>
-          <a:prstGeom prst="rect">
-            <a:avLst/>
-          </a:prstGeom>
-          <a:noFill/>
-        </p:spPr>
-        <p:txBody>
-          <a:bodyPr wrap="none" lIns="0" tIns="0" rIns="0" bIns="0">
+            <a:off x="411480" y="6355080"/>
+            <a:ext cx="1828800" cy="365760"/>
+          </a:xfrm>
+          <a:prstGeom prst="rect">
+            <a:avLst/>
+          </a:prstGeom>
+          <a:noFill/>
+        </p:spPr>
+        <p:txBody>
+          <a:bodyPr wrap="none" lIns="0" rIns="0" tIns="0" bIns="0">
             <a:spAutoFit/>
           </a:bodyPr>
           <a:lstStyle/>
           <a:p>
             <a:pPr algn="l"/>
             <a:r>
-              <a:rPr sz="2000">
+              <a:rPr sz="1600">
                 <a:solidFill>
                   <a:srgbClr val="E8EFE8"/>
                 </a:solidFill>
@@ -7718,7 +7756,7 @@
               <a:t>ren</a:t>
             </a:r>
             <a:r>
-              <a:rPr sz="2000">
+              <a:rPr sz="1600">
                 <a:solidFill>
                   <a:srgbClr val="C1FF72"/>
                 </a:solidFill>
@@ -7737,23 +7775,23 @@
         </p:nvSpPr>
         <p:spPr>
           <a:xfrm>
-            <a:off x="640080" y="914400"/>
-            <a:ext cx="7315200" cy="274320"/>
-          </a:xfrm>
-          <a:prstGeom prst="rect">
-            <a:avLst/>
-          </a:prstGeom>
-          <a:noFill/>
-        </p:spPr>
-        <p:txBody>
-          <a:bodyPr wrap="square" lIns="0" tIns="0" rIns="0" bIns="0" anchor="t">
+            <a:off x="640080" y="457200"/>
+            <a:ext cx="10972800" cy="228600"/>
+          </a:xfrm>
+          <a:prstGeom prst="rect">
+            <a:avLst/>
+          </a:prstGeom>
+          <a:noFill/>
+        </p:spPr>
+        <p:txBody>
+          <a:bodyPr wrap="square" lIns="0" rIns="0" tIns="0" bIns="0" anchor="t">
             <a:spAutoFit/>
           </a:bodyPr>
           <a:lstStyle/>
           <a:p>
             <a:pPr algn="l"/>
             <a:r>
-              <a:rPr sz="1100" b="0" i="0">
+              <a:rPr sz="1000" b="0" i="0">
                 <a:solidFill>
                   <a:srgbClr val="C1FF72"/>
                 </a:solidFill>
@@ -7772,23 +7810,23 @@
         </p:nvSpPr>
         <p:spPr>
           <a:xfrm>
-            <a:off x="640080" y="1280160"/>
-            <a:ext cx="10972800" cy="731520"/>
-          </a:xfrm>
-          <a:prstGeom prst="rect">
-            <a:avLst/>
-          </a:prstGeom>
-          <a:noFill/>
-        </p:spPr>
-        <p:txBody>
-          <a:bodyPr wrap="square" lIns="0" tIns="0" rIns="0" bIns="0" anchor="t">
+            <a:off x="640080" y="713232"/>
+            <a:ext cx="10972800" cy="502920"/>
+          </a:xfrm>
+          <a:prstGeom prst="rect">
+            <a:avLst/>
+          </a:prstGeom>
+          <a:noFill/>
+        </p:spPr>
+        <p:txBody>
+          <a:bodyPr wrap="square" lIns="0" rIns="0" tIns="0" bIns="0" anchor="t">
             <a:spAutoFit/>
           </a:bodyPr>
           <a:lstStyle/>
           <a:p>
             <a:pPr algn="l"/>
             <a:r>
-              <a:rPr sz="3600" b="0" i="0">
+              <a:rPr sz="3200" b="0" i="0">
                 <a:solidFill>
                   <a:srgbClr val="E8EFE8"/>
                 </a:solidFill>
@@ -7807,7 +7845,7 @@
         </p:nvSpPr>
         <p:spPr>
           <a:xfrm>
-            <a:off x="640080" y="2194560"/>
+            <a:off x="640080" y="1280160"/>
             <a:ext cx="1097280" cy="25400"/>
           </a:xfrm>
           <a:prstGeom prst="rect">
@@ -7836,11 +7874,9 @@
           </a:fontRef>
         </p:style>
         <p:txBody>
-          <a:bodyPr lIns="0" tIns="0" rIns="0" bIns="0" rtlCol="0" anchor="ctr"/>
-          <a:lstStyle/>
-          <a:p>
-            <a:endParaRPr/>
-          </a:p>
+          <a:bodyPr rtlCol="0" anchor="ctr" lIns="0" rIns="0" tIns="0" bIns="0"/>
+          <a:lstStyle/>
+          <a:p/>
         </p:txBody>
       </p:sp>
       <p:sp>
@@ -7851,8 +7887,8 @@
         </p:nvSpPr>
         <p:spPr>
           <a:xfrm>
-            <a:off x="640080" y="2743200"/>
-            <a:ext cx="5394960" cy="2468880"/>
+            <a:off x="640080" y="1463040"/>
+            <a:ext cx="5372100" cy="4343400"/>
           </a:xfrm>
           <a:prstGeom prst="rect">
             <a:avLst/>
@@ -7882,11 +7918,9 @@
           </a:fontRef>
         </p:style>
         <p:txBody>
-          <a:bodyPr lIns="0" tIns="0" rIns="0" bIns="0" rtlCol="0" anchor="ctr"/>
-          <a:lstStyle/>
-          <a:p>
-            <a:endParaRPr/>
-          </a:p>
+          <a:bodyPr rtlCol="0" anchor="ctr" lIns="0" rIns="0" tIns="0" bIns="0"/>
+          <a:lstStyle/>
+          <a:p/>
         </p:txBody>
       </p:sp>
       <p:sp>
@@ -7897,16 +7931,16 @@
         </p:nvSpPr>
         <p:spPr>
           <a:xfrm>
-            <a:off x="868680" y="2926080"/>
-            <a:ext cx="5029200" cy="274320"/>
-          </a:xfrm>
-          <a:prstGeom prst="rect">
-            <a:avLst/>
-          </a:prstGeom>
-          <a:noFill/>
-        </p:spPr>
-        <p:txBody>
-          <a:bodyPr wrap="square" lIns="0" tIns="0" rIns="0" bIns="0" anchor="t">
+            <a:off x="868680" y="1645920"/>
+            <a:ext cx="4914900" cy="274320"/>
+          </a:xfrm>
+          <a:prstGeom prst="rect">
+            <a:avLst/>
+          </a:prstGeom>
+          <a:noFill/>
+        </p:spPr>
+        <p:txBody>
+          <a:bodyPr wrap="square" lIns="0" rIns="0" tIns="0" bIns="0" anchor="t">
             <a:spAutoFit/>
           </a:bodyPr>
           <a:lstStyle/>
@@ -7932,16 +7966,16 @@
         </p:nvSpPr>
         <p:spPr>
           <a:xfrm>
-            <a:off x="868680" y="3246120"/>
-            <a:ext cx="5029200" cy="731520"/>
-          </a:xfrm>
-          <a:prstGeom prst="rect">
-            <a:avLst/>
-          </a:prstGeom>
-          <a:noFill/>
-        </p:spPr>
-        <p:txBody>
-          <a:bodyPr wrap="square" lIns="0" tIns="0" rIns="0" bIns="0" anchor="t">
+            <a:off x="868680" y="1965960"/>
+            <a:ext cx="4914900" cy="731520"/>
+          </a:xfrm>
+          <a:prstGeom prst="rect">
+            <a:avLst/>
+          </a:prstGeom>
+          <a:noFill/>
+        </p:spPr>
+        <p:txBody>
+          <a:bodyPr wrap="square" lIns="0" rIns="0" tIns="0" bIns="0" anchor="t">
             <a:spAutoFit/>
           </a:bodyPr>
           <a:lstStyle/>
@@ -7967,23 +8001,23 @@
         </p:nvSpPr>
         <p:spPr>
           <a:xfrm>
-            <a:off x="868680" y="3977639"/>
-            <a:ext cx="5029200" cy="1143000"/>
-          </a:xfrm>
-          <a:prstGeom prst="rect">
-            <a:avLst/>
-          </a:prstGeom>
-          <a:noFill/>
-        </p:spPr>
-        <p:txBody>
-          <a:bodyPr wrap="square" lIns="0" tIns="0" rIns="0" bIns="0" anchor="t">
+            <a:off x="868680" y="2834640"/>
+            <a:ext cx="4914900" cy="2788920"/>
+          </a:xfrm>
+          <a:prstGeom prst="rect">
+            <a:avLst/>
+          </a:prstGeom>
+          <a:noFill/>
+        </p:spPr>
+        <p:txBody>
+          <a:bodyPr wrap="square" lIns="0" rIns="0" tIns="0" bIns="0" anchor="t">
             <a:spAutoFit/>
           </a:bodyPr>
           <a:lstStyle/>
           <a:p>
             <a:pPr algn="l"/>
             <a:r>
-              <a:rPr sz="1300" b="0" i="0">
+              <a:rPr sz="1400" b="0" i="0">
                 <a:solidFill>
                   <a:srgbClr val="8FA68F"/>
                 </a:solidFill>
@@ -8002,8 +8036,8 @@
         </p:nvSpPr>
         <p:spPr>
           <a:xfrm>
-            <a:off x="6263640" y="2743200"/>
-            <a:ext cx="5394960" cy="2468880"/>
+            <a:off x="6240780" y="1463040"/>
+            <a:ext cx="5372100" cy="4343400"/>
           </a:xfrm>
           <a:prstGeom prst="rect">
             <a:avLst/>
@@ -8033,11 +8067,9 @@
           </a:fontRef>
         </p:style>
         <p:txBody>
-          <a:bodyPr lIns="0" tIns="0" rIns="0" bIns="0" rtlCol="0" anchor="ctr"/>
-          <a:lstStyle/>
-          <a:p>
-            <a:endParaRPr/>
-          </a:p>
+          <a:bodyPr rtlCol="0" anchor="ctr" lIns="0" rIns="0" tIns="0" bIns="0"/>
+          <a:lstStyle/>
+          <a:p/>
         </p:txBody>
       </p:sp>
       <p:sp>
@@ -8048,16 +8080,16 @@
         </p:nvSpPr>
         <p:spPr>
           <a:xfrm>
-            <a:off x="6492240" y="2926080"/>
-            <a:ext cx="5029200" cy="274320"/>
-          </a:xfrm>
-          <a:prstGeom prst="rect">
-            <a:avLst/>
-          </a:prstGeom>
-          <a:noFill/>
-        </p:spPr>
-        <p:txBody>
-          <a:bodyPr wrap="square" lIns="0" tIns="0" rIns="0" bIns="0" anchor="t">
+            <a:off x="6469380" y="1645920"/>
+            <a:ext cx="4914900" cy="274320"/>
+          </a:xfrm>
+          <a:prstGeom prst="rect">
+            <a:avLst/>
+          </a:prstGeom>
+          <a:noFill/>
+        </p:spPr>
+        <p:txBody>
+          <a:bodyPr wrap="square" lIns="0" rIns="0" tIns="0" bIns="0" anchor="t">
             <a:spAutoFit/>
           </a:bodyPr>
           <a:lstStyle/>
@@ -8083,16 +8115,16 @@
         </p:nvSpPr>
         <p:spPr>
           <a:xfrm>
-            <a:off x="6492240" y="3246120"/>
-            <a:ext cx="5029200" cy="731520"/>
-          </a:xfrm>
-          <a:prstGeom prst="rect">
-            <a:avLst/>
-          </a:prstGeom>
-          <a:noFill/>
-        </p:spPr>
-        <p:txBody>
-          <a:bodyPr wrap="square" lIns="0" tIns="0" rIns="0" bIns="0" anchor="t">
+            <a:off x="6469380" y="1965960"/>
+            <a:ext cx="4914900" cy="731520"/>
+          </a:xfrm>
+          <a:prstGeom prst="rect">
+            <a:avLst/>
+          </a:prstGeom>
+          <a:noFill/>
+        </p:spPr>
+        <p:txBody>
+          <a:bodyPr wrap="square" lIns="0" rIns="0" tIns="0" bIns="0" anchor="t">
             <a:spAutoFit/>
           </a:bodyPr>
           <a:lstStyle/>
@@ -8118,23 +8150,23 @@
         </p:nvSpPr>
         <p:spPr>
           <a:xfrm>
-            <a:off x="6492240" y="3977639"/>
-            <a:ext cx="5029200" cy="1143000"/>
-          </a:xfrm>
-          <a:prstGeom prst="rect">
-            <a:avLst/>
-          </a:prstGeom>
-          <a:noFill/>
-        </p:spPr>
-        <p:txBody>
-          <a:bodyPr wrap="square" lIns="0" tIns="0" rIns="0" bIns="0" anchor="t">
+            <a:off x="6469380" y="2834640"/>
+            <a:ext cx="4914900" cy="2788920"/>
+          </a:xfrm>
+          <a:prstGeom prst="rect">
+            <a:avLst/>
+          </a:prstGeom>
+          <a:noFill/>
+        </p:spPr>
+        <p:txBody>
+          <a:bodyPr wrap="square" lIns="0" rIns="0" tIns="0" bIns="0" anchor="t">
             <a:spAutoFit/>
           </a:bodyPr>
           <a:lstStyle/>
           <a:p>
             <a:pPr algn="l"/>
             <a:r>
-              <a:rPr sz="1300" b="0" i="0">
+              <a:rPr sz="1400" b="0" i="0">
                 <a:solidFill>
                   <a:srgbClr val="8FA68F"/>
                 </a:solidFill>
@@ -8153,29 +8185,29 @@
         </p:nvSpPr>
         <p:spPr>
           <a:xfrm>
-            <a:off x="640080" y="5486400"/>
-            <a:ext cx="10972800" cy="365760"/>
-          </a:xfrm>
-          <a:prstGeom prst="rect">
-            <a:avLst/>
-          </a:prstGeom>
-          <a:noFill/>
-        </p:spPr>
-        <p:txBody>
-          <a:bodyPr wrap="square" lIns="0" tIns="0" rIns="0" bIns="0" anchor="t">
+            <a:off x="640080" y="5943600"/>
+            <a:ext cx="10972800" cy="274320"/>
+          </a:xfrm>
+          <a:prstGeom prst="rect">
+            <a:avLst/>
+          </a:prstGeom>
+          <a:noFill/>
+        </p:spPr>
+        <p:txBody>
+          <a:bodyPr wrap="square" lIns="0" rIns="0" tIns="0" bIns="0" anchor="t">
             <a:spAutoFit/>
           </a:bodyPr>
           <a:lstStyle/>
           <a:p>
             <a:pPr algn="l"/>
             <a:r>
-              <a:rPr sz="1200" b="0" i="0">
-                <a:solidFill>
-                  <a:srgbClr val="8FA68F"/>
+              <a:rPr sz="1000" b="0" i="0">
+                <a:solidFill>
+                  <a:srgbClr val="5A735A"/>
                 </a:solidFill>
                 <a:latin typeface="JetBrains Mono"/>
               </a:rPr>
-              <a:t>H₀: conversion_treatment = conversion_control</a:t>
+              <a:t>H₀: conversion_treatment = conversion_control   ·   H₁: conversion_treatment &lt; conversion_control (one-tailed, α = 0.05)   ·   95% Wilson CIs · statsmodels.proportions_ztest</a:t>
             </a:r>
           </a:p>
         </p:txBody>
@@ -8188,64 +8220,29 @@
         </p:nvSpPr>
         <p:spPr>
           <a:xfrm>
-            <a:off x="640080" y="5852160"/>
-            <a:ext cx="10972800" cy="365760"/>
-          </a:xfrm>
-          <a:prstGeom prst="rect">
-            <a:avLst/>
-          </a:prstGeom>
-          <a:noFill/>
-        </p:spPr>
-        <p:txBody>
-          <a:bodyPr wrap="square" lIns="0" tIns="0" rIns="0" bIns="0" anchor="t">
-            <a:spAutoFit/>
-          </a:bodyPr>
-          <a:lstStyle/>
-          <a:p>
-            <a:pPr algn="l"/>
-            <a:r>
-              <a:rPr sz="1200" b="0" i="0">
-                <a:solidFill>
-                  <a:srgbClr val="C1FF72"/>
+            <a:off x="10911535" y="6355080"/>
+            <a:ext cx="1097280" cy="320040"/>
+          </a:xfrm>
+          <a:prstGeom prst="rect">
+            <a:avLst/>
+          </a:prstGeom>
+          <a:noFill/>
+        </p:spPr>
+        <p:txBody>
+          <a:bodyPr wrap="none" lIns="0" rIns="0" tIns="0" bIns="0">
+            <a:spAutoFit/>
+          </a:bodyPr>
+          <a:lstStyle/>
+          <a:p>
+            <a:pPr algn="r"/>
+            <a:r>
+              <a:rPr sz="900">
+                <a:solidFill>
+                  <a:srgbClr val="5A735A"/>
                 </a:solidFill>
                 <a:latin typeface="JetBrains Mono"/>
               </a:rPr>
-              <a:t>H₁: conversion_treatment &lt; conversion_control     (one-tailed, α = 0.05)</a:t>
-            </a:r>
-          </a:p>
-        </p:txBody>
-      </p:sp>
-      <p:sp>
-        <p:nvSpPr>
-          <p:cNvPr id="16" name="TextBox 15"/>
-          <p:cNvSpPr txBox="1"/>
-          <p:nvPr/>
-        </p:nvSpPr>
-        <p:spPr>
-          <a:xfrm>
-            <a:off x="640080" y="6263640"/>
-            <a:ext cx="10972800" cy="365760"/>
-          </a:xfrm>
-          <a:prstGeom prst="rect">
-            <a:avLst/>
-          </a:prstGeom>
-          <a:noFill/>
-        </p:spPr>
-        <p:txBody>
-          <a:bodyPr wrap="square" lIns="0" tIns="0" rIns="0" bIns="0" anchor="t">
-            <a:spAutoFit/>
-          </a:bodyPr>
-          <a:lstStyle/>
-          <a:p>
-            <a:pPr algn="l"/>
-            <a:r>
-              <a:rPr sz="1000" b="0" i="0">
-                <a:solidFill>
-                  <a:srgbClr val="5A735A"/>
-                </a:solidFill>
-                <a:latin typeface="JetBrains Mono"/>
-              </a:rPr>
-              <a:t>95% Wilson CIs on each proportion. Implementation: statsmodels.proportions_ztest(alternative='smaller').</a:t>
+              <a:t>05 / 12</a:t>
             </a:r>
           </a:p>
         </p:txBody>
@@ -8259,7 +8256,7 @@
 </file>
 
 <file path=ppt/slides/slide6.xml><?xml version="1.0" encoding="utf-8"?>
-<p:sld xmlns:a="http://schemas.openxmlformats.org/drawingml/2006/main" xmlns:r="http://schemas.openxmlformats.org/officeDocument/2006/relationships" xmlns:p="http://schemas.openxmlformats.org/presentationml/2006/main">
+<p:sld xmlns:a="http://schemas.openxmlformats.org/drawingml/2006/main" xmlns:p="http://schemas.openxmlformats.org/presentationml/2006/main" xmlns:r="http://schemas.openxmlformats.org/officeDocument/2006/relationships">
   <p:cSld>
     <p:bg>
       <p:bgPr>
@@ -8275,14 +8272,7 @@
         <p:cNvGrpSpPr/>
         <p:nvPr/>
       </p:nvGrpSpPr>
-      <p:grpSpPr>
-        <a:xfrm>
-          <a:off x="0" y="0"/>
-          <a:ext cx="0" cy="0"/>
-          <a:chOff x="0" y="0"/>
-          <a:chExt cx="0" cy="0"/>
-        </a:xfrm>
-      </p:grpSpPr>
+      <p:grpSpPr/>
       <p:sp>
         <p:nvSpPr>
           <p:cNvPr id="2" name="TextBox 1"/>
@@ -8291,23 +8281,23 @@
         </p:nvSpPr>
         <p:spPr>
           <a:xfrm>
-            <a:off x="411480" y="292608"/>
-            <a:ext cx="1828800" cy="457200"/>
-          </a:xfrm>
-          <a:prstGeom prst="rect">
-            <a:avLst/>
-          </a:prstGeom>
-          <a:noFill/>
-        </p:spPr>
-        <p:txBody>
-          <a:bodyPr wrap="none" lIns="0" tIns="0" rIns="0" bIns="0">
+            <a:off x="411480" y="6355080"/>
+            <a:ext cx="1828800" cy="365760"/>
+          </a:xfrm>
+          <a:prstGeom prst="rect">
+            <a:avLst/>
+          </a:prstGeom>
+          <a:noFill/>
+        </p:spPr>
+        <p:txBody>
+          <a:bodyPr wrap="none" lIns="0" rIns="0" tIns="0" bIns="0">
             <a:spAutoFit/>
           </a:bodyPr>
           <a:lstStyle/>
           <a:p>
             <a:pPr algn="l"/>
             <a:r>
-              <a:rPr sz="2000">
+              <a:rPr sz="1600">
                 <a:solidFill>
                   <a:srgbClr val="E8EFE8"/>
                 </a:solidFill>
@@ -8316,7 +8306,7 @@
               <a:t>ren</a:t>
             </a:r>
             <a:r>
-              <a:rPr sz="2000">
+              <a:rPr sz="1600">
                 <a:solidFill>
                   <a:srgbClr val="C1FF72"/>
                 </a:solidFill>
@@ -8335,23 +8325,23 @@
         </p:nvSpPr>
         <p:spPr>
           <a:xfrm>
-            <a:off x="640080" y="914400"/>
-            <a:ext cx="7315200" cy="274320"/>
-          </a:xfrm>
-          <a:prstGeom prst="rect">
-            <a:avLst/>
-          </a:prstGeom>
-          <a:noFill/>
-        </p:spPr>
-        <p:txBody>
-          <a:bodyPr wrap="square" lIns="0" tIns="0" rIns="0" bIns="0" anchor="t">
+            <a:off x="640080" y="457200"/>
+            <a:ext cx="10972800" cy="228600"/>
+          </a:xfrm>
+          <a:prstGeom prst="rect">
+            <a:avLst/>
+          </a:prstGeom>
+          <a:noFill/>
+        </p:spPr>
+        <p:txBody>
+          <a:bodyPr wrap="square" lIns="0" rIns="0" tIns="0" bIns="0" anchor="t">
             <a:spAutoFit/>
           </a:bodyPr>
           <a:lstStyle/>
           <a:p>
             <a:pPr algn="l"/>
             <a:r>
-              <a:rPr sz="1100" b="0" i="0">
+              <a:rPr sz="1000" b="0" i="0">
                 <a:solidFill>
                   <a:srgbClr val="C1FF72"/>
                 </a:solidFill>
@@ -8370,23 +8360,23 @@
         </p:nvSpPr>
         <p:spPr>
           <a:xfrm>
-            <a:off x="640080" y="1280160"/>
-            <a:ext cx="10972800" cy="731520"/>
-          </a:xfrm>
-          <a:prstGeom prst="rect">
-            <a:avLst/>
-          </a:prstGeom>
-          <a:noFill/>
-        </p:spPr>
-        <p:txBody>
-          <a:bodyPr wrap="square" lIns="0" tIns="0" rIns="0" bIns="0" anchor="t">
+            <a:off x="640080" y="713232"/>
+            <a:ext cx="10972800" cy="502920"/>
+          </a:xfrm>
+          <a:prstGeom prst="rect">
+            <a:avLst/>
+          </a:prstGeom>
+          <a:noFill/>
+        </p:spPr>
+        <p:txBody>
+          <a:bodyPr wrap="square" lIns="0" rIns="0" tIns="0" bIns="0" anchor="t">
             <a:spAutoFit/>
           </a:bodyPr>
           <a:lstStyle/>
           <a:p>
             <a:pPr algn="l"/>
             <a:r>
-              <a:rPr sz="3600" b="0" i="0">
+              <a:rPr sz="3200" b="0" i="0">
                 <a:solidFill>
                   <a:srgbClr val="E8EFE8"/>
                 </a:solidFill>
@@ -8405,7 +8395,7 @@
         </p:nvSpPr>
         <p:spPr>
           <a:xfrm>
-            <a:off x="640080" y="2194560"/>
+            <a:off x="640080" y="1280160"/>
             <a:ext cx="1097280" cy="25400"/>
           </a:xfrm>
           <a:prstGeom prst="rect">
@@ -8434,11 +8424,9 @@
           </a:fontRef>
         </p:style>
         <p:txBody>
-          <a:bodyPr lIns="0" tIns="0" rIns="0" bIns="0" rtlCol="0" anchor="ctr"/>
-          <a:lstStyle/>
-          <a:p>
-            <a:endParaRPr/>
-          </a:p>
+          <a:bodyPr rtlCol="0" anchor="ctr" lIns="0" rIns="0" tIns="0" bIns="0"/>
+          <a:lstStyle/>
+          <a:p/>
         </p:txBody>
       </p:sp>
       <p:pic>
@@ -8457,8 +8445,8 @@
         </p:blipFill>
         <p:spPr>
           <a:xfrm>
-            <a:off x="552995" y="2270760"/>
-            <a:ext cx="8853773" cy="3733800"/>
+            <a:off x="640080" y="1490056"/>
+            <a:ext cx="10972800" cy="4289367"/>
           </a:xfrm>
           <a:prstGeom prst="rect">
             <a:avLst/>
@@ -8473,16 +8461,16 @@
         </p:nvSpPr>
         <p:spPr>
           <a:xfrm>
-            <a:off x="640080" y="6263640"/>
-            <a:ext cx="10972800" cy="365760"/>
-          </a:xfrm>
-          <a:prstGeom prst="rect">
-            <a:avLst/>
-          </a:prstGeom>
-          <a:noFill/>
-        </p:spPr>
-        <p:txBody>
-          <a:bodyPr wrap="square" lIns="0" tIns="0" rIns="0" bIns="0" anchor="t">
+            <a:off x="640080" y="5943600"/>
+            <a:ext cx="10972800" cy="274320"/>
+          </a:xfrm>
+          <a:prstGeom prst="rect">
+            <a:avLst/>
+          </a:prstGeom>
+          <a:noFill/>
+        </p:spPr>
+        <p:txBody>
+          <a:bodyPr wrap="square" lIns="0" rIns="0" tIns="0" bIns="0" anchor="t">
             <a:spAutoFit/>
           </a:bodyPr>
           <a:lstStyle/>
@@ -8496,6 +8484,41 @@
                 <a:latin typeface="JetBrains Mono"/>
               </a:rPr>
               <a:t>Across the top 5 leagues conversion clusters tightly in the high 70s — league of origin is not a major source of variation.</a:t>
+            </a:r>
+          </a:p>
+        </p:txBody>
+      </p:sp>
+      <p:sp>
+        <p:nvSpPr>
+          <p:cNvPr id="8" name="TextBox 7"/>
+          <p:cNvSpPr txBox="1"/>
+          <p:nvPr/>
+        </p:nvSpPr>
+        <p:spPr>
+          <a:xfrm>
+            <a:off x="10911535" y="6355080"/>
+            <a:ext cx="1097280" cy="320040"/>
+          </a:xfrm>
+          <a:prstGeom prst="rect">
+            <a:avLst/>
+          </a:prstGeom>
+          <a:noFill/>
+        </p:spPr>
+        <p:txBody>
+          <a:bodyPr wrap="none" lIns="0" rIns="0" tIns="0" bIns="0">
+            <a:spAutoFit/>
+          </a:bodyPr>
+          <a:lstStyle/>
+          <a:p>
+            <a:pPr algn="r"/>
+            <a:r>
+              <a:rPr sz="900">
+                <a:solidFill>
+                  <a:srgbClr val="5A735A"/>
+                </a:solidFill>
+                <a:latin typeface="JetBrains Mono"/>
+              </a:rPr>
+              <a:t>06 / 12</a:t>
             </a:r>
           </a:p>
         </p:txBody>
@@ -8509,7 +8532,7 @@
 </file>
 
 <file path=ppt/slides/slide7.xml><?xml version="1.0" encoding="utf-8"?>
-<p:sld xmlns:a="http://schemas.openxmlformats.org/drawingml/2006/main" xmlns:r="http://schemas.openxmlformats.org/officeDocument/2006/relationships" xmlns:p="http://schemas.openxmlformats.org/presentationml/2006/main">
+<p:sld xmlns:a="http://schemas.openxmlformats.org/drawingml/2006/main" xmlns:p="http://schemas.openxmlformats.org/presentationml/2006/main" xmlns:r="http://schemas.openxmlformats.org/officeDocument/2006/relationships">
   <p:cSld>
     <p:bg>
       <p:bgPr>
@@ -8525,14 +8548,7 @@
         <p:cNvGrpSpPr/>
         <p:nvPr/>
       </p:nvGrpSpPr>
-      <p:grpSpPr>
-        <a:xfrm>
-          <a:off x="0" y="0"/>
-          <a:ext cx="0" cy="0"/>
-          <a:chOff x="0" y="0"/>
-          <a:chExt cx="0" cy="0"/>
-        </a:xfrm>
-      </p:grpSpPr>
+      <p:grpSpPr/>
       <p:sp>
         <p:nvSpPr>
           <p:cNvPr id="2" name="TextBox 1"/>
@@ -8541,23 +8557,23 @@
         </p:nvSpPr>
         <p:spPr>
           <a:xfrm>
-            <a:off x="411480" y="292608"/>
-            <a:ext cx="1828800" cy="457200"/>
-          </a:xfrm>
-          <a:prstGeom prst="rect">
-            <a:avLst/>
-          </a:prstGeom>
-          <a:noFill/>
-        </p:spPr>
-        <p:txBody>
-          <a:bodyPr wrap="none" lIns="0" tIns="0" rIns="0" bIns="0">
+            <a:off x="411480" y="6355080"/>
+            <a:ext cx="1828800" cy="365760"/>
+          </a:xfrm>
+          <a:prstGeom prst="rect">
+            <a:avLst/>
+          </a:prstGeom>
+          <a:noFill/>
+        </p:spPr>
+        <p:txBody>
+          <a:bodyPr wrap="none" lIns="0" rIns="0" tIns="0" bIns="0">
             <a:spAutoFit/>
           </a:bodyPr>
           <a:lstStyle/>
           <a:p>
             <a:pPr algn="l"/>
             <a:r>
-              <a:rPr sz="2000">
+              <a:rPr sz="1600">
                 <a:solidFill>
                   <a:srgbClr val="E8EFE8"/>
                 </a:solidFill>
@@ -8566,7 +8582,7 @@
               <a:t>ren</a:t>
             </a:r>
             <a:r>
-              <a:rPr sz="2000">
+              <a:rPr sz="1600">
                 <a:solidFill>
                   <a:srgbClr val="C1FF72"/>
                 </a:solidFill>
@@ -8585,23 +8601,23 @@
         </p:nvSpPr>
         <p:spPr>
           <a:xfrm>
-            <a:off x="640080" y="914400"/>
-            <a:ext cx="7315200" cy="274320"/>
-          </a:xfrm>
-          <a:prstGeom prst="rect">
-            <a:avLst/>
-          </a:prstGeom>
-          <a:noFill/>
-        </p:spPr>
-        <p:txBody>
-          <a:bodyPr wrap="square" lIns="0" tIns="0" rIns="0" bIns="0" anchor="t">
+            <a:off x="640080" y="457200"/>
+            <a:ext cx="10972800" cy="228600"/>
+          </a:xfrm>
+          <a:prstGeom prst="rect">
+            <a:avLst/>
+          </a:prstGeom>
+          <a:noFill/>
+        </p:spPr>
+        <p:txBody>
+          <a:bodyPr wrap="square" lIns="0" rIns="0" tIns="0" bIns="0" anchor="t">
             <a:spAutoFit/>
           </a:bodyPr>
           <a:lstStyle/>
           <a:p>
             <a:pPr algn="l"/>
             <a:r>
-              <a:rPr sz="1100" b="0" i="0">
+              <a:rPr sz="1000" b="0" i="0">
                 <a:solidFill>
                   <a:srgbClr val="C1FF72"/>
                 </a:solidFill>
@@ -8620,23 +8636,23 @@
         </p:nvSpPr>
         <p:spPr>
           <a:xfrm>
-            <a:off x="640080" y="1280160"/>
-            <a:ext cx="10972800" cy="731520"/>
-          </a:xfrm>
-          <a:prstGeom prst="rect">
-            <a:avLst/>
-          </a:prstGeom>
-          <a:noFill/>
-        </p:spPr>
-        <p:txBody>
-          <a:bodyPr wrap="square" lIns="0" tIns="0" rIns="0" bIns="0" anchor="t">
+            <a:off x="640080" y="713232"/>
+            <a:ext cx="10972800" cy="502920"/>
+          </a:xfrm>
+          <a:prstGeom prst="rect">
+            <a:avLst/>
+          </a:prstGeom>
+          <a:noFill/>
+        </p:spPr>
+        <p:txBody>
+          <a:bodyPr wrap="square" lIns="0" rIns="0" tIns="0" bIns="0" anchor="t">
             <a:spAutoFit/>
           </a:bodyPr>
           <a:lstStyle/>
           <a:p>
             <a:pPr algn="l"/>
             <a:r>
-              <a:rPr sz="3600" b="0" i="0">
+              <a:rPr sz="3200" b="0" i="0">
                 <a:solidFill>
                   <a:srgbClr val="E8EFE8"/>
                 </a:solidFill>
@@ -8655,7 +8671,7 @@
         </p:nvSpPr>
         <p:spPr>
           <a:xfrm>
-            <a:off x="640080" y="2194560"/>
+            <a:off x="640080" y="1280160"/>
             <a:ext cx="1097280" cy="25400"/>
           </a:xfrm>
           <a:prstGeom prst="rect">
@@ -8684,11 +8700,9 @@
           </a:fontRef>
         </p:style>
         <p:txBody>
-          <a:bodyPr lIns="0" tIns="0" rIns="0" bIns="0" rtlCol="0" anchor="ctr"/>
-          <a:lstStyle/>
-          <a:p>
-            <a:endParaRPr/>
-          </a:p>
+          <a:bodyPr rtlCol="0" anchor="ctr" lIns="0" rIns="0" tIns="0" bIns="0"/>
+          <a:lstStyle/>
+          <a:p/>
         </p:txBody>
       </p:sp>
       <p:pic>
@@ -8707,8 +8721,8 @@
         </p:blipFill>
         <p:spPr>
           <a:xfrm>
-            <a:off x="411480" y="2245898"/>
-            <a:ext cx="8287327" cy="3809462"/>
+            <a:off x="640080" y="1490056"/>
+            <a:ext cx="10972800" cy="4289367"/>
           </a:xfrm>
           <a:prstGeom prst="rect">
             <a:avLst/>
@@ -8723,16 +8737,16 @@
         </p:nvSpPr>
         <p:spPr>
           <a:xfrm>
-            <a:off x="640080" y="6263640"/>
-            <a:ext cx="10972800" cy="365760"/>
-          </a:xfrm>
-          <a:prstGeom prst="rect">
-            <a:avLst/>
-          </a:prstGeom>
-          <a:noFill/>
-        </p:spPr>
-        <p:txBody>
-          <a:bodyPr wrap="square" lIns="0" tIns="0" rIns="0" bIns="0" anchor="t">
+            <a:off x="640080" y="5943600"/>
+            <a:ext cx="10972800" cy="274320"/>
+          </a:xfrm>
+          <a:prstGeom prst="rect">
+            <a:avLst/>
+          </a:prstGeom>
+          <a:noFill/>
+        </p:spPr>
+        <p:txBody>
+          <a:bodyPr wrap="square" lIns="0" rIns="0" tIns="0" bIns="0" anchor="t">
             <a:spAutoFit/>
           </a:bodyPr>
           <a:lstStyle/>
@@ -8746,6 +8760,41 @@
                 <a:latin typeface="JetBrains Mono"/>
               </a:rPr>
               <a:t>Year-on-year stability is high — the ~77–80% band holds across the period in scope.</a:t>
+            </a:r>
+          </a:p>
+        </p:txBody>
+      </p:sp>
+      <p:sp>
+        <p:nvSpPr>
+          <p:cNvPr id="8" name="TextBox 7"/>
+          <p:cNvSpPr txBox="1"/>
+          <p:nvPr/>
+        </p:nvSpPr>
+        <p:spPr>
+          <a:xfrm>
+            <a:off x="10911535" y="6355080"/>
+            <a:ext cx="1097280" cy="320040"/>
+          </a:xfrm>
+          <a:prstGeom prst="rect">
+            <a:avLst/>
+          </a:prstGeom>
+          <a:noFill/>
+        </p:spPr>
+        <p:txBody>
+          <a:bodyPr wrap="none" lIns="0" rIns="0" tIns="0" bIns="0">
+            <a:spAutoFit/>
+          </a:bodyPr>
+          <a:lstStyle/>
+          <a:p>
+            <a:pPr algn="r"/>
+            <a:r>
+              <a:rPr sz="900">
+                <a:solidFill>
+                  <a:srgbClr val="5A735A"/>
+                </a:solidFill>
+                <a:latin typeface="JetBrains Mono"/>
+              </a:rPr>
+              <a:t>07 / 12</a:t>
             </a:r>
           </a:p>
         </p:txBody>
@@ -8759,7 +8808,7 @@
 </file>
 
 <file path=ppt/slides/slide8.xml><?xml version="1.0" encoding="utf-8"?>
-<p:sld xmlns:a="http://schemas.openxmlformats.org/drawingml/2006/main" xmlns:r="http://schemas.openxmlformats.org/officeDocument/2006/relationships" xmlns:p="http://schemas.openxmlformats.org/presentationml/2006/main">
+<p:sld xmlns:a="http://schemas.openxmlformats.org/drawingml/2006/main" xmlns:p="http://schemas.openxmlformats.org/presentationml/2006/main" xmlns:r="http://schemas.openxmlformats.org/officeDocument/2006/relationships">
   <p:cSld>
     <p:bg>
       <p:bgPr>
@@ -8775,14 +8824,7 @@
         <p:cNvGrpSpPr/>
         <p:nvPr/>
       </p:nvGrpSpPr>
-      <p:grpSpPr>
-        <a:xfrm>
-          <a:off x="0" y="0"/>
-          <a:ext cx="0" cy="0"/>
-          <a:chOff x="0" y="0"/>
-          <a:chExt cx="0" cy="0"/>
-        </a:xfrm>
-      </p:grpSpPr>
+      <p:grpSpPr/>
       <p:sp>
         <p:nvSpPr>
           <p:cNvPr id="2" name="TextBox 1"/>
@@ -8791,23 +8833,23 @@
         </p:nvSpPr>
         <p:spPr>
           <a:xfrm>
-            <a:off x="411480" y="292608"/>
-            <a:ext cx="1828800" cy="457200"/>
-          </a:xfrm>
-          <a:prstGeom prst="rect">
-            <a:avLst/>
-          </a:prstGeom>
-          <a:noFill/>
-        </p:spPr>
-        <p:txBody>
-          <a:bodyPr wrap="none" lIns="0" tIns="0" rIns="0" bIns="0">
+            <a:off x="411480" y="6355080"/>
+            <a:ext cx="1828800" cy="365760"/>
+          </a:xfrm>
+          <a:prstGeom prst="rect">
+            <a:avLst/>
+          </a:prstGeom>
+          <a:noFill/>
+        </p:spPr>
+        <p:txBody>
+          <a:bodyPr wrap="none" lIns="0" rIns="0" tIns="0" bIns="0">
             <a:spAutoFit/>
           </a:bodyPr>
           <a:lstStyle/>
           <a:p>
             <a:pPr algn="l"/>
             <a:r>
-              <a:rPr sz="2000">
+              <a:rPr sz="1600">
                 <a:solidFill>
                   <a:srgbClr val="E8EFE8"/>
                 </a:solidFill>
@@ -8816,7 +8858,7 @@
               <a:t>ren</a:t>
             </a:r>
             <a:r>
-              <a:rPr sz="2000">
+              <a:rPr sz="1600">
                 <a:solidFill>
                   <a:srgbClr val="C1FF72"/>
                 </a:solidFill>
@@ -8835,23 +8877,23 @@
         </p:nvSpPr>
         <p:spPr>
           <a:xfrm>
-            <a:off x="640080" y="914400"/>
-            <a:ext cx="7315200" cy="274320"/>
-          </a:xfrm>
-          <a:prstGeom prst="rect">
-            <a:avLst/>
-          </a:prstGeom>
-          <a:noFill/>
-        </p:spPr>
-        <p:txBody>
-          <a:bodyPr wrap="square" lIns="0" tIns="0" rIns="0" bIns="0" anchor="t">
+            <a:off x="640080" y="457200"/>
+            <a:ext cx="10972800" cy="228600"/>
+          </a:xfrm>
+          <a:prstGeom prst="rect">
+            <a:avLst/>
+          </a:prstGeom>
+          <a:noFill/>
+        </p:spPr>
+        <p:txBody>
+          <a:bodyPr wrap="square" lIns="0" rIns="0" tIns="0" bIns="0" anchor="t">
             <a:spAutoFit/>
           </a:bodyPr>
           <a:lstStyle/>
           <a:p>
             <a:pPr algn="l"/>
             <a:r>
-              <a:rPr sz="1100" b="0" i="0">
+              <a:rPr sz="1000" b="0" i="0">
                 <a:solidFill>
                   <a:srgbClr val="C1FF72"/>
                 </a:solidFill>
@@ -8870,29 +8912,38 @@
         </p:nvSpPr>
         <p:spPr>
           <a:xfrm>
-            <a:off x="640080" y="1280160"/>
-            <a:ext cx="10972800" cy="731520"/>
-          </a:xfrm>
-          <a:prstGeom prst="rect">
-            <a:avLst/>
-          </a:prstGeom>
-          <a:noFill/>
-        </p:spPr>
-        <p:txBody>
-          <a:bodyPr wrap="square" lIns="0" tIns="0" rIns="0" bIns="0" anchor="t">
+            <a:off x="640080" y="713232"/>
+            <a:ext cx="10972800" cy="502920"/>
+          </a:xfrm>
+          <a:prstGeom prst="rect">
+            <a:avLst/>
+          </a:prstGeom>
+          <a:noFill/>
+        </p:spPr>
+        <p:txBody>
+          <a:bodyPr wrap="square" lIns="0" rIns="0" tIns="0" bIns="0" anchor="t">
             <a:spAutoFit/>
           </a:bodyPr>
           <a:lstStyle/>
           <a:p>
             <a:pPr algn="l"/>
             <a:r>
-              <a:rPr sz="3600" b="0" i="0">
+              <a:rPr sz="3200" b="0" i="0">
                 <a:solidFill>
                   <a:srgbClr val="E8EFE8"/>
                 </a:solidFill>
                 <a:latin typeface="Instrument Serif"/>
               </a:rPr>
-              <a:t>Treatment vs control</a:t>
+              <a:t>Treatment vs </a:t>
+            </a:r>
+            <a:r>
+              <a:rPr sz="3200" b="0" i="1">
+                <a:solidFill>
+                  <a:srgbClr val="C1FF72"/>
+                </a:solidFill>
+                <a:latin typeface="Instrument Serif"/>
+              </a:rPr>
+              <a:t>control</a:t>
             </a:r>
           </a:p>
         </p:txBody>
@@ -8905,7 +8956,7 @@
         </p:nvSpPr>
         <p:spPr>
           <a:xfrm>
-            <a:off x="640080" y="2194560"/>
+            <a:off x="640080" y="1280160"/>
             <a:ext cx="1097280" cy="25400"/>
           </a:xfrm>
           <a:prstGeom prst="rect">
@@ -8934,11 +8985,9 @@
           </a:fontRef>
         </p:style>
         <p:txBody>
-          <a:bodyPr lIns="0" tIns="0" rIns="0" bIns="0" rtlCol="0" anchor="ctr"/>
-          <a:lstStyle/>
-          <a:p>
-            <a:endParaRPr/>
-          </a:p>
+          <a:bodyPr rtlCol="0" anchor="ctr" lIns="0" rIns="0" tIns="0" bIns="0"/>
+          <a:lstStyle/>
+          <a:p/>
         </p:txBody>
       </p:sp>
       <p:pic>
@@ -8957,8 +9006,8 @@
         </p:blipFill>
         <p:spPr>
           <a:xfrm>
-            <a:off x="396240" y="2423705"/>
-            <a:ext cx="5314406" cy="3311070"/>
+            <a:off x="640080" y="1463040"/>
+            <a:ext cx="6766560" cy="4343400"/>
           </a:xfrm>
           <a:prstGeom prst="rect">
             <a:avLst/>
@@ -8973,8 +9022,8 @@
         </p:nvSpPr>
         <p:spPr>
           <a:xfrm>
-            <a:off x="7680960" y="2651760"/>
-            <a:ext cx="4114800" cy="3520440"/>
+            <a:off x="7680960" y="1463040"/>
+            <a:ext cx="3931920" cy="4343400"/>
           </a:xfrm>
           <a:prstGeom prst="rect">
             <a:avLst/>
@@ -9004,11 +9053,9 @@
           </a:fontRef>
         </p:style>
         <p:txBody>
-          <a:bodyPr lIns="0" tIns="0" rIns="0" bIns="0" rtlCol="0" anchor="ctr"/>
-          <a:lstStyle/>
-          <a:p>
-            <a:endParaRPr/>
-          </a:p>
+          <a:bodyPr rtlCol="0" anchor="ctr" lIns="0" rIns="0" tIns="0" bIns="0"/>
+          <a:lstStyle/>
+          <a:p/>
         </p:txBody>
       </p:sp>
       <p:sp>
@@ -9019,16 +9066,16 @@
         </p:nvSpPr>
         <p:spPr>
           <a:xfrm>
-            <a:off x="7909560" y="2834640"/>
-            <a:ext cx="3657600" cy="274320"/>
-          </a:xfrm>
-          <a:prstGeom prst="rect">
-            <a:avLst/>
-          </a:prstGeom>
-          <a:noFill/>
-        </p:spPr>
-        <p:txBody>
-          <a:bodyPr wrap="square" lIns="0" tIns="0" rIns="0" bIns="0" anchor="t">
+            <a:off x="7909560" y="1645920"/>
+            <a:ext cx="3474720" cy="274320"/>
+          </a:xfrm>
+          <a:prstGeom prst="rect">
+            <a:avLst/>
+          </a:prstGeom>
+          <a:noFill/>
+        </p:spPr>
+        <p:txBody>
+          <a:bodyPr wrap="square" lIns="0" rIns="0" tIns="0" bIns="0" anchor="t">
             <a:spAutoFit/>
           </a:bodyPr>
           <a:lstStyle/>
@@ -9054,16 +9101,16 @@
         </p:nvSpPr>
         <p:spPr>
           <a:xfrm>
-            <a:off x="7909560" y="3108960"/>
-            <a:ext cx="3657600" cy="640080"/>
-          </a:xfrm>
-          <a:prstGeom prst="rect">
-            <a:avLst/>
-          </a:prstGeom>
-          <a:noFill/>
-        </p:spPr>
-        <p:txBody>
-          <a:bodyPr wrap="square" lIns="0" tIns="0" rIns="0" bIns="0" anchor="t">
+            <a:off x="7909560" y="1920240"/>
+            <a:ext cx="3474720" cy="640080"/>
+          </a:xfrm>
+          <a:prstGeom prst="rect">
+            <a:avLst/>
+          </a:prstGeom>
+          <a:noFill/>
+        </p:spPr>
+        <p:txBody>
+          <a:bodyPr wrap="square" lIns="0" rIns="0" tIns="0" bIns="0" anchor="t">
             <a:spAutoFit/>
           </a:bodyPr>
           <a:lstStyle/>
@@ -9089,16 +9136,16 @@
         </p:nvSpPr>
         <p:spPr>
           <a:xfrm>
-            <a:off x="7909560" y="3703320"/>
-            <a:ext cx="3657600" cy="274320"/>
-          </a:xfrm>
-          <a:prstGeom prst="rect">
-            <a:avLst/>
-          </a:prstGeom>
-          <a:noFill/>
-        </p:spPr>
-        <p:txBody>
-          <a:bodyPr wrap="square" lIns="0" tIns="0" rIns="0" bIns="0" anchor="t">
+            <a:off x="7909560" y="2514600"/>
+            <a:ext cx="3474720" cy="274320"/>
+          </a:xfrm>
+          <a:prstGeom prst="rect">
+            <a:avLst/>
+          </a:prstGeom>
+          <a:noFill/>
+        </p:spPr>
+        <p:txBody>
+          <a:bodyPr wrap="square" lIns="0" rIns="0" tIns="0" bIns="0" anchor="t">
             <a:spAutoFit/>
           </a:bodyPr>
           <a:lstStyle/>
@@ -9124,16 +9171,16 @@
         </p:nvSpPr>
         <p:spPr>
           <a:xfrm>
-            <a:off x="7909560" y="4160520"/>
-            <a:ext cx="3657600" cy="274320"/>
-          </a:xfrm>
-          <a:prstGeom prst="rect">
-            <a:avLst/>
-          </a:prstGeom>
-          <a:noFill/>
-        </p:spPr>
-        <p:txBody>
-          <a:bodyPr wrap="square" lIns="0" tIns="0" rIns="0" bIns="0" anchor="t">
+            <a:off x="7909560" y="2971800"/>
+            <a:ext cx="3474720" cy="274320"/>
+          </a:xfrm>
+          <a:prstGeom prst="rect">
+            <a:avLst/>
+          </a:prstGeom>
+          <a:noFill/>
+        </p:spPr>
+        <p:txBody>
+          <a:bodyPr wrap="square" lIns="0" rIns="0" tIns="0" bIns="0" anchor="t">
             <a:spAutoFit/>
           </a:bodyPr>
           <a:lstStyle/>
@@ -9159,16 +9206,16 @@
         </p:nvSpPr>
         <p:spPr>
           <a:xfrm>
-            <a:off x="7909560" y="4434840"/>
-            <a:ext cx="3657600" cy="640080"/>
-          </a:xfrm>
-          <a:prstGeom prst="rect">
-            <a:avLst/>
-          </a:prstGeom>
-          <a:noFill/>
-        </p:spPr>
-        <p:txBody>
-          <a:bodyPr wrap="square" lIns="0" tIns="0" rIns="0" bIns="0" anchor="t">
+            <a:off x="7909560" y="3246120"/>
+            <a:ext cx="3474720" cy="640080"/>
+          </a:xfrm>
+          <a:prstGeom prst="rect">
+            <a:avLst/>
+          </a:prstGeom>
+          <a:noFill/>
+        </p:spPr>
+        <p:txBody>
+          <a:bodyPr wrap="square" lIns="0" rIns="0" tIns="0" bIns="0" anchor="t">
             <a:spAutoFit/>
           </a:bodyPr>
           <a:lstStyle/>
@@ -9194,16 +9241,16 @@
         </p:nvSpPr>
         <p:spPr>
           <a:xfrm>
-            <a:off x="7909560" y="5029200"/>
-            <a:ext cx="3657600" cy="274320"/>
-          </a:xfrm>
-          <a:prstGeom prst="rect">
-            <a:avLst/>
-          </a:prstGeom>
-          <a:noFill/>
-        </p:spPr>
-        <p:txBody>
-          <a:bodyPr wrap="square" lIns="0" tIns="0" rIns="0" bIns="0" anchor="t">
+            <a:off x="7909560" y="3840480"/>
+            <a:ext cx="3474720" cy="274320"/>
+          </a:xfrm>
+          <a:prstGeom prst="rect">
+            <a:avLst/>
+          </a:prstGeom>
+          <a:noFill/>
+        </p:spPr>
+        <p:txBody>
+          <a:bodyPr wrap="square" lIns="0" rIns="0" tIns="0" bIns="0" anchor="t">
             <a:spAutoFit/>
           </a:bodyPr>
           <a:lstStyle/>
@@ -9229,8 +9276,8 @@
         </p:nvSpPr>
         <p:spPr>
           <a:xfrm>
-            <a:off x="7909560" y="5532120"/>
-            <a:ext cx="3657600" cy="12700"/>
+            <a:off x="7909560" y="4343400"/>
+            <a:ext cx="3474720" cy="12700"/>
           </a:xfrm>
           <a:prstGeom prst="rect">
             <a:avLst/>
@@ -9258,11 +9305,9 @@
           </a:fontRef>
         </p:style>
         <p:txBody>
-          <a:bodyPr lIns="0" tIns="0" rIns="0" bIns="0" rtlCol="0" anchor="ctr"/>
-          <a:lstStyle/>
-          <a:p>
-            <a:endParaRPr/>
-          </a:p>
+          <a:bodyPr rtlCol="0" anchor="ctr" lIns="0" rIns="0" tIns="0" bIns="0"/>
+          <a:lstStyle/>
+          <a:p/>
         </p:txBody>
       </p:sp>
       <p:sp>
@@ -9273,16 +9318,16 @@
         </p:nvSpPr>
         <p:spPr>
           <a:xfrm>
-            <a:off x="7909560" y="5623560"/>
-            <a:ext cx="3657600" cy="411480"/>
-          </a:xfrm>
-          <a:prstGeom prst="rect">
-            <a:avLst/>
-          </a:prstGeom>
-          <a:noFill/>
-        </p:spPr>
-        <p:txBody>
-          <a:bodyPr wrap="square" lIns="0" tIns="0" rIns="0" bIns="0" anchor="t">
+            <a:off x="7909560" y="4480560"/>
+            <a:ext cx="3474720" cy="411480"/>
+          </a:xfrm>
+          <a:prstGeom prst="rect">
+            <a:avLst/>
+          </a:prstGeom>
+          <a:noFill/>
+        </p:spPr>
+        <p:txBody>
+          <a:bodyPr wrap="square" lIns="0" rIns="0" tIns="0" bIns="0" anchor="t">
             <a:spAutoFit/>
           </a:bodyPr>
           <a:lstStyle/>
@@ -9308,16 +9353,16 @@
         </p:nvSpPr>
         <p:spPr>
           <a:xfrm>
-            <a:off x="7909560" y="5897880"/>
-            <a:ext cx="3657600" cy="365760"/>
-          </a:xfrm>
-          <a:prstGeom prst="rect">
-            <a:avLst/>
-          </a:prstGeom>
-          <a:noFill/>
-        </p:spPr>
-        <p:txBody>
-          <a:bodyPr wrap="square" lIns="0" tIns="0" rIns="0" bIns="0" anchor="t">
+            <a:off x="7909560" y="4892040"/>
+            <a:ext cx="3474720" cy="365760"/>
+          </a:xfrm>
+          <a:prstGeom prst="rect">
+            <a:avLst/>
+          </a:prstGeom>
+          <a:noFill/>
+        </p:spPr>
+        <p:txBody>
+          <a:bodyPr wrap="square" lIns="0" rIns="0" tIns="0" bIns="0" anchor="t">
             <a:spAutoFit/>
           </a:bodyPr>
           <a:lstStyle/>
@@ -9343,16 +9388,16 @@
         </p:nvSpPr>
         <p:spPr>
           <a:xfrm>
-            <a:off x="640080" y="6355080"/>
-            <a:ext cx="10972800" cy="365760"/>
-          </a:xfrm>
-          <a:prstGeom prst="rect">
-            <a:avLst/>
-          </a:prstGeom>
-          <a:noFill/>
-        </p:spPr>
-        <p:txBody>
-          <a:bodyPr wrap="square" lIns="0" tIns="0" rIns="0" bIns="0" anchor="t">
+            <a:off x="640080" y="5943600"/>
+            <a:ext cx="10972800" cy="274320"/>
+          </a:xfrm>
+          <a:prstGeom prst="rect">
+            <a:avLst/>
+          </a:prstGeom>
+          <a:noFill/>
+        </p:spPr>
+        <p:txBody>
+          <a:bodyPr wrap="square" lIns="0" rIns="0" tIns="0" bIns="0" anchor="t">
             <a:spAutoFit/>
           </a:bodyPr>
           <a:lstStyle/>
@@ -9366,6 +9411,41 @@
                 <a:latin typeface="JetBrains Mono"/>
               </a:rPr>
               <a:t>Whiskers: 95% Wilson confidence intervals. Treatment CI is wide — n is the binding constraint.</a:t>
+            </a:r>
+          </a:p>
+        </p:txBody>
+      </p:sp>
+      <p:sp>
+        <p:nvSpPr>
+          <p:cNvPr id="18" name="TextBox 17"/>
+          <p:cNvSpPr txBox="1"/>
+          <p:nvPr/>
+        </p:nvSpPr>
+        <p:spPr>
+          <a:xfrm>
+            <a:off x="10911535" y="6355080"/>
+            <a:ext cx="1097280" cy="320040"/>
+          </a:xfrm>
+          <a:prstGeom prst="rect">
+            <a:avLst/>
+          </a:prstGeom>
+          <a:noFill/>
+        </p:spPr>
+        <p:txBody>
+          <a:bodyPr wrap="none" lIns="0" rIns="0" tIns="0" bIns="0">
+            <a:spAutoFit/>
+          </a:bodyPr>
+          <a:lstStyle/>
+          <a:p>
+            <a:pPr algn="r"/>
+            <a:r>
+              <a:rPr sz="900">
+                <a:solidFill>
+                  <a:srgbClr val="5A735A"/>
+                </a:solidFill>
+                <a:latin typeface="JetBrains Mono"/>
+              </a:rPr>
+              <a:t>08 / 12</a:t>
             </a:r>
           </a:p>
         </p:txBody>
@@ -9379,7 +9459,7 @@
 </file>
 
 <file path=ppt/slides/slide9.xml><?xml version="1.0" encoding="utf-8"?>
-<p:sld xmlns:a="http://schemas.openxmlformats.org/drawingml/2006/main" xmlns:r="http://schemas.openxmlformats.org/officeDocument/2006/relationships" xmlns:p="http://schemas.openxmlformats.org/presentationml/2006/main">
+<p:sld xmlns:a="http://schemas.openxmlformats.org/drawingml/2006/main" xmlns:p="http://schemas.openxmlformats.org/presentationml/2006/main" xmlns:r="http://schemas.openxmlformats.org/officeDocument/2006/relationships">
   <p:cSld>
     <p:bg>
       <p:bgPr>
@@ -9395,14 +9475,7 @@
         <p:cNvGrpSpPr/>
         <p:nvPr/>
       </p:nvGrpSpPr>
-      <p:grpSpPr>
-        <a:xfrm>
-          <a:off x="0" y="0"/>
-          <a:ext cx="0" cy="0"/>
-          <a:chOff x="0" y="0"/>
-          <a:chExt cx="0" cy="0"/>
-        </a:xfrm>
-      </p:grpSpPr>
+      <p:grpSpPr/>
       <p:sp>
         <p:nvSpPr>
           <p:cNvPr id="2" name="TextBox 1"/>
@@ -9411,23 +9484,23 @@
         </p:nvSpPr>
         <p:spPr>
           <a:xfrm>
-            <a:off x="411480" y="292608"/>
-            <a:ext cx="1828800" cy="457200"/>
-          </a:xfrm>
-          <a:prstGeom prst="rect">
-            <a:avLst/>
-          </a:prstGeom>
-          <a:noFill/>
-        </p:spPr>
-        <p:txBody>
-          <a:bodyPr wrap="none" lIns="0" tIns="0" rIns="0" bIns="0">
+            <a:off x="411480" y="6355080"/>
+            <a:ext cx="1828800" cy="365760"/>
+          </a:xfrm>
+          <a:prstGeom prst="rect">
+            <a:avLst/>
+          </a:prstGeom>
+          <a:noFill/>
+        </p:spPr>
+        <p:txBody>
+          <a:bodyPr wrap="none" lIns="0" rIns="0" tIns="0" bIns="0">
             <a:spAutoFit/>
           </a:bodyPr>
           <a:lstStyle/>
           <a:p>
             <a:pPr algn="l"/>
             <a:r>
-              <a:rPr sz="2000">
+              <a:rPr sz="1600">
                 <a:solidFill>
                   <a:srgbClr val="E8EFE8"/>
                 </a:solidFill>
@@ -9436,7 +9509,7 @@
               <a:t>ren</a:t>
             </a:r>
             <a:r>
-              <a:rPr sz="2000">
+              <a:rPr sz="1600">
                 <a:solidFill>
                   <a:srgbClr val="C1FF72"/>
                 </a:solidFill>
@@ -9455,23 +9528,23 @@
         </p:nvSpPr>
         <p:spPr>
           <a:xfrm>
-            <a:off x="640080" y="914400"/>
-            <a:ext cx="7315200" cy="274320"/>
-          </a:xfrm>
-          <a:prstGeom prst="rect">
-            <a:avLst/>
-          </a:prstGeom>
-          <a:noFill/>
-        </p:spPr>
-        <p:txBody>
-          <a:bodyPr wrap="square" lIns="0" tIns="0" rIns="0" bIns="0" anchor="t">
+            <a:off x="640080" y="457200"/>
+            <a:ext cx="10972800" cy="228600"/>
+          </a:xfrm>
+          <a:prstGeom prst="rect">
+            <a:avLst/>
+          </a:prstGeom>
+          <a:noFill/>
+        </p:spPr>
+        <p:txBody>
+          <a:bodyPr wrap="square" lIns="0" rIns="0" tIns="0" bIns="0" anchor="t">
             <a:spAutoFit/>
           </a:bodyPr>
           <a:lstStyle/>
           <a:p>
             <a:pPr algn="l"/>
             <a:r>
-              <a:rPr sz="1100" b="0" i="0">
+              <a:rPr sz="1000" b="0" i="0">
                 <a:solidFill>
                   <a:srgbClr val="C1FF72"/>
                 </a:solidFill>
@@ -9490,29 +9563,47 @@
         </p:nvSpPr>
         <p:spPr>
           <a:xfrm>
-            <a:off x="640080" y="1280160"/>
-            <a:ext cx="10972800" cy="731520"/>
-          </a:xfrm>
-          <a:prstGeom prst="rect">
-            <a:avLst/>
-          </a:prstGeom>
-          <a:noFill/>
-        </p:spPr>
-        <p:txBody>
-          <a:bodyPr wrap="square" lIns="0" tIns="0" rIns="0" bIns="0" anchor="t">
+            <a:off x="640080" y="713232"/>
+            <a:ext cx="10972800" cy="502920"/>
+          </a:xfrm>
+          <a:prstGeom prst="rect">
+            <a:avLst/>
+          </a:prstGeom>
+          <a:noFill/>
+        </p:spPr>
+        <p:txBody>
+          <a:bodyPr wrap="square" lIns="0" rIns="0" tIns="0" bIns="0" anchor="t">
             <a:spAutoFit/>
           </a:bodyPr>
           <a:lstStyle/>
           <a:p>
             <a:pPr algn="l"/>
             <a:r>
-              <a:rPr sz="3600" b="0" i="0">
+              <a:rPr sz="3200" b="0" i="0">
                 <a:solidFill>
                   <a:srgbClr val="E8EFE8"/>
                 </a:solidFill>
                 <a:latin typeface="Instrument Serif"/>
               </a:rPr>
-              <a:t>Where the treatment cell sits</a:t>
+              <a:t>Where the </a:t>
+            </a:r>
+            <a:r>
+              <a:rPr sz="3200" b="0" i="1">
+                <a:solidFill>
+                  <a:srgbClr val="C1FF72"/>
+                </a:solidFill>
+                <a:latin typeface="Instrument Serif"/>
+              </a:rPr>
+              <a:t>treatment cell</a:t>
+            </a:r>
+            <a:r>
+              <a:rPr sz="3200" b="0" i="0">
+                <a:solidFill>
+                  <a:srgbClr val="E8EFE8"/>
+                </a:solidFill>
+                <a:latin typeface="Instrument Serif"/>
+              </a:rPr>
+              <a:t> sits</a:t>
             </a:r>
           </a:p>
         </p:txBody>
@@ -9525,7 +9616,7 @@
         </p:nvSpPr>
         <p:spPr>
           <a:xfrm>
-            <a:off x="640080" y="2194560"/>
+            <a:off x="640080" y="1280160"/>
             <a:ext cx="1097280" cy="25400"/>
           </a:xfrm>
           <a:prstGeom prst="rect">
@@ -9554,11 +9645,9 @@
           </a:fontRef>
         </p:style>
         <p:txBody>
-          <a:bodyPr lIns="0" tIns="0" rIns="0" bIns="0" rtlCol="0" anchor="ctr"/>
-          <a:lstStyle/>
-          <a:p>
-            <a:endParaRPr/>
-          </a:p>
+          <a:bodyPr rtlCol="0" anchor="ctr" lIns="0" rIns="0" tIns="0" bIns="0"/>
+          <a:lstStyle/>
+          <a:p/>
         </p:txBody>
       </p:sp>
       <p:sp>
@@ -9569,7 +9658,7 @@
         </p:nvSpPr>
         <p:spPr>
           <a:xfrm>
-            <a:off x="640080" y="2296885"/>
+            <a:off x="1325880" y="1463040"/>
             <a:ext cx="2286000" cy="640080"/>
           </a:xfrm>
           <a:prstGeom prst="rect">
@@ -9600,11 +9689,9 @@
           </a:fontRef>
         </p:style>
         <p:txBody>
-          <a:bodyPr lIns="0" tIns="0" rIns="0" bIns="0" rtlCol="0" anchor="ctr"/>
-          <a:lstStyle/>
-          <a:p>
-            <a:endParaRPr/>
-          </a:p>
+          <a:bodyPr rtlCol="0" anchor="ctr" lIns="0" rIns="0" tIns="0" bIns="0"/>
+          <a:lstStyle/>
+          <a:p/>
         </p:txBody>
       </p:sp>
       <p:sp>
@@ -9615,7 +9702,7 @@
         </p:nvSpPr>
         <p:spPr>
           <a:xfrm>
-            <a:off x="2926080" y="2296885"/>
+            <a:off x="3611880" y="1463040"/>
             <a:ext cx="3657600" cy="640080"/>
           </a:xfrm>
           <a:prstGeom prst="rect">
@@ -9646,11 +9733,9 @@
           </a:fontRef>
         </p:style>
         <p:txBody>
-          <a:bodyPr lIns="0" tIns="0" rIns="0" bIns="0" rtlCol="0" anchor="ctr"/>
-          <a:lstStyle/>
-          <a:p>
-            <a:endParaRPr/>
-          </a:p>
+          <a:bodyPr rtlCol="0" anchor="ctr" lIns="0" rIns="0" tIns="0" bIns="0"/>
+          <a:lstStyle/>
+          <a:p/>
         </p:txBody>
       </p:sp>
       <p:sp>
@@ -9661,16 +9746,16 @@
         </p:nvSpPr>
         <p:spPr>
           <a:xfrm>
-            <a:off x="3017520" y="2479765"/>
-            <a:ext cx="3474720" cy="153888"/>
-          </a:xfrm>
-          <a:prstGeom prst="rect">
-            <a:avLst/>
-          </a:prstGeom>
-          <a:noFill/>
-        </p:spPr>
-        <p:txBody>
-          <a:bodyPr wrap="square" lIns="0" tIns="0" rIns="0" bIns="0" anchor="t">
+            <a:off x="3703320" y="1645920"/>
+            <a:ext cx="3474720" cy="274320"/>
+          </a:xfrm>
+          <a:prstGeom prst="rect">
+            <a:avLst/>
+          </a:prstGeom>
+          <a:noFill/>
+        </p:spPr>
+        <p:txBody>
+          <a:bodyPr wrap="square" lIns="0" rIns="0" tIns="0" bIns="0" anchor="t">
             <a:spAutoFit/>
           </a:bodyPr>
           <a:lstStyle/>
@@ -9696,7 +9781,7 @@
         </p:nvSpPr>
         <p:spPr>
           <a:xfrm>
-            <a:off x="6583680" y="2296885"/>
+            <a:off x="7269480" y="1463040"/>
             <a:ext cx="3657600" cy="640080"/>
           </a:xfrm>
           <a:prstGeom prst="rect">
@@ -9727,11 +9812,9 @@
           </a:fontRef>
         </p:style>
         <p:txBody>
-          <a:bodyPr lIns="0" tIns="0" rIns="0" bIns="0" rtlCol="0" anchor="ctr"/>
-          <a:lstStyle/>
-          <a:p>
-            <a:endParaRPr/>
-          </a:p>
+          <a:bodyPr rtlCol="0" anchor="ctr" lIns="0" rIns="0" tIns="0" bIns="0"/>
+          <a:lstStyle/>
+          <a:p/>
         </p:txBody>
       </p:sp>
       <p:sp>
@@ -9742,16 +9825,16 @@
         </p:nvSpPr>
         <p:spPr>
           <a:xfrm>
-            <a:off x="6675120" y="2479765"/>
-            <a:ext cx="3474720" cy="153888"/>
-          </a:xfrm>
-          <a:prstGeom prst="rect">
-            <a:avLst/>
-          </a:prstGeom>
-          <a:noFill/>
-        </p:spPr>
-        <p:txBody>
-          <a:bodyPr wrap="square" lIns="0" tIns="0" rIns="0" bIns="0" anchor="t">
+            <a:off x="7360920" y="1645920"/>
+            <a:ext cx="3474720" cy="274320"/>
+          </a:xfrm>
+          <a:prstGeom prst="rect">
+            <a:avLst/>
+          </a:prstGeom>
+          <a:noFill/>
+        </p:spPr>
+        <p:txBody>
+          <a:bodyPr wrap="square" lIns="0" rIns="0" tIns="0" bIns="0" anchor="t">
             <a:spAutoFit/>
           </a:bodyPr>
           <a:lstStyle/>
@@ -9777,8 +9860,8 @@
         </p:nvSpPr>
         <p:spPr>
           <a:xfrm>
-            <a:off x="640080" y="2936965"/>
-            <a:ext cx="2286000" cy="1554480"/>
+            <a:off x="1325880" y="2103120"/>
+            <a:ext cx="2286000" cy="1691640"/>
           </a:xfrm>
           <a:prstGeom prst="rect">
             <a:avLst/>
@@ -9808,11 +9891,9 @@
           </a:fontRef>
         </p:style>
         <p:txBody>
-          <a:bodyPr lIns="0" tIns="0" rIns="0" bIns="0" rtlCol="0" anchor="ctr"/>
-          <a:lstStyle/>
-          <a:p>
-            <a:endParaRPr/>
-          </a:p>
+          <a:bodyPr rtlCol="0" anchor="ctr" lIns="0" rIns="0" tIns="0" bIns="0"/>
+          <a:lstStyle/>
+          <a:p/>
         </p:txBody>
       </p:sp>
       <p:sp>
@@ -9823,16 +9904,16 @@
         </p:nvSpPr>
         <p:spPr>
           <a:xfrm>
-            <a:off x="777240" y="3531324"/>
-            <a:ext cx="2011680" cy="307777"/>
-          </a:xfrm>
-          <a:prstGeom prst="rect">
-            <a:avLst/>
-          </a:prstGeom>
-          <a:noFill/>
-        </p:spPr>
-        <p:txBody>
-          <a:bodyPr wrap="square" lIns="0" tIns="0" rIns="0" bIns="0" anchor="t">
+            <a:off x="1463039" y="2766059"/>
+            <a:ext cx="2011680" cy="457200"/>
+          </a:xfrm>
+          <a:prstGeom prst="rect">
+            <a:avLst/>
+          </a:prstGeom>
+          <a:noFill/>
+        </p:spPr>
+        <p:txBody>
+          <a:bodyPr wrap="square" lIns="0" rIns="0" tIns="0" bIns="0" anchor="t">
             <a:spAutoFit/>
           </a:bodyPr>
           <a:lstStyle/>
@@ -9858,8 +9939,8 @@
         </p:nvSpPr>
         <p:spPr>
           <a:xfrm>
-            <a:off x="2926080" y="2936965"/>
-            <a:ext cx="3657600" cy="1554480"/>
+            <a:off x="3611880" y="2103120"/>
+            <a:ext cx="3657600" cy="1691640"/>
           </a:xfrm>
           <a:prstGeom prst="rect">
             <a:avLst/>
@@ -9889,11 +9970,9 @@
           </a:fontRef>
         </p:style>
         <p:txBody>
-          <a:bodyPr lIns="0" tIns="0" rIns="0" bIns="0" rtlCol="0" anchor="ctr"/>
-          <a:lstStyle/>
-          <a:p>
-            <a:endParaRPr/>
-          </a:p>
+          <a:bodyPr rtlCol="0" anchor="ctr" lIns="0" rIns="0" tIns="0" bIns="0"/>
+          <a:lstStyle/>
+          <a:p/>
         </p:txBody>
       </p:sp>
       <p:sp>
@@ -9904,8 +9983,8 @@
         </p:nvSpPr>
         <p:spPr>
           <a:xfrm>
-            <a:off x="2971800" y="2982685"/>
-            <a:ext cx="3566160" cy="1463039"/>
+            <a:off x="3657600" y="2148839"/>
+            <a:ext cx="3566160" cy="1600200"/>
           </a:xfrm>
           <a:prstGeom prst="rect">
             <a:avLst/>
@@ -9933,11 +10012,9 @@
           </a:fontRef>
         </p:style>
         <p:txBody>
-          <a:bodyPr lIns="0" tIns="0" rIns="0" bIns="0" rtlCol="0" anchor="ctr"/>
-          <a:lstStyle/>
-          <a:p>
-            <a:endParaRPr/>
-          </a:p>
+          <a:bodyPr rtlCol="0" anchor="ctr" lIns="0" rIns="0" tIns="0" bIns="0"/>
+          <a:lstStyle/>
+          <a:p/>
         </p:txBody>
       </p:sp>
       <p:sp>
@@ -9948,16 +10025,16 @@
         </p:nvSpPr>
         <p:spPr>
           <a:xfrm>
-            <a:off x="3063240" y="3074125"/>
-            <a:ext cx="3383280" cy="123111"/>
-          </a:xfrm>
-          <a:prstGeom prst="rect">
-            <a:avLst/>
-          </a:prstGeom>
-          <a:noFill/>
-        </p:spPr>
-        <p:txBody>
-          <a:bodyPr wrap="square" lIns="0" tIns="0" rIns="0" bIns="0" anchor="t">
+            <a:off x="3749040" y="2240279"/>
+            <a:ext cx="3383280" cy="274320"/>
+          </a:xfrm>
+          <a:prstGeom prst="rect">
+            <a:avLst/>
+          </a:prstGeom>
+          <a:noFill/>
+        </p:spPr>
+        <p:txBody>
+          <a:bodyPr wrap="square" lIns="0" rIns="0" tIns="0" bIns="0" anchor="t">
             <a:spAutoFit/>
           </a:bodyPr>
           <a:lstStyle/>
@@ -9983,16 +10060,16 @@
         </p:nvSpPr>
         <p:spPr>
           <a:xfrm>
-            <a:off x="3017520" y="3348445"/>
-            <a:ext cx="3474720" cy="461665"/>
-          </a:xfrm>
-          <a:prstGeom prst="rect">
-            <a:avLst/>
-          </a:prstGeom>
-          <a:noFill/>
-        </p:spPr>
-        <p:txBody>
-          <a:bodyPr wrap="square" lIns="0" tIns="0" rIns="0" bIns="0" anchor="t">
+            <a:off x="3703320" y="2514600"/>
+            <a:ext cx="3474720" cy="640080"/>
+          </a:xfrm>
+          <a:prstGeom prst="rect">
+            <a:avLst/>
+          </a:prstGeom>
+          <a:noFill/>
+        </p:spPr>
+        <p:txBody>
+          <a:bodyPr wrap="square" lIns="0" rIns="0" tIns="0" bIns="0" anchor="t">
             <a:spAutoFit/>
           </a:bodyPr>
           <a:lstStyle/>
@@ -10018,16 +10095,16 @@
         </p:nvSpPr>
         <p:spPr>
           <a:xfrm>
-            <a:off x="3017520" y="3988525"/>
-            <a:ext cx="3474720" cy="153888"/>
-          </a:xfrm>
-          <a:prstGeom prst="rect">
-            <a:avLst/>
-          </a:prstGeom>
-          <a:noFill/>
-        </p:spPr>
-        <p:txBody>
-          <a:bodyPr wrap="square" lIns="0" tIns="0" rIns="0" bIns="0" anchor="t">
+            <a:off x="3703320" y="3154679"/>
+            <a:ext cx="3474720" cy="274320"/>
+          </a:xfrm>
+          <a:prstGeom prst="rect">
+            <a:avLst/>
+          </a:prstGeom>
+          <a:noFill/>
+        </p:spPr>
+        <p:txBody>
+          <a:bodyPr wrap="square" lIns="0" rIns="0" tIns="0" bIns="0" anchor="t">
             <a:spAutoFit/>
           </a:bodyPr>
           <a:lstStyle/>
@@ -10053,8 +10130,8 @@
         </p:nvSpPr>
         <p:spPr>
           <a:xfrm>
-            <a:off x="6583680" y="2936965"/>
-            <a:ext cx="3657600" cy="1554480"/>
+            <a:off x="7269480" y="2103120"/>
+            <a:ext cx="3657600" cy="1691640"/>
           </a:xfrm>
           <a:prstGeom prst="rect">
             <a:avLst/>
@@ -10084,11 +10161,9 @@
           </a:fontRef>
         </p:style>
         <p:txBody>
-          <a:bodyPr lIns="0" tIns="0" rIns="0" bIns="0" rtlCol="0" anchor="ctr"/>
-          <a:lstStyle/>
-          <a:p>
-            <a:endParaRPr/>
-          </a:p>
+          <a:bodyPr rtlCol="0" anchor="ctr" lIns="0" rIns="0" tIns="0" bIns="0"/>
+          <a:lstStyle/>
+          <a:p/>
         </p:txBody>
       </p:sp>
       <p:sp>
@@ -10099,23 +10174,23 @@
         </p:nvSpPr>
         <p:spPr>
           <a:xfrm>
-            <a:off x="6675120" y="3348445"/>
-            <a:ext cx="3474720" cy="461665"/>
-          </a:xfrm>
-          <a:prstGeom prst="rect">
-            <a:avLst/>
-          </a:prstGeom>
-          <a:noFill/>
-        </p:spPr>
-        <p:txBody>
-          <a:bodyPr wrap="square" lIns="0" tIns="0" rIns="0" bIns="0" anchor="t">
+            <a:off x="7360920" y="2514600"/>
+            <a:ext cx="3474720" cy="640080"/>
+          </a:xfrm>
+          <a:prstGeom prst="rect">
+            <a:avLst/>
+          </a:prstGeom>
+          <a:noFill/>
+        </p:spPr>
+        <p:txBody>
+          <a:bodyPr wrap="square" lIns="0" rIns="0" tIns="0" bIns="0" anchor="t">
             <a:spAutoFit/>
           </a:bodyPr>
           <a:lstStyle/>
           <a:p>
             <a:pPr algn="ctr"/>
             <a:r>
-              <a:rPr sz="3000" b="0" i="0" dirty="0">
+              <a:rPr sz="3000" b="0" i="0">
                 <a:solidFill>
                   <a:srgbClr val="C1FF72"/>
                 </a:solidFill>
@@ -10134,16 +10209,16 @@
         </p:nvSpPr>
         <p:spPr>
           <a:xfrm>
-            <a:off x="6675120" y="3988525"/>
-            <a:ext cx="3474720" cy="153888"/>
-          </a:xfrm>
-          <a:prstGeom prst="rect">
-            <a:avLst/>
-          </a:prstGeom>
-          <a:noFill/>
-        </p:spPr>
-        <p:txBody>
-          <a:bodyPr wrap="square" lIns="0" tIns="0" rIns="0" bIns="0" anchor="t">
+            <a:off x="7360920" y="3154679"/>
+            <a:ext cx="3474720" cy="274320"/>
+          </a:xfrm>
+          <a:prstGeom prst="rect">
+            <a:avLst/>
+          </a:prstGeom>
+          <a:noFill/>
+        </p:spPr>
+        <p:txBody>
+          <a:bodyPr wrap="square" lIns="0" rIns="0" tIns="0" bIns="0" anchor="t">
             <a:spAutoFit/>
           </a:bodyPr>
           <a:lstStyle/>
@@ -10169,8 +10244,8 @@
         </p:nvSpPr>
         <p:spPr>
           <a:xfrm>
-            <a:off x="640080" y="4491445"/>
-            <a:ext cx="2286000" cy="1554480"/>
+            <a:off x="1325880" y="3794760"/>
+            <a:ext cx="2286000" cy="1691640"/>
           </a:xfrm>
           <a:prstGeom prst="rect">
             <a:avLst/>
@@ -10200,11 +10275,9 @@
           </a:fontRef>
         </p:style>
         <p:txBody>
-          <a:bodyPr lIns="0" tIns="0" rIns="0" bIns="0" rtlCol="0" anchor="ctr"/>
-          <a:lstStyle/>
-          <a:p>
-            <a:endParaRPr/>
-          </a:p>
+          <a:bodyPr rtlCol="0" anchor="ctr" lIns="0" rIns="0" tIns="0" bIns="0"/>
+          <a:lstStyle/>
+          <a:p/>
         </p:txBody>
       </p:sp>
       <p:sp>
@@ -10215,16 +10288,16 @@
         </p:nvSpPr>
         <p:spPr>
           <a:xfrm>
-            <a:off x="777240" y="5085805"/>
-            <a:ext cx="2011680" cy="153888"/>
-          </a:xfrm>
-          <a:prstGeom prst="rect">
-            <a:avLst/>
-          </a:prstGeom>
-          <a:noFill/>
-        </p:spPr>
-        <p:txBody>
-          <a:bodyPr wrap="square" lIns="0" tIns="0" rIns="0" bIns="0" anchor="t">
+            <a:off x="1463039" y="4457700"/>
+            <a:ext cx="2011680" cy="457200"/>
+          </a:xfrm>
+          <a:prstGeom prst="rect">
+            <a:avLst/>
+          </a:prstGeom>
+          <a:noFill/>
+        </p:spPr>
+        <p:txBody>
+          <a:bodyPr wrap="square" lIns="0" rIns="0" tIns="0" bIns="0" anchor="t">
             <a:spAutoFit/>
           </a:bodyPr>
           <a:lstStyle/>
@@ -10250,8 +10323,8 @@
         </p:nvSpPr>
         <p:spPr>
           <a:xfrm>
-            <a:off x="2926080" y="4491445"/>
-            <a:ext cx="3657600" cy="1554480"/>
+            <a:off x="3611880" y="3794760"/>
+            <a:ext cx="3657600" cy="1691640"/>
           </a:xfrm>
           <a:prstGeom prst="rect">
             <a:avLst/>
@@ -10281,11 +10354,9 @@
           </a:fontRef>
         </p:style>
         <p:txBody>
-          <a:bodyPr lIns="0" tIns="0" rIns="0" bIns="0" rtlCol="0" anchor="ctr"/>
-          <a:lstStyle/>
-          <a:p>
-            <a:endParaRPr/>
-          </a:p>
+          <a:bodyPr rtlCol="0" anchor="ctr" lIns="0" rIns="0" tIns="0" bIns="0"/>
+          <a:lstStyle/>
+          <a:p/>
         </p:txBody>
       </p:sp>
       <p:sp>
@@ -10296,16 +10367,16 @@
         </p:nvSpPr>
         <p:spPr>
           <a:xfrm>
-            <a:off x="3017520" y="4902925"/>
-            <a:ext cx="3474720" cy="461665"/>
-          </a:xfrm>
-          <a:prstGeom prst="rect">
-            <a:avLst/>
-          </a:prstGeom>
-          <a:noFill/>
-        </p:spPr>
-        <p:txBody>
-          <a:bodyPr wrap="square" lIns="0" tIns="0" rIns="0" bIns="0" anchor="t">
+            <a:off x="3703320" y="4206240"/>
+            <a:ext cx="3474720" cy="640080"/>
+          </a:xfrm>
+          <a:prstGeom prst="rect">
+            <a:avLst/>
+          </a:prstGeom>
+          <a:noFill/>
+        </p:spPr>
+        <p:txBody>
+          <a:bodyPr wrap="square" lIns="0" rIns="0" tIns="0" bIns="0" anchor="t">
             <a:spAutoFit/>
           </a:bodyPr>
           <a:lstStyle/>
@@ -10331,16 +10402,16 @@
         </p:nvSpPr>
         <p:spPr>
           <a:xfrm>
-            <a:off x="3017520" y="5543005"/>
-            <a:ext cx="3474720" cy="153888"/>
-          </a:xfrm>
-          <a:prstGeom prst="rect">
-            <a:avLst/>
-          </a:prstGeom>
-          <a:noFill/>
-        </p:spPr>
-        <p:txBody>
-          <a:bodyPr wrap="square" lIns="0" tIns="0" rIns="0" bIns="0" anchor="t">
+            <a:off x="3703320" y="4846320"/>
+            <a:ext cx="3474720" cy="274320"/>
+          </a:xfrm>
+          <a:prstGeom prst="rect">
+            <a:avLst/>
+          </a:prstGeom>
+          <a:noFill/>
+        </p:spPr>
+        <p:txBody>
+          <a:bodyPr wrap="square" lIns="0" rIns="0" tIns="0" bIns="0" anchor="t">
             <a:spAutoFit/>
           </a:bodyPr>
           <a:lstStyle/>
@@ -10366,8 +10437,8 @@
         </p:nvSpPr>
         <p:spPr>
           <a:xfrm>
-            <a:off x="6583680" y="4491445"/>
-            <a:ext cx="3657600" cy="1554480"/>
+            <a:off x="7269480" y="3794760"/>
+            <a:ext cx="3657600" cy="1691640"/>
           </a:xfrm>
           <a:prstGeom prst="rect">
             <a:avLst/>
@@ -10397,11 +10468,9 @@
           </a:fontRef>
         </p:style>
         <p:txBody>
-          <a:bodyPr lIns="0" tIns="0" rIns="0" bIns="0" rtlCol="0" anchor="ctr"/>
-          <a:lstStyle/>
-          <a:p>
-            <a:endParaRPr/>
-          </a:p>
+          <a:bodyPr rtlCol="0" anchor="ctr" lIns="0" rIns="0" tIns="0" bIns="0"/>
+          <a:lstStyle/>
+          <a:p/>
         </p:txBody>
       </p:sp>
       <p:sp>
@@ -10412,16 +10481,16 @@
         </p:nvSpPr>
         <p:spPr>
           <a:xfrm>
-            <a:off x="6675120" y="4902925"/>
-            <a:ext cx="3474720" cy="461665"/>
-          </a:xfrm>
-          <a:prstGeom prst="rect">
-            <a:avLst/>
-          </a:prstGeom>
-          <a:noFill/>
-        </p:spPr>
-        <p:txBody>
-          <a:bodyPr wrap="square" lIns="0" tIns="0" rIns="0" bIns="0" anchor="t">
+            <a:off x="7360920" y="4206240"/>
+            <a:ext cx="3474720" cy="640080"/>
+          </a:xfrm>
+          <a:prstGeom prst="rect">
+            <a:avLst/>
+          </a:prstGeom>
+          <a:noFill/>
+        </p:spPr>
+        <p:txBody>
+          <a:bodyPr wrap="square" lIns="0" rIns="0" tIns="0" bIns="0" anchor="t">
             <a:spAutoFit/>
           </a:bodyPr>
           <a:lstStyle/>
@@ -10447,16 +10516,16 @@
         </p:nvSpPr>
         <p:spPr>
           <a:xfrm>
-            <a:off x="6675120" y="5543005"/>
-            <a:ext cx="3474720" cy="153888"/>
-          </a:xfrm>
-          <a:prstGeom prst="rect">
-            <a:avLst/>
-          </a:prstGeom>
-          <a:noFill/>
-        </p:spPr>
-        <p:txBody>
-          <a:bodyPr wrap="square" lIns="0" tIns="0" rIns="0" bIns="0" anchor="t">
+            <a:off x="7360920" y="4846320"/>
+            <a:ext cx="3474720" cy="274320"/>
+          </a:xfrm>
+          <a:prstGeom prst="rect">
+            <a:avLst/>
+          </a:prstGeom>
+          <a:noFill/>
+        </p:spPr>
+        <p:txBody>
+          <a:bodyPr wrap="square" lIns="0" rIns="0" tIns="0" bIns="0" anchor="t">
             <a:spAutoFit/>
           </a:bodyPr>
           <a:lstStyle/>
@@ -10482,16 +10551,16 @@
         </p:nvSpPr>
         <p:spPr>
           <a:xfrm>
-            <a:off x="640080" y="6355080"/>
-            <a:ext cx="10972800" cy="365760"/>
-          </a:xfrm>
-          <a:prstGeom prst="rect">
-            <a:avLst/>
-          </a:prstGeom>
-          <a:noFill/>
-        </p:spPr>
-        <p:txBody>
-          <a:bodyPr wrap="square" lIns="0" tIns="0" rIns="0" bIns="0" anchor="t">
+            <a:off x="640080" y="5943600"/>
+            <a:ext cx="10972800" cy="274320"/>
+          </a:xfrm>
+          <a:prstGeom prst="rect">
+            <a:avLst/>
+          </a:prstGeom>
+          <a:noFill/>
+        </p:spPr>
+        <p:txBody>
+          <a:bodyPr wrap="square" lIns="0" rIns="0" tIns="0" bIns="0" anchor="t">
             <a:spAutoFit/>
           </a:bodyPr>
           <a:lstStyle/>
@@ -10505,6 +10574,41 @@
                 <a:latin typeface="JetBrains Mono"/>
               </a:rPr>
               <a:t>Accent-bordered cell = treatment. The other three pool into control.</a:t>
+            </a:r>
+          </a:p>
+        </p:txBody>
+      </p:sp>
+      <p:sp>
+        <p:nvSpPr>
+          <p:cNvPr id="30" name="TextBox 29"/>
+          <p:cNvSpPr txBox="1"/>
+          <p:nvPr/>
+        </p:nvSpPr>
+        <p:spPr>
+          <a:xfrm>
+            <a:off x="10911535" y="6355080"/>
+            <a:ext cx="1097280" cy="320040"/>
+          </a:xfrm>
+          <a:prstGeom prst="rect">
+            <a:avLst/>
+          </a:prstGeom>
+          <a:noFill/>
+        </p:spPr>
+        <p:txBody>
+          <a:bodyPr wrap="none" lIns="0" rIns="0" tIns="0" bIns="0">
+            <a:spAutoFit/>
+          </a:bodyPr>
+          <a:lstStyle/>
+          <a:p>
+            <a:pPr algn="r"/>
+            <a:r>
+              <a:rPr sz="900">
+                <a:solidFill>
+                  <a:srgbClr val="5A735A"/>
+                </a:solidFill>
+                <a:latin typeface="JetBrains Mono"/>
+              </a:rPr>
+              <a:t>09 / 12</a:t>
             </a:r>
           </a:p>
         </p:txBody>
